--- a/output/hsk2/buoi01_moian_vitquay/slide/Buoi-01-Moian-Vitquay.pptx
+++ b/output/hsk2/buoi01_moian_vitquay/slide/Buoi-01-Moian-Vitquay.pptx
@@ -3180,7 +3180,9 @@
           </a:bodyPr>
           <a:lstStyle/>
           <a:p>
-            <a:pPr algn="l"/>
+            <a:pPr algn="l">
+              <a:buNone/>
+            </a:pPr>
             <a:r>
               <a:rPr sz="4400" b="1" i="0">
                 <a:solidFill>
@@ -3198,6 +3200,7 @@
               <a:spcBef>
                 <a:spcPts val="1000"/>
               </a:spcBef>
+              <a:buNone/>
             </a:pPr>
             <a:r>
               <a:rPr sz="2000" b="0" i="0">
@@ -3308,7 +3311,7 @@
         <p:spPr>
           <a:xfrm>
             <a:off x="0" y="0"/>
-            <a:ext cx="12191695" cy="1207008"/>
+            <a:ext cx="12191695" cy="1337056"/>
           </a:xfrm>
           <a:prstGeom prst="rect">
             <a:avLst/>
@@ -3352,7 +3355,7 @@
         <p:spPr>
           <a:xfrm>
             <a:off x="548640" y="146304"/>
-            <a:ext cx="1371600" cy="384048"/>
+            <a:ext cx="1402486" cy="384048"/>
           </a:xfrm>
           <a:prstGeom prst="roundRect">
             <a:avLst/>
@@ -3380,10 +3383,12 @@
           </a:fontRef>
         </p:style>
         <p:txBody>
-          <a:bodyPr rtlCol="0" anchor="ctr" wrap="square" tIns="25400" bIns="25400"/>
-          <a:lstStyle/>
-          <a:p>
-            <a:pPr algn="ctr"/>
+          <a:bodyPr rtlCol="0" anchor="ctr" wrap="none" tIns="25400" bIns="25400"/>
+          <a:lstStyle/>
+          <a:p>
+            <a:pPr algn="ctr">
+              <a:buNone/>
+            </a:pPr>
             <a:r>
               <a:rPr sz="1600" b="1" i="0">
                 <a:solidFill>
@@ -3407,7 +3412,7 @@
         <p:spPr>
           <a:xfrm>
             <a:off x="548640" y="566928"/>
-            <a:ext cx="11094415" cy="566928"/>
+            <a:ext cx="11094415" cy="642112"/>
           </a:xfrm>
           <a:prstGeom prst="rect">
             <a:avLst/>
@@ -3420,6 +3425,9 @@
           </a:bodyPr>
           <a:lstStyle/>
           <a:p>
+            <a:pPr>
+              <a:buNone/>
+            </a:pPr>
             <a:r>
               <a:rPr sz="2700" b="1" i="0">
                 <a:solidFill>
@@ -3450,7 +3458,7 @@
         </p:blipFill>
         <p:spPr>
           <a:xfrm>
-            <a:off x="1768775" y="1481328"/>
+            <a:off x="1768775" y="1611376"/>
             <a:ext cx="2219384" cy="3108960"/>
           </a:xfrm>
           <a:prstGeom prst="rect">
@@ -3466,8 +3474,8 @@
         </p:nvSpPr>
         <p:spPr>
           <a:xfrm>
-            <a:off x="548640" y="4727448"/>
-            <a:ext cx="4659654" cy="1764792"/>
+            <a:off x="548640" y="4857496"/>
+            <a:ext cx="4659654" cy="1634744"/>
           </a:xfrm>
           <a:prstGeom prst="rect">
             <a:avLst/>
@@ -3480,7 +3488,9 @@
           </a:bodyPr>
           <a:lstStyle/>
           <a:p>
-            <a:pPr algn="ctr"/>
+            <a:pPr algn="ctr">
+              <a:buNone/>
+            </a:pPr>
             <a:r>
               <a:rPr sz="5400" b="1" i="0">
                 <a:solidFill>
@@ -3509,6 +3519,7 @@
               <a:spcBef>
                 <a:spcPts val="600"/>
               </a:spcBef>
+              <a:buNone/>
             </a:pPr>
             <a:r>
               <a:rPr sz="2200" b="0" i="1">
@@ -3527,6 +3538,7 @@
               <a:spcBef>
                 <a:spcPts val="400"/>
               </a:spcBef>
+              <a:buNone/>
             </a:pPr>
             <a:r>
               <a:rPr sz="1800" b="0" i="0">
@@ -3550,8 +3562,8 @@
         </p:nvSpPr>
         <p:spPr>
           <a:xfrm>
-            <a:off x="5665494" y="1481328"/>
-            <a:ext cx="5977561" cy="5010912"/>
+            <a:off x="5665494" y="1611376"/>
+            <a:ext cx="5977561" cy="4880864"/>
           </a:xfrm>
           <a:prstGeom prst="rect">
             <a:avLst/>
@@ -3564,6 +3576,9 @@
           </a:bodyPr>
           <a:lstStyle/>
           <a:p>
+            <a:pPr>
+              <a:buNone/>
+            </a:pPr>
             <a:r>
               <a:rPr sz="1600" b="1" i="0">
                 <a:solidFill>
@@ -3581,6 +3596,7 @@
               <a:spcBef>
                 <a:spcPts val="2200"/>
               </a:spcBef>
+              <a:buNone/>
             </a:pPr>
             <a:r>
               <a:rPr sz="1800" b="1" i="0">
@@ -3610,6 +3626,7 @@
               <a:spcBef>
                 <a:spcPts val="200"/>
               </a:spcBef>
+              <a:buNone/>
             </a:pPr>
             <a:r>
               <a:rPr sz="1400" b="0" i="1">
@@ -3628,6 +3645,7 @@
               <a:spcBef>
                 <a:spcPts val="100"/>
               </a:spcBef>
+              <a:buNone/>
             </a:pPr>
             <a:r>
               <a:rPr sz="1400" b="0" i="0">
@@ -3646,6 +3664,7 @@
               <a:spcBef>
                 <a:spcPts val="2200"/>
               </a:spcBef>
+              <a:buNone/>
             </a:pPr>
             <a:r>
               <a:rPr sz="1800" b="1" i="0">
@@ -3675,6 +3694,7 @@
               <a:spcBef>
                 <a:spcPts val="200"/>
               </a:spcBef>
+              <a:buNone/>
             </a:pPr>
             <a:r>
               <a:rPr sz="1400" b="0" i="1">
@@ -3693,6 +3713,7 @@
               <a:spcBef>
                 <a:spcPts val="100"/>
               </a:spcBef>
+              <a:buNone/>
             </a:pPr>
             <a:r>
               <a:rPr sz="1400" b="0" i="0">
@@ -3711,6 +3732,7 @@
               <a:spcBef>
                 <a:spcPts val="2200"/>
               </a:spcBef>
+              <a:buNone/>
             </a:pPr>
             <a:r>
               <a:rPr sz="1800" b="1" i="0">
@@ -3740,6 +3762,7 @@
               <a:spcBef>
                 <a:spcPts val="200"/>
               </a:spcBef>
+              <a:buNone/>
             </a:pPr>
             <a:r>
               <a:rPr sz="1400" b="0" i="1">
@@ -3758,6 +3781,7 @@
               <a:spcBef>
                 <a:spcPts val="100"/>
               </a:spcBef>
+              <a:buNone/>
             </a:pPr>
             <a:r>
               <a:rPr sz="1400" b="0" i="0">
@@ -3809,6 +3833,45 @@
           </a:ln>
         </p:spPr>
       </p:pic>
+      <p:sp>
+        <p:nvSpPr>
+          <p:cNvPr id="10" name="TextBox 9"/>
+          <p:cNvSpPr txBox="1"/>
+          <p:nvPr/>
+        </p:nvSpPr>
+        <p:spPr>
+          <a:xfrm>
+            <a:off x="548640" y="6492240"/>
+            <a:ext cx="11094415" cy="274320"/>
+          </a:xfrm>
+          <a:prstGeom prst="rect">
+            <a:avLst/>
+          </a:prstGeom>
+          <a:noFill/>
+        </p:spPr>
+        <p:txBody>
+          <a:bodyPr wrap="square" anchor="ctr">
+            <a:spAutoFit/>
+          </a:bodyPr>
+          <a:lstStyle/>
+          <a:p>
+            <a:pPr>
+              <a:buNone/>
+            </a:pPr>
+            <a:r>
+              <a:rPr sz="1100" b="0" i="1">
+                <a:solidFill>
+                  <a:srgbClr val="6B7683"/>
+                </a:solidFill>
+                <a:latin typeface="Calibri"/>
+                <a:ea typeface="Microsoft YaHei"/>
+                <a:cs typeface="Microsoft YaHei"/>
+              </a:rPr>
+              <a:t>📖 游 = 氵(shuǐ, nước) + phần bên phải như LÁ CỜ phấp phới → trôi nổi tự do trong nước → "bơi" → 旅游 = đi du lịch</a:t>
+            </a:r>
+          </a:p>
+        </p:txBody>
+      </p:sp>
     </p:spTree>
   </p:cSld>
   <p:clrMapOvr>
@@ -3902,7 +3965,7 @@
         <p:spPr>
           <a:xfrm>
             <a:off x="0" y="0"/>
-            <a:ext cx="12191695" cy="1207008"/>
+            <a:ext cx="12191695" cy="1337056"/>
           </a:xfrm>
           <a:prstGeom prst="rect">
             <a:avLst/>
@@ -3946,7 +4009,7 @@
         <p:spPr>
           <a:xfrm>
             <a:off x="548640" y="146304"/>
-            <a:ext cx="1371600" cy="384048"/>
+            <a:ext cx="1402486" cy="384048"/>
           </a:xfrm>
           <a:prstGeom prst="roundRect">
             <a:avLst/>
@@ -3974,10 +4037,12 @@
           </a:fontRef>
         </p:style>
         <p:txBody>
-          <a:bodyPr rtlCol="0" anchor="ctr" wrap="square" tIns="25400" bIns="25400"/>
-          <a:lstStyle/>
-          <a:p>
-            <a:pPr algn="ctr"/>
+          <a:bodyPr rtlCol="0" anchor="ctr" wrap="none" tIns="25400" bIns="25400"/>
+          <a:lstStyle/>
+          <a:p>
+            <a:pPr algn="ctr">
+              <a:buNone/>
+            </a:pPr>
             <a:r>
               <a:rPr sz="1600" b="1" i="0">
                 <a:solidFill>
@@ -4001,7 +4066,7 @@
         <p:spPr>
           <a:xfrm>
             <a:off x="548640" y="566928"/>
-            <a:ext cx="11094415" cy="566928"/>
+            <a:ext cx="11094415" cy="642112"/>
           </a:xfrm>
           <a:prstGeom prst="rect">
             <a:avLst/>
@@ -4014,6 +4079,9 @@
           </a:bodyPr>
           <a:lstStyle/>
           <a:p>
+            <a:pPr>
+              <a:buNone/>
+            </a:pPr>
             <a:r>
               <a:rPr sz="2700" b="1" i="0">
                 <a:solidFill>
@@ -4044,7 +4112,7 @@
         </p:blipFill>
         <p:spPr>
           <a:xfrm>
-            <a:off x="1323987" y="1481328"/>
+            <a:off x="1323987" y="1611376"/>
             <a:ext cx="3108960" cy="3108960"/>
           </a:xfrm>
           <a:prstGeom prst="rect">
@@ -4060,8 +4128,8 @@
         </p:nvSpPr>
         <p:spPr>
           <a:xfrm>
-            <a:off x="548640" y="4727448"/>
-            <a:ext cx="4659654" cy="1764792"/>
+            <a:off x="548640" y="4857496"/>
+            <a:ext cx="4659654" cy="1634744"/>
           </a:xfrm>
           <a:prstGeom prst="rect">
             <a:avLst/>
@@ -4074,7 +4142,9 @@
           </a:bodyPr>
           <a:lstStyle/>
           <a:p>
-            <a:pPr algn="ctr"/>
+            <a:pPr algn="ctr">
+              <a:buNone/>
+            </a:pPr>
             <a:r>
               <a:rPr sz="5400" b="1" i="0">
                 <a:solidFill>
@@ -4103,6 +4173,7 @@
               <a:spcBef>
                 <a:spcPts val="600"/>
               </a:spcBef>
+              <a:buNone/>
             </a:pPr>
             <a:r>
               <a:rPr sz="2200" b="0" i="1">
@@ -4121,6 +4192,7 @@
               <a:spcBef>
                 <a:spcPts val="400"/>
               </a:spcBef>
+              <a:buNone/>
             </a:pPr>
             <a:r>
               <a:rPr sz="1800" b="0" i="0">
@@ -4144,8 +4216,8 @@
         </p:nvSpPr>
         <p:spPr>
           <a:xfrm>
-            <a:off x="5665494" y="1481328"/>
-            <a:ext cx="5977561" cy="5010912"/>
+            <a:off x="5665494" y="1611376"/>
+            <a:ext cx="5977561" cy="4880864"/>
           </a:xfrm>
           <a:prstGeom prst="rect">
             <a:avLst/>
@@ -4158,6 +4230,9 @@
           </a:bodyPr>
           <a:lstStyle/>
           <a:p>
+            <a:pPr>
+              <a:buNone/>
+            </a:pPr>
             <a:r>
               <a:rPr sz="1600" b="1" i="0">
                 <a:solidFill>
@@ -4175,6 +4250,7 @@
               <a:spcBef>
                 <a:spcPts val="2200"/>
               </a:spcBef>
+              <a:buNone/>
             </a:pPr>
             <a:r>
               <a:rPr sz="1800" b="1" i="0">
@@ -4204,6 +4280,7 @@
               <a:spcBef>
                 <a:spcPts val="200"/>
               </a:spcBef>
+              <a:buNone/>
             </a:pPr>
             <a:r>
               <a:rPr sz="1400" b="0" i="1">
@@ -4222,6 +4299,7 @@
               <a:spcBef>
                 <a:spcPts val="100"/>
               </a:spcBef>
+              <a:buNone/>
             </a:pPr>
             <a:r>
               <a:rPr sz="1400" b="0" i="0">
@@ -4240,6 +4318,7 @@
               <a:spcBef>
                 <a:spcPts val="2200"/>
               </a:spcBef>
+              <a:buNone/>
             </a:pPr>
             <a:r>
               <a:rPr sz="1800" b="1" i="0">
@@ -4269,6 +4348,7 @@
               <a:spcBef>
                 <a:spcPts val="200"/>
               </a:spcBef>
+              <a:buNone/>
             </a:pPr>
             <a:r>
               <a:rPr sz="1400" b="0" i="1">
@@ -4287,6 +4367,7 @@
               <a:spcBef>
                 <a:spcPts val="100"/>
               </a:spcBef>
+              <a:buNone/>
             </a:pPr>
             <a:r>
               <a:rPr sz="1400" b="0" i="0">
@@ -4305,6 +4386,7 @@
               <a:spcBef>
                 <a:spcPts val="2200"/>
               </a:spcBef>
+              <a:buNone/>
             </a:pPr>
             <a:r>
               <a:rPr sz="1800" b="1" i="0">
@@ -4334,6 +4416,7 @@
               <a:spcBef>
                 <a:spcPts val="200"/>
               </a:spcBef>
+              <a:buNone/>
             </a:pPr>
             <a:r>
               <a:rPr sz="1400" b="0" i="1">
@@ -4352,6 +4435,7 @@
               <a:spcBef>
                 <a:spcPts val="100"/>
               </a:spcBef>
+              <a:buNone/>
             </a:pPr>
             <a:r>
               <a:rPr sz="1400" b="0" i="0">
@@ -4496,7 +4580,7 @@
         <p:spPr>
           <a:xfrm>
             <a:off x="0" y="0"/>
-            <a:ext cx="12191695" cy="1207008"/>
+            <a:ext cx="12191695" cy="1337056"/>
           </a:xfrm>
           <a:prstGeom prst="rect">
             <a:avLst/>
@@ -4540,7 +4624,7 @@
         <p:spPr>
           <a:xfrm>
             <a:off x="548640" y="146304"/>
-            <a:ext cx="1371600" cy="384048"/>
+            <a:ext cx="1520830" cy="384048"/>
           </a:xfrm>
           <a:prstGeom prst="roundRect">
             <a:avLst/>
@@ -4568,10 +4652,12 @@
           </a:fontRef>
         </p:style>
         <p:txBody>
-          <a:bodyPr rtlCol="0" anchor="ctr" wrap="square" tIns="25400" bIns="25400"/>
-          <a:lstStyle/>
-          <a:p>
-            <a:pPr algn="ctr"/>
+          <a:bodyPr rtlCol="0" anchor="ctr" wrap="none" tIns="25400" bIns="25400"/>
+          <a:lstStyle/>
+          <a:p>
+            <a:pPr algn="ctr">
+              <a:buNone/>
+            </a:pPr>
             <a:r>
               <a:rPr sz="1600" b="1" i="0">
                 <a:solidFill>
@@ -4595,7 +4681,7 @@
         <p:spPr>
           <a:xfrm>
             <a:off x="548640" y="566928"/>
-            <a:ext cx="11094415" cy="566928"/>
+            <a:ext cx="11094415" cy="642112"/>
           </a:xfrm>
           <a:prstGeom prst="rect">
             <a:avLst/>
@@ -4608,6 +4694,9 @@
           </a:bodyPr>
           <a:lstStyle/>
           <a:p>
+            <a:pPr>
+              <a:buNone/>
+            </a:pPr>
             <a:r>
               <a:rPr sz="2700" b="1" i="0">
                 <a:solidFill>
@@ -4638,7 +4727,7 @@
         </p:blipFill>
         <p:spPr>
           <a:xfrm>
-            <a:off x="1323987" y="1740408"/>
+            <a:off x="1323987" y="1870456"/>
             <a:ext cx="3108960" cy="2590800"/>
           </a:xfrm>
           <a:prstGeom prst="rect">
@@ -4654,8 +4743,8 @@
         </p:nvSpPr>
         <p:spPr>
           <a:xfrm>
-            <a:off x="548640" y="4727448"/>
-            <a:ext cx="4659654" cy="1764792"/>
+            <a:off x="548640" y="4857496"/>
+            <a:ext cx="4659654" cy="1634744"/>
           </a:xfrm>
           <a:prstGeom prst="rect">
             <a:avLst/>
@@ -4668,7 +4757,9 @@
           </a:bodyPr>
           <a:lstStyle/>
           <a:p>
-            <a:pPr algn="ctr"/>
+            <a:pPr algn="ctr">
+              <a:buNone/>
+            </a:pPr>
             <a:r>
               <a:rPr sz="5400" b="1" i="0">
                 <a:solidFill>
@@ -4697,6 +4788,7 @@
               <a:spcBef>
                 <a:spcPts val="600"/>
               </a:spcBef>
+              <a:buNone/>
             </a:pPr>
             <a:r>
               <a:rPr sz="2200" b="0" i="1">
@@ -4715,6 +4807,7 @@
               <a:spcBef>
                 <a:spcPts val="400"/>
               </a:spcBef>
+              <a:buNone/>
             </a:pPr>
             <a:r>
               <a:rPr sz="1800" b="0" i="0">
@@ -4738,8 +4831,8 @@
         </p:nvSpPr>
         <p:spPr>
           <a:xfrm>
-            <a:off x="5665494" y="1481328"/>
-            <a:ext cx="5977561" cy="5010912"/>
+            <a:off x="5665494" y="1611376"/>
+            <a:ext cx="5977561" cy="4880864"/>
           </a:xfrm>
           <a:prstGeom prst="rect">
             <a:avLst/>
@@ -4752,6 +4845,9 @@
           </a:bodyPr>
           <a:lstStyle/>
           <a:p>
+            <a:pPr>
+              <a:buNone/>
+            </a:pPr>
             <a:r>
               <a:rPr sz="1600" b="1" i="0">
                 <a:solidFill>
@@ -4769,6 +4865,7 @@
               <a:spcBef>
                 <a:spcPts val="2200"/>
               </a:spcBef>
+              <a:buNone/>
             </a:pPr>
             <a:r>
               <a:rPr sz="1800" b="1" i="0">
@@ -4798,6 +4895,7 @@
               <a:spcBef>
                 <a:spcPts val="200"/>
               </a:spcBef>
+              <a:buNone/>
             </a:pPr>
             <a:r>
               <a:rPr sz="1400" b="0" i="1">
@@ -4816,6 +4914,7 @@
               <a:spcBef>
                 <a:spcPts val="100"/>
               </a:spcBef>
+              <a:buNone/>
             </a:pPr>
             <a:r>
               <a:rPr sz="1400" b="0" i="0">
@@ -4834,6 +4933,7 @@
               <a:spcBef>
                 <a:spcPts val="2200"/>
               </a:spcBef>
+              <a:buNone/>
             </a:pPr>
             <a:r>
               <a:rPr sz="1800" b="1" i="0">
@@ -4863,6 +4963,7 @@
               <a:spcBef>
                 <a:spcPts val="200"/>
               </a:spcBef>
+              <a:buNone/>
             </a:pPr>
             <a:r>
               <a:rPr sz="1400" b="0" i="1">
@@ -4881,6 +4982,7 @@
               <a:spcBef>
                 <a:spcPts val="100"/>
               </a:spcBef>
+              <a:buNone/>
             </a:pPr>
             <a:r>
               <a:rPr sz="1400" b="0" i="0">
@@ -4899,6 +5001,7 @@
               <a:spcBef>
                 <a:spcPts val="2200"/>
               </a:spcBef>
+              <a:buNone/>
             </a:pPr>
             <a:r>
               <a:rPr sz="1800" b="1" i="0">
@@ -4928,6 +5031,7 @@
               <a:spcBef>
                 <a:spcPts val="200"/>
               </a:spcBef>
+              <a:buNone/>
             </a:pPr>
             <a:r>
               <a:rPr sz="1400" b="0" i="1">
@@ -4946,6 +5050,7 @@
               <a:spcBef>
                 <a:spcPts val="100"/>
               </a:spcBef>
+              <a:buNone/>
             </a:pPr>
             <a:r>
               <a:rPr sz="1400" b="0" i="0">
@@ -4997,6 +5102,45 @@
           </a:ln>
         </p:spPr>
       </p:pic>
+      <p:sp>
+        <p:nvSpPr>
+          <p:cNvPr id="10" name="TextBox 9"/>
+          <p:cNvSpPr txBox="1"/>
+          <p:nvPr/>
+        </p:nvSpPr>
+        <p:spPr>
+          <a:xfrm>
+            <a:off x="548640" y="6492240"/>
+            <a:ext cx="11094415" cy="274320"/>
+          </a:xfrm>
+          <a:prstGeom prst="rect">
+            <a:avLst/>
+          </a:prstGeom>
+          <a:noFill/>
+        </p:spPr>
+        <p:txBody>
+          <a:bodyPr wrap="square" anchor="ctr">
+            <a:spAutoFit/>
+          </a:bodyPr>
+          <a:lstStyle/>
+          <a:p>
+            <a:pPr>
+              <a:buNone/>
+            </a:pPr>
+            <a:r>
+              <a:rPr sz="1100" b="0" i="1">
+                <a:solidFill>
+                  <a:srgbClr val="6B7683"/>
+                </a:solidFill>
+                <a:latin typeface="Calibri"/>
+                <a:ea typeface="Microsoft YaHei"/>
+                <a:cs typeface="Microsoft YaHei"/>
+              </a:rPr>
+              <a:t>📖 经 = 纟(sī, sợi tơ dọc trong khung dệt) → mở rộng nghĩa "đã trải qua, kinh qua" → 已经 = đã... rồi</a:t>
+            </a:r>
+          </a:p>
+        </p:txBody>
+      </p:sp>
     </p:spTree>
   </p:cSld>
   <p:clrMapOvr>
@@ -5090,7 +5234,7 @@
         <p:spPr>
           <a:xfrm>
             <a:off x="0" y="0"/>
-            <a:ext cx="12191695" cy="1207008"/>
+            <a:ext cx="12191695" cy="1337056"/>
           </a:xfrm>
           <a:prstGeom prst="rect">
             <a:avLst/>
@@ -5134,7 +5278,7 @@
         <p:spPr>
           <a:xfrm>
             <a:off x="548640" y="146304"/>
-            <a:ext cx="1371600" cy="384048"/>
+            <a:ext cx="1520830" cy="384048"/>
           </a:xfrm>
           <a:prstGeom prst="roundRect">
             <a:avLst/>
@@ -5162,10 +5306,12 @@
           </a:fontRef>
         </p:style>
         <p:txBody>
-          <a:bodyPr rtlCol="0" anchor="ctr" wrap="square" tIns="25400" bIns="25400"/>
-          <a:lstStyle/>
-          <a:p>
-            <a:pPr algn="ctr"/>
+          <a:bodyPr rtlCol="0" anchor="ctr" wrap="none" tIns="25400" bIns="25400"/>
+          <a:lstStyle/>
+          <a:p>
+            <a:pPr algn="ctr">
+              <a:buNone/>
+            </a:pPr>
             <a:r>
               <a:rPr sz="1600" b="1" i="0">
                 <a:solidFill>
@@ -5189,7 +5335,7 @@
         <p:spPr>
           <a:xfrm>
             <a:off x="548640" y="566928"/>
-            <a:ext cx="11094415" cy="566928"/>
+            <a:ext cx="11094415" cy="642112"/>
           </a:xfrm>
           <a:prstGeom prst="rect">
             <a:avLst/>
@@ -5202,6 +5348,9 @@
           </a:bodyPr>
           <a:lstStyle/>
           <a:p>
+            <a:pPr>
+              <a:buNone/>
+            </a:pPr>
             <a:r>
               <a:rPr sz="2700" b="1" i="0">
                 <a:solidFill>
@@ -5232,7 +5381,7 @@
         </p:blipFill>
         <p:spPr>
           <a:xfrm>
-            <a:off x="1323987" y="1481328"/>
+            <a:off x="1323987" y="1611376"/>
             <a:ext cx="3108960" cy="3108960"/>
           </a:xfrm>
           <a:prstGeom prst="rect">
@@ -5248,8 +5397,8 @@
         </p:nvSpPr>
         <p:spPr>
           <a:xfrm>
-            <a:off x="548640" y="4727448"/>
-            <a:ext cx="4659654" cy="1764792"/>
+            <a:off x="548640" y="4857496"/>
+            <a:ext cx="4659654" cy="1634744"/>
           </a:xfrm>
           <a:prstGeom prst="rect">
             <a:avLst/>
@@ -5262,7 +5411,9 @@
           </a:bodyPr>
           <a:lstStyle/>
           <a:p>
-            <a:pPr algn="ctr"/>
+            <a:pPr algn="ctr">
+              <a:buNone/>
+            </a:pPr>
             <a:r>
               <a:rPr sz="5400" b="1" i="0">
                 <a:solidFill>
@@ -5291,6 +5442,7 @@
               <a:spcBef>
                 <a:spcPts val="600"/>
               </a:spcBef>
+              <a:buNone/>
             </a:pPr>
             <a:r>
               <a:rPr sz="2200" b="0" i="1">
@@ -5309,6 +5461,7 @@
               <a:spcBef>
                 <a:spcPts val="400"/>
               </a:spcBef>
+              <a:buNone/>
             </a:pPr>
             <a:r>
               <a:rPr sz="1800" b="0" i="0">
@@ -5332,8 +5485,8 @@
         </p:nvSpPr>
         <p:spPr>
           <a:xfrm>
-            <a:off x="5665494" y="1481328"/>
-            <a:ext cx="5977561" cy="5010912"/>
+            <a:off x="5665494" y="1611376"/>
+            <a:ext cx="5977561" cy="4880864"/>
           </a:xfrm>
           <a:prstGeom prst="rect">
             <a:avLst/>
@@ -5346,6 +5499,9 @@
           </a:bodyPr>
           <a:lstStyle/>
           <a:p>
+            <a:pPr>
+              <a:buNone/>
+            </a:pPr>
             <a:r>
               <a:rPr sz="1600" b="1" i="0">
                 <a:solidFill>
@@ -5363,6 +5519,7 @@
               <a:spcBef>
                 <a:spcPts val="2200"/>
               </a:spcBef>
+              <a:buNone/>
             </a:pPr>
             <a:r>
               <a:rPr sz="1800" b="1" i="0">
@@ -5392,6 +5549,7 @@
               <a:spcBef>
                 <a:spcPts val="200"/>
               </a:spcBef>
+              <a:buNone/>
             </a:pPr>
             <a:r>
               <a:rPr sz="1400" b="0" i="1">
@@ -5410,6 +5568,7 @@
               <a:spcBef>
                 <a:spcPts val="100"/>
               </a:spcBef>
+              <a:buNone/>
             </a:pPr>
             <a:r>
               <a:rPr sz="1400" b="0" i="0">
@@ -5428,6 +5587,7 @@
               <a:spcBef>
                 <a:spcPts val="2200"/>
               </a:spcBef>
+              <a:buNone/>
             </a:pPr>
             <a:r>
               <a:rPr sz="1800" b="1" i="0">
@@ -5457,6 +5617,7 @@
               <a:spcBef>
                 <a:spcPts val="200"/>
               </a:spcBef>
+              <a:buNone/>
             </a:pPr>
             <a:r>
               <a:rPr sz="1400" b="0" i="1">
@@ -5475,6 +5636,7 @@
               <a:spcBef>
                 <a:spcPts val="100"/>
               </a:spcBef>
+              <a:buNone/>
             </a:pPr>
             <a:r>
               <a:rPr sz="1400" b="0" i="0">
@@ -5493,6 +5655,7 @@
               <a:spcBef>
                 <a:spcPts val="2200"/>
               </a:spcBef>
+              <a:buNone/>
             </a:pPr>
             <a:r>
               <a:rPr sz="1800" b="1" i="0">
@@ -5522,6 +5685,7 @@
               <a:spcBef>
                 <a:spcPts val="200"/>
               </a:spcBef>
+              <a:buNone/>
             </a:pPr>
             <a:r>
               <a:rPr sz="1400" b="0" i="1">
@@ -5540,6 +5704,7 @@
               <a:spcBef>
                 <a:spcPts val="100"/>
               </a:spcBef>
+              <a:buNone/>
             </a:pPr>
             <a:r>
               <a:rPr sz="1400" b="0" i="0">
@@ -5591,6 +5756,45 @@
           </a:ln>
         </p:spPr>
       </p:pic>
+      <p:sp>
+        <p:nvSpPr>
+          <p:cNvPr id="10" name="TextBox 9"/>
+          <p:cNvSpPr txBox="1"/>
+          <p:nvPr/>
+        </p:nvSpPr>
+        <p:spPr>
+          <a:xfrm>
+            <a:off x="548640" y="6492240"/>
+            <a:ext cx="11094415" cy="274320"/>
+          </a:xfrm>
+          <a:prstGeom prst="rect">
+            <a:avLst/>
+          </a:prstGeom>
+          <a:noFill/>
+        </p:spPr>
+        <p:txBody>
+          <a:bodyPr wrap="square" anchor="ctr">
+            <a:spAutoFit/>
+          </a:bodyPr>
+          <a:lstStyle/>
+          <a:p>
+            <a:pPr>
+              <a:buNone/>
+            </a:pPr>
+            <a:r>
+              <a:rPr sz="1100" b="0" i="1">
+                <a:solidFill>
+                  <a:srgbClr val="6B7683"/>
+                </a:solidFill>
+                <a:latin typeface="Calibri"/>
+                <a:ea typeface="Microsoft YaHei"/>
+                <a:cs typeface="Microsoft YaHei"/>
+              </a:rPr>
+              <a:t>📖 意 = 音(yīn, âm thanh) + 心(xīn, tim) → âm thanh phát ra từ TRONG TIM → "ý, suy nghĩ" → 意思 = ý tứ, nghĩa</a:t>
+            </a:r>
+          </a:p>
+        </p:txBody>
+      </p:sp>
     </p:spTree>
   </p:cSld>
   <p:clrMapOvr>
@@ -5684,7 +5888,7 @@
         <p:spPr>
           <a:xfrm>
             <a:off x="0" y="0"/>
-            <a:ext cx="12191695" cy="1207008"/>
+            <a:ext cx="12191695" cy="1337056"/>
           </a:xfrm>
           <a:prstGeom prst="rect">
             <a:avLst/>
@@ -5728,7 +5932,7 @@
         <p:spPr>
           <a:xfrm>
             <a:off x="548640" y="146304"/>
-            <a:ext cx="1371600" cy="384048"/>
+            <a:ext cx="1520830" cy="384048"/>
           </a:xfrm>
           <a:prstGeom prst="roundRect">
             <a:avLst/>
@@ -5756,10 +5960,12 @@
           </a:fontRef>
         </p:style>
         <p:txBody>
-          <a:bodyPr rtlCol="0" anchor="ctr" wrap="square" tIns="25400" bIns="25400"/>
-          <a:lstStyle/>
-          <a:p>
-            <a:pPr algn="ctr"/>
+          <a:bodyPr rtlCol="0" anchor="ctr" wrap="none" tIns="25400" bIns="25400"/>
+          <a:lstStyle/>
+          <a:p>
+            <a:pPr algn="ctr">
+              <a:buNone/>
+            </a:pPr>
             <a:r>
               <a:rPr sz="1600" b="1" i="0">
                 <a:solidFill>
@@ -5783,7 +5989,7 @@
         <p:spPr>
           <a:xfrm>
             <a:off x="548640" y="566928"/>
-            <a:ext cx="11094415" cy="566928"/>
+            <a:ext cx="11094415" cy="642112"/>
           </a:xfrm>
           <a:prstGeom prst="rect">
             <a:avLst/>
@@ -5796,6 +6002,9 @@
           </a:bodyPr>
           <a:lstStyle/>
           <a:p>
+            <a:pPr>
+              <a:buNone/>
+            </a:pPr>
             <a:r>
               <a:rPr sz="2700" b="1" i="0">
                 <a:solidFill>
@@ -5826,7 +6035,7 @@
         </p:blipFill>
         <p:spPr>
           <a:xfrm>
-            <a:off x="1323987" y="1998982"/>
+            <a:off x="1323987" y="2129030"/>
             <a:ext cx="3108960" cy="2073652"/>
           </a:xfrm>
           <a:prstGeom prst="rect">
@@ -5842,8 +6051,8 @@
         </p:nvSpPr>
         <p:spPr>
           <a:xfrm>
-            <a:off x="548640" y="4727448"/>
-            <a:ext cx="4659654" cy="1764792"/>
+            <a:off x="548640" y="4857496"/>
+            <a:ext cx="4659654" cy="1634744"/>
           </a:xfrm>
           <a:prstGeom prst="rect">
             <a:avLst/>
@@ -5856,7 +6065,9 @@
           </a:bodyPr>
           <a:lstStyle/>
           <a:p>
-            <a:pPr algn="ctr"/>
+            <a:pPr algn="ctr">
+              <a:buNone/>
+            </a:pPr>
             <a:r>
               <a:rPr sz="5400" b="1" i="0">
                 <a:solidFill>
@@ -5885,6 +6096,7 @@
               <a:spcBef>
                 <a:spcPts val="600"/>
               </a:spcBef>
+              <a:buNone/>
             </a:pPr>
             <a:r>
               <a:rPr sz="2200" b="0" i="1">
@@ -5903,6 +6115,7 @@
               <a:spcBef>
                 <a:spcPts val="400"/>
               </a:spcBef>
+              <a:buNone/>
             </a:pPr>
             <a:r>
               <a:rPr sz="1800" b="0" i="0">
@@ -5926,8 +6139,8 @@
         </p:nvSpPr>
         <p:spPr>
           <a:xfrm>
-            <a:off x="5665494" y="1481328"/>
-            <a:ext cx="5977561" cy="5010912"/>
+            <a:off x="5665494" y="1611376"/>
+            <a:ext cx="5977561" cy="4880864"/>
           </a:xfrm>
           <a:prstGeom prst="rect">
             <a:avLst/>
@@ -5940,6 +6153,9 @@
           </a:bodyPr>
           <a:lstStyle/>
           <a:p>
+            <a:pPr>
+              <a:buNone/>
+            </a:pPr>
             <a:r>
               <a:rPr sz="1600" b="1" i="0">
                 <a:solidFill>
@@ -5957,6 +6173,7 @@
               <a:spcBef>
                 <a:spcPts val="2200"/>
               </a:spcBef>
+              <a:buNone/>
             </a:pPr>
             <a:r>
               <a:rPr sz="1800" b="1" i="0">
@@ -5986,6 +6203,7 @@
               <a:spcBef>
                 <a:spcPts val="200"/>
               </a:spcBef>
+              <a:buNone/>
             </a:pPr>
             <a:r>
               <a:rPr sz="1400" b="0" i="1">
@@ -6004,6 +6222,7 @@
               <a:spcBef>
                 <a:spcPts val="100"/>
               </a:spcBef>
+              <a:buNone/>
             </a:pPr>
             <a:r>
               <a:rPr sz="1400" b="0" i="0">
@@ -6022,6 +6241,7 @@
               <a:spcBef>
                 <a:spcPts val="2200"/>
               </a:spcBef>
+              <a:buNone/>
             </a:pPr>
             <a:r>
               <a:rPr sz="1800" b="1" i="0">
@@ -6051,6 +6271,7 @@
               <a:spcBef>
                 <a:spcPts val="200"/>
               </a:spcBef>
+              <a:buNone/>
             </a:pPr>
             <a:r>
               <a:rPr sz="1400" b="0" i="1">
@@ -6069,6 +6290,7 @@
               <a:spcBef>
                 <a:spcPts val="100"/>
               </a:spcBef>
+              <a:buNone/>
             </a:pPr>
             <a:r>
               <a:rPr sz="1400" b="0" i="0">
@@ -6087,6 +6309,7 @@
               <a:spcBef>
                 <a:spcPts val="2200"/>
               </a:spcBef>
+              <a:buNone/>
             </a:pPr>
             <a:r>
               <a:rPr sz="1800" b="1" i="0">
@@ -6116,6 +6339,7 @@
               <a:spcBef>
                 <a:spcPts val="200"/>
               </a:spcBef>
+              <a:buNone/>
             </a:pPr>
             <a:r>
               <a:rPr sz="1400" b="0" i="1">
@@ -6134,6 +6358,7 @@
               <a:spcBef>
                 <a:spcPts val="100"/>
               </a:spcBef>
+              <a:buNone/>
             </a:pPr>
             <a:r>
               <a:rPr sz="1400" b="0" i="0">
@@ -6185,6 +6410,45 @@
           </a:ln>
         </p:spPr>
       </p:pic>
+      <p:sp>
+        <p:nvSpPr>
+          <p:cNvPr id="10" name="TextBox 9"/>
+          <p:cNvSpPr txBox="1"/>
+          <p:nvPr/>
+        </p:nvSpPr>
+        <p:spPr>
+          <a:xfrm>
+            <a:off x="548640" y="6492240"/>
+            <a:ext cx="11094415" cy="274320"/>
+          </a:xfrm>
+          <a:prstGeom prst="rect">
+            <a:avLst/>
+          </a:prstGeom>
+          <a:noFill/>
+        </p:spPr>
+        <p:txBody>
+          <a:bodyPr wrap="square" anchor="ctr">
+            <a:spAutoFit/>
+          </a:bodyPr>
+          <a:lstStyle/>
+          <a:p>
+            <a:pPr>
+              <a:buNone/>
+            </a:pPr>
+            <a:r>
+              <a:rPr sz="1100" b="0" i="1">
+                <a:solidFill>
+                  <a:srgbClr val="6B7683"/>
+                </a:solidFill>
+                <a:latin typeface="Calibri"/>
+                <a:ea typeface="Microsoft YaHei"/>
+                <a:cs typeface="Microsoft YaHei"/>
+              </a:rPr>
+              <a:t>📖 时 = 日(rì, mặt trời) + 寸(cùn, đo lường nhỏ) → đo THỜI GIAN theo bóng MẶT TRỜI → "thời gian" → 有时 = có lúc, đôi khi</a:t>
+            </a:r>
+          </a:p>
+        </p:txBody>
+      </p:sp>
     </p:spTree>
   </p:cSld>
   <p:clrMapOvr>
@@ -6278,7 +6542,7 @@
         <p:spPr>
           <a:xfrm>
             <a:off x="0" y="0"/>
-            <a:ext cx="12191695" cy="1207008"/>
+            <a:ext cx="12191695" cy="1337056"/>
           </a:xfrm>
           <a:prstGeom prst="rect">
             <a:avLst/>
@@ -6350,10 +6614,12 @@
           </a:fontRef>
         </p:style>
         <p:txBody>
-          <a:bodyPr rtlCol="0" anchor="ctr" wrap="square" tIns="25400" bIns="25400"/>
-          <a:lstStyle/>
-          <a:p>
-            <a:pPr algn="ctr"/>
+          <a:bodyPr rtlCol="0" anchor="ctr" wrap="none" tIns="25400" bIns="25400"/>
+          <a:lstStyle/>
+          <a:p>
+            <a:pPr algn="ctr">
+              <a:buNone/>
+            </a:pPr>
             <a:r>
               <a:rPr sz="1600" b="1" i="0">
                 <a:solidFill>
@@ -6377,7 +6643,7 @@
         <p:spPr>
           <a:xfrm>
             <a:off x="548640" y="566928"/>
-            <a:ext cx="11094415" cy="566928"/>
+            <a:ext cx="11094415" cy="642112"/>
           </a:xfrm>
           <a:prstGeom prst="rect">
             <a:avLst/>
@@ -6390,6 +6656,9 @@
           </a:bodyPr>
           <a:lstStyle/>
           <a:p>
+            <a:pPr>
+              <a:buNone/>
+            </a:pPr>
             <a:r>
               <a:rPr sz="2700" b="1" i="0">
                 <a:solidFill>
@@ -6412,8 +6681,8 @@
         </p:nvSpPr>
         <p:spPr>
           <a:xfrm>
-            <a:off x="548640" y="1481328"/>
-            <a:ext cx="6949440" cy="758456"/>
+            <a:off x="548640" y="1611376"/>
+            <a:ext cx="4145280" cy="635990"/>
           </a:xfrm>
           <a:prstGeom prst="roundRect">
             <a:avLst/>
@@ -6446,7 +6715,9 @@
           <a:bodyPr rtlCol="0" anchor="ctr" wrap="square" lIns="152400" tIns="63500" bIns="63500"/>
           <a:lstStyle/>
           <a:p>
-            <a:pPr algn="l"/>
+            <a:pPr algn="l">
+              <a:buNone/>
+            </a:pPr>
             <a:r>
               <a:rPr sz="1100" b="1" i="0">
                 <a:solidFill>
@@ -6459,7 +6730,7 @@
               <a:t>白家月: </a:t>
             </a:r>
             <a:r>
-              <a:rPr sz="1600" b="1" i="0">
+              <a:rPr sz="1500" b="1" i="0">
                 <a:solidFill>
                   <a:srgbClr val="1F2933"/>
                 </a:solidFill>
@@ -6471,7 +6742,9 @@
             </a:r>
           </a:p>
           <a:p>
-            <a:pPr algn="l"/>
+            <a:pPr algn="l">
+              <a:buNone/>
+            </a:pPr>
             <a:r>
               <a:rPr sz="1100" b="0" i="1">
                 <a:solidFill>
@@ -6494,8 +6767,8 @@
         </p:nvSpPr>
         <p:spPr>
           <a:xfrm>
-            <a:off x="371977" y="1363553"/>
-            <a:ext cx="420624" cy="420624"/>
+            <a:off x="383028" y="1500968"/>
+            <a:ext cx="394313" cy="394313"/>
           </a:xfrm>
           <a:prstGeom prst="ellipse">
             <a:avLst/>
@@ -6528,9 +6801,11 @@
           <a:bodyPr rtlCol="0" anchor="ctr" wrap="none" lIns="0" rIns="0" tIns="0" bIns="0"/>
           <a:lstStyle/>
           <a:p>
-            <a:pPr algn="ctr"/>
-            <a:r>
-              <a:rPr sz="1300" b="1" i="0">
+            <a:pPr algn="ctr">
+              <a:buNone/>
+            </a:pPr>
+            <a:r>
+              <a:rPr sz="1200" b="1" i="0">
                 <a:solidFill>
                   <a:srgbClr val="FFFFFF"/>
                 </a:solidFill>
@@ -6551,8 +6826,8 @@
         </p:nvSpPr>
         <p:spPr>
           <a:xfrm>
-            <a:off x="4693615" y="2350105"/>
-            <a:ext cx="6949440" cy="758456"/>
+            <a:off x="8112455" y="2339873"/>
+            <a:ext cx="3530600" cy="635990"/>
           </a:xfrm>
           <a:prstGeom prst="roundRect">
             <a:avLst/>
@@ -6585,7 +6860,9 @@
           <a:bodyPr rtlCol="0" anchor="ctr" wrap="square" lIns="152400" tIns="63500" bIns="63500"/>
           <a:lstStyle/>
           <a:p>
-            <a:pPr algn="l"/>
+            <a:pPr algn="l">
+              <a:buNone/>
+            </a:pPr>
             <a:r>
               <a:rPr sz="1100" b="1" i="0">
                 <a:solidFill>
@@ -6598,7 +6875,7 @@
               <a:t>王一雪: </a:t>
             </a:r>
             <a:r>
-              <a:rPr sz="1600" b="1" i="0">
+              <a:rPr sz="1500" b="1" i="0">
                 <a:solidFill>
                   <a:srgbClr val="1F2933"/>
                 </a:solidFill>
@@ -6610,7 +6887,9 @@
             </a:r>
           </a:p>
           <a:p>
-            <a:pPr algn="l"/>
+            <a:pPr algn="l">
+              <a:buNone/>
+            </a:pPr>
             <a:r>
               <a:rPr sz="1100" b="0" i="1">
                 <a:solidFill>
@@ -6633,8 +6912,8 @@
         </p:nvSpPr>
         <p:spPr>
           <a:xfrm>
-            <a:off x="11399093" y="2232330"/>
-            <a:ext cx="420624" cy="420624"/>
+            <a:off x="11414353" y="2229465"/>
+            <a:ext cx="394313" cy="394313"/>
           </a:xfrm>
           <a:prstGeom prst="ellipse">
             <a:avLst/>
@@ -6667,9 +6946,11 @@
           <a:bodyPr rtlCol="0" anchor="ctr" wrap="none" lIns="0" rIns="0" tIns="0" bIns="0"/>
           <a:lstStyle/>
           <a:p>
-            <a:pPr algn="ctr"/>
-            <a:r>
-              <a:rPr sz="1300" b="1" i="0">
+            <a:pPr algn="ctr">
+              <a:buNone/>
+            </a:pPr>
+            <a:r>
+              <a:rPr sz="1200" b="1" i="0">
                 <a:solidFill>
                   <a:srgbClr val="FFFFFF"/>
                 </a:solidFill>
@@ -6690,8 +6971,8 @@
         </p:nvSpPr>
         <p:spPr>
           <a:xfrm>
-            <a:off x="548640" y="3218882"/>
-            <a:ext cx="6949440" cy="758456"/>
+            <a:off x="548640" y="3068370"/>
+            <a:ext cx="3223260" cy="635990"/>
           </a:xfrm>
           <a:prstGeom prst="roundRect">
             <a:avLst/>
@@ -6724,7 +7005,9 @@
           <a:bodyPr rtlCol="0" anchor="ctr" wrap="square" lIns="152400" tIns="63500" bIns="63500"/>
           <a:lstStyle/>
           <a:p>
-            <a:pPr algn="l"/>
+            <a:pPr algn="l">
+              <a:buNone/>
+            </a:pPr>
             <a:r>
               <a:rPr sz="1100" b="1" i="0">
                 <a:solidFill>
@@ -6737,7 +7020,7 @@
               <a:t>白家月: </a:t>
             </a:r>
             <a:r>
-              <a:rPr sz="1600" b="1" i="0">
+              <a:rPr sz="1500" b="1" i="0">
                 <a:solidFill>
                   <a:srgbClr val="1F2933"/>
                 </a:solidFill>
@@ -6749,7 +7032,9 @@
             </a:r>
           </a:p>
           <a:p>
-            <a:pPr algn="l"/>
+            <a:pPr algn="l">
+              <a:buNone/>
+            </a:pPr>
             <a:r>
               <a:rPr sz="1100" b="0" i="1">
                 <a:solidFill>
@@ -6772,8 +7057,8 @@
         </p:nvSpPr>
         <p:spPr>
           <a:xfrm>
-            <a:off x="371977" y="3101107"/>
-            <a:ext cx="420624" cy="420624"/>
+            <a:off x="383028" y="2957962"/>
+            <a:ext cx="394313" cy="394313"/>
           </a:xfrm>
           <a:prstGeom prst="ellipse">
             <a:avLst/>
@@ -6806,9 +7091,11 @@
           <a:bodyPr rtlCol="0" anchor="ctr" wrap="none" lIns="0" rIns="0" tIns="0" bIns="0"/>
           <a:lstStyle/>
           <a:p>
-            <a:pPr algn="ctr"/>
-            <a:r>
-              <a:rPr sz="1300" b="1" i="0">
+            <a:pPr algn="ctr">
+              <a:buNone/>
+            </a:pPr>
+            <a:r>
+              <a:rPr sz="1200" b="1" i="0">
                 <a:solidFill>
                   <a:srgbClr val="FFFFFF"/>
                 </a:solidFill>
@@ -6829,8 +7116,8 @@
         </p:nvSpPr>
         <p:spPr>
           <a:xfrm>
-            <a:off x="4693615" y="4087659"/>
-            <a:ext cx="6949440" cy="758456"/>
+            <a:off x="4693615" y="3796867"/>
+            <a:ext cx="6949440" cy="635990"/>
           </a:xfrm>
           <a:prstGeom prst="roundRect">
             <a:avLst/>
@@ -6863,7 +7150,9 @@
           <a:bodyPr rtlCol="0" anchor="ctr" wrap="square" lIns="152400" tIns="63500" bIns="63500"/>
           <a:lstStyle/>
           <a:p>
-            <a:pPr algn="l"/>
+            <a:pPr algn="l">
+              <a:buNone/>
+            </a:pPr>
             <a:r>
               <a:rPr sz="1100" b="1" i="0">
                 <a:solidFill>
@@ -6876,7 +7165,7 @@
               <a:t>王一雪: </a:t>
             </a:r>
             <a:r>
-              <a:rPr sz="1600" b="1" i="0">
+              <a:rPr sz="1500" b="1" i="0">
                 <a:solidFill>
                   <a:srgbClr val="1F2933"/>
                 </a:solidFill>
@@ -6888,7 +7177,9 @@
             </a:r>
           </a:p>
           <a:p>
-            <a:pPr algn="l"/>
+            <a:pPr algn="l">
+              <a:buNone/>
+            </a:pPr>
             <a:r>
               <a:rPr sz="1100" b="0" i="1">
                 <a:solidFill>
@@ -6911,8 +7202,8 @@
         </p:nvSpPr>
         <p:spPr>
           <a:xfrm>
-            <a:off x="11399093" y="3969884"/>
-            <a:ext cx="420624" cy="420624"/>
+            <a:off x="11414353" y="3686459"/>
+            <a:ext cx="394313" cy="394313"/>
           </a:xfrm>
           <a:prstGeom prst="ellipse">
             <a:avLst/>
@@ -6945,9 +7236,11 @@
           <a:bodyPr rtlCol="0" anchor="ctr" wrap="none" lIns="0" rIns="0" tIns="0" bIns="0"/>
           <a:lstStyle/>
           <a:p>
-            <a:pPr algn="ctr"/>
-            <a:r>
-              <a:rPr sz="1300" b="1" i="0">
+            <a:pPr algn="ctr">
+              <a:buNone/>
+            </a:pPr>
+            <a:r>
+              <a:rPr sz="1200" b="1" i="0">
                 <a:solidFill>
                   <a:srgbClr val="FFFFFF"/>
                 </a:solidFill>
@@ -6968,8 +7261,8 @@
         </p:nvSpPr>
         <p:spPr>
           <a:xfrm>
-            <a:off x="548640" y="4956436"/>
-            <a:ext cx="6949440" cy="758456"/>
+            <a:off x="548640" y="4525364"/>
+            <a:ext cx="1737360" cy="635990"/>
           </a:xfrm>
           <a:prstGeom prst="roundRect">
             <a:avLst/>
@@ -7002,7 +7295,9 @@
           <a:bodyPr rtlCol="0" anchor="ctr" wrap="square" lIns="152400" tIns="63500" bIns="63500"/>
           <a:lstStyle/>
           <a:p>
-            <a:pPr algn="l"/>
+            <a:pPr algn="l">
+              <a:buNone/>
+            </a:pPr>
             <a:r>
               <a:rPr sz="1100" b="1" i="0">
                 <a:solidFill>
@@ -7015,7 +7310,7 @@
               <a:t>白家月: </a:t>
             </a:r>
             <a:r>
-              <a:rPr sz="1600" b="1" i="0">
+              <a:rPr sz="1500" b="1" i="0">
                 <a:solidFill>
                   <a:srgbClr val="1F2933"/>
                 </a:solidFill>
@@ -7027,7 +7322,9 @@
             </a:r>
           </a:p>
           <a:p>
-            <a:pPr algn="l"/>
+            <a:pPr algn="l">
+              <a:buNone/>
+            </a:pPr>
             <a:r>
               <a:rPr sz="1100" b="0" i="1">
                 <a:solidFill>
@@ -7050,8 +7347,8 @@
         </p:nvSpPr>
         <p:spPr>
           <a:xfrm>
-            <a:off x="371977" y="4838661"/>
-            <a:ext cx="420624" cy="420624"/>
+            <a:off x="383028" y="4414956"/>
+            <a:ext cx="394313" cy="394313"/>
           </a:xfrm>
           <a:prstGeom prst="ellipse">
             <a:avLst/>
@@ -7084,9 +7381,11 @@
           <a:bodyPr rtlCol="0" anchor="ctr" wrap="none" lIns="0" rIns="0" tIns="0" bIns="0"/>
           <a:lstStyle/>
           <a:p>
-            <a:pPr algn="ctr"/>
-            <a:r>
-              <a:rPr sz="1300" b="1" i="0">
+            <a:pPr algn="ctr">
+              <a:buNone/>
+            </a:pPr>
+            <a:r>
+              <a:rPr sz="1200" b="1" i="0">
                 <a:solidFill>
                   <a:srgbClr val="FFFFFF"/>
                 </a:solidFill>
@@ -7107,8 +7406,8 @@
         </p:nvSpPr>
         <p:spPr>
           <a:xfrm>
-            <a:off x="4693615" y="5825213"/>
-            <a:ext cx="6949440" cy="758456"/>
+            <a:off x="9905695" y="5253861"/>
+            <a:ext cx="1737360" cy="635990"/>
           </a:xfrm>
           <a:prstGeom prst="roundRect">
             <a:avLst/>
@@ -7141,7 +7440,9 @@
           <a:bodyPr rtlCol="0" anchor="ctr" wrap="square" lIns="152400" tIns="63500" bIns="63500"/>
           <a:lstStyle/>
           <a:p>
-            <a:pPr algn="l"/>
+            <a:pPr algn="l">
+              <a:buNone/>
+            </a:pPr>
             <a:r>
               <a:rPr sz="1100" b="1" i="0">
                 <a:solidFill>
@@ -7154,7 +7455,7 @@
               <a:t>王一雪: </a:t>
             </a:r>
             <a:r>
-              <a:rPr sz="1600" b="1" i="0">
+              <a:rPr sz="1500" b="1" i="0">
                 <a:solidFill>
                   <a:srgbClr val="1F2933"/>
                 </a:solidFill>
@@ -7166,7 +7467,9 @@
             </a:r>
           </a:p>
           <a:p>
-            <a:pPr algn="l"/>
+            <a:pPr algn="l">
+              <a:buNone/>
+            </a:pPr>
             <a:r>
               <a:rPr sz="1100" b="0" i="1">
                 <a:solidFill>
@@ -7189,8 +7492,8 @@
         </p:nvSpPr>
         <p:spPr>
           <a:xfrm>
-            <a:off x="11399093" y="5707438"/>
-            <a:ext cx="420624" cy="420624"/>
+            <a:off x="11414353" y="5143453"/>
+            <a:ext cx="394313" cy="394313"/>
           </a:xfrm>
           <a:prstGeom prst="ellipse">
             <a:avLst/>
@@ -7223,9 +7526,11 @@
           <a:bodyPr rtlCol="0" anchor="ctr" wrap="none" lIns="0" rIns="0" tIns="0" bIns="0"/>
           <a:lstStyle/>
           <a:p>
-            <a:pPr algn="ctr"/>
-            <a:r>
-              <a:rPr sz="1300" b="1" i="0">
+            <a:pPr algn="ctr">
+              <a:buNone/>
+            </a:pPr>
+            <a:r>
+              <a:rPr sz="1200" b="1" i="0">
                 <a:solidFill>
                   <a:srgbClr val="FFFFFF"/>
                 </a:solidFill>
@@ -7367,7 +7672,7 @@
         <p:spPr>
           <a:xfrm>
             <a:off x="0" y="0"/>
-            <a:ext cx="12191695" cy="1207008"/>
+            <a:ext cx="12191695" cy="1337056"/>
           </a:xfrm>
           <a:prstGeom prst="rect">
             <a:avLst/>
@@ -7439,10 +7744,12 @@
           </a:fontRef>
         </p:style>
         <p:txBody>
-          <a:bodyPr rtlCol="0" anchor="ctr" wrap="square" tIns="25400" bIns="25400"/>
-          <a:lstStyle/>
-          <a:p>
-            <a:pPr algn="ctr"/>
+          <a:bodyPr rtlCol="0" anchor="ctr" wrap="none" tIns="25400" bIns="25400"/>
+          <a:lstStyle/>
+          <a:p>
+            <a:pPr algn="ctr">
+              <a:buNone/>
+            </a:pPr>
             <a:r>
               <a:rPr sz="1600" b="1" i="0">
                 <a:solidFill>
@@ -7466,7 +7773,7 @@
         <p:spPr>
           <a:xfrm>
             <a:off x="548640" y="566928"/>
-            <a:ext cx="11094415" cy="566928"/>
+            <a:ext cx="11094415" cy="642112"/>
           </a:xfrm>
           <a:prstGeom prst="rect">
             <a:avLst/>
@@ -7479,6 +7786,9 @@
           </a:bodyPr>
           <a:lstStyle/>
           <a:p>
+            <a:pPr>
+              <a:buNone/>
+            </a:pPr>
             <a:r>
               <a:rPr sz="2700" b="1" i="0">
                 <a:solidFill>
@@ -7501,8 +7811,8 @@
         </p:nvSpPr>
         <p:spPr>
           <a:xfrm>
-            <a:off x="548640" y="1481328"/>
-            <a:ext cx="6949440" cy="758456"/>
+            <a:off x="548640" y="1611376"/>
+            <a:ext cx="3069590" cy="635990"/>
           </a:xfrm>
           <a:prstGeom prst="roundRect">
             <a:avLst/>
@@ -7535,7 +7845,9 @@
           <a:bodyPr rtlCol="0" anchor="ctr" wrap="square" lIns="152400" tIns="63500" bIns="63500"/>
           <a:lstStyle/>
           <a:p>
-            <a:pPr algn="l"/>
+            <a:pPr algn="l">
+              <a:buNone/>
+            </a:pPr>
             <a:r>
               <a:rPr sz="1100" b="1" i="0">
                 <a:solidFill>
@@ -7548,7 +7860,7 @@
               <a:t>王一雪: </a:t>
             </a:r>
             <a:r>
-              <a:rPr sz="1600" b="1" i="0">
+              <a:rPr sz="1500" b="1" i="0">
                 <a:solidFill>
                   <a:srgbClr val="1F2933"/>
                 </a:solidFill>
@@ -7560,7 +7872,9 @@
             </a:r>
           </a:p>
           <a:p>
-            <a:pPr algn="l"/>
+            <a:pPr algn="l">
+              <a:buNone/>
+            </a:pPr>
             <a:r>
               <a:rPr sz="1100" b="0" i="1">
                 <a:solidFill>
@@ -7583,8 +7897,8 @@
         </p:nvSpPr>
         <p:spPr>
           <a:xfrm>
-            <a:off x="371977" y="1363553"/>
-            <a:ext cx="420624" cy="420624"/>
+            <a:off x="383028" y="1500968"/>
+            <a:ext cx="394313" cy="394313"/>
           </a:xfrm>
           <a:prstGeom prst="ellipse">
             <a:avLst/>
@@ -7617,9 +7931,11 @@
           <a:bodyPr rtlCol="0" anchor="ctr" wrap="none" lIns="0" rIns="0" tIns="0" bIns="0"/>
           <a:lstStyle/>
           <a:p>
-            <a:pPr algn="ctr"/>
-            <a:r>
-              <a:rPr sz="1300" b="1" i="0">
+            <a:pPr algn="ctr">
+              <a:buNone/>
+            </a:pPr>
+            <a:r>
+              <a:rPr sz="1200" b="1" i="0">
                 <a:solidFill>
                   <a:srgbClr val="FFFFFF"/>
                 </a:solidFill>
@@ -7640,8 +7956,8 @@
         </p:nvSpPr>
         <p:spPr>
           <a:xfrm>
-            <a:off x="4693615" y="2350105"/>
-            <a:ext cx="6949440" cy="758456"/>
+            <a:off x="8496630" y="2339873"/>
+            <a:ext cx="3146425" cy="635990"/>
           </a:xfrm>
           <a:prstGeom prst="roundRect">
             <a:avLst/>
@@ -7674,7 +7990,9 @@
           <a:bodyPr rtlCol="0" anchor="ctr" wrap="square" lIns="152400" tIns="63500" bIns="63500"/>
           <a:lstStyle/>
           <a:p>
-            <a:pPr algn="l"/>
+            <a:pPr algn="l">
+              <a:buNone/>
+            </a:pPr>
             <a:r>
               <a:rPr sz="1100" b="1" i="0">
                 <a:solidFill>
@@ -7687,7 +8005,7 @@
               <a:t>白家月: </a:t>
             </a:r>
             <a:r>
-              <a:rPr sz="1600" b="1" i="0">
+              <a:rPr sz="1500" b="1" i="0">
                 <a:solidFill>
                   <a:srgbClr val="1F2933"/>
                 </a:solidFill>
@@ -7699,7 +8017,9 @@
             </a:r>
           </a:p>
           <a:p>
-            <a:pPr algn="l"/>
+            <a:pPr algn="l">
+              <a:buNone/>
+            </a:pPr>
             <a:r>
               <a:rPr sz="1100" b="0" i="1">
                 <a:solidFill>
@@ -7722,8 +8042,8 @@
         </p:nvSpPr>
         <p:spPr>
           <a:xfrm>
-            <a:off x="11399093" y="2232330"/>
-            <a:ext cx="420624" cy="420624"/>
+            <a:off x="11414353" y="2229465"/>
+            <a:ext cx="394313" cy="394313"/>
           </a:xfrm>
           <a:prstGeom prst="ellipse">
             <a:avLst/>
@@ -7756,9 +8076,11 @@
           <a:bodyPr rtlCol="0" anchor="ctr" wrap="none" lIns="0" rIns="0" tIns="0" bIns="0"/>
           <a:lstStyle/>
           <a:p>
-            <a:pPr algn="ctr"/>
-            <a:r>
-              <a:rPr sz="1300" b="1" i="0">
+            <a:pPr algn="ctr">
+              <a:buNone/>
+            </a:pPr>
+            <a:r>
+              <a:rPr sz="1200" b="1" i="0">
                 <a:solidFill>
                   <a:srgbClr val="FFFFFF"/>
                 </a:solidFill>
@@ -7779,8 +8101,8 @@
         </p:nvSpPr>
         <p:spPr>
           <a:xfrm>
-            <a:off x="548640" y="3218882"/>
-            <a:ext cx="6949440" cy="758456"/>
+            <a:off x="548640" y="3068370"/>
+            <a:ext cx="2992755" cy="635990"/>
           </a:xfrm>
           <a:prstGeom prst="roundRect">
             <a:avLst/>
@@ -7813,7 +8135,9 @@
           <a:bodyPr rtlCol="0" anchor="ctr" wrap="square" lIns="152400" tIns="63500" bIns="63500"/>
           <a:lstStyle/>
           <a:p>
-            <a:pPr algn="l"/>
+            <a:pPr algn="l">
+              <a:buNone/>
+            </a:pPr>
             <a:r>
               <a:rPr sz="1100" b="1" i="0">
                 <a:solidFill>
@@ -7826,7 +8150,7 @@
               <a:t>王一雪: </a:t>
             </a:r>
             <a:r>
-              <a:rPr sz="1600" b="1" i="0">
+              <a:rPr sz="1500" b="1" i="0">
                 <a:solidFill>
                   <a:srgbClr val="1F2933"/>
                 </a:solidFill>
@@ -7838,7 +8162,9 @@
             </a:r>
           </a:p>
           <a:p>
-            <a:pPr algn="l"/>
+            <a:pPr algn="l">
+              <a:buNone/>
+            </a:pPr>
             <a:r>
               <a:rPr sz="1100" b="0" i="1">
                 <a:solidFill>
@@ -7861,8 +8187,8 @@
         </p:nvSpPr>
         <p:spPr>
           <a:xfrm>
-            <a:off x="371977" y="3101107"/>
-            <a:ext cx="420624" cy="420624"/>
+            <a:off x="383028" y="2957962"/>
+            <a:ext cx="394313" cy="394313"/>
           </a:xfrm>
           <a:prstGeom prst="ellipse">
             <a:avLst/>
@@ -7895,9 +8221,11 @@
           <a:bodyPr rtlCol="0" anchor="ctr" wrap="none" lIns="0" rIns="0" tIns="0" bIns="0"/>
           <a:lstStyle/>
           <a:p>
-            <a:pPr algn="ctr"/>
-            <a:r>
-              <a:rPr sz="1300" b="1" i="0">
+            <a:pPr algn="ctr">
+              <a:buNone/>
+            </a:pPr>
+            <a:r>
+              <a:rPr sz="1200" b="1" i="0">
                 <a:solidFill>
                   <a:srgbClr val="FFFFFF"/>
                 </a:solidFill>
@@ -7918,8 +8246,8 @@
         </p:nvSpPr>
         <p:spPr>
           <a:xfrm>
-            <a:off x="4693615" y="4087659"/>
-            <a:ext cx="6949440" cy="758456"/>
+            <a:off x="8803970" y="3796867"/>
+            <a:ext cx="2839085" cy="635990"/>
           </a:xfrm>
           <a:prstGeom prst="roundRect">
             <a:avLst/>
@@ -7952,7 +8280,9 @@
           <a:bodyPr rtlCol="0" anchor="ctr" wrap="square" lIns="152400" tIns="63500" bIns="63500"/>
           <a:lstStyle/>
           <a:p>
-            <a:pPr algn="l"/>
+            <a:pPr algn="l">
+              <a:buNone/>
+            </a:pPr>
             <a:r>
               <a:rPr sz="1100" b="1" i="0">
                 <a:solidFill>
@@ -7965,7 +8295,7 @@
               <a:t>白家月: </a:t>
             </a:r>
             <a:r>
-              <a:rPr sz="1600" b="1" i="0">
+              <a:rPr sz="1500" b="1" i="0">
                 <a:solidFill>
                   <a:srgbClr val="1F2933"/>
                 </a:solidFill>
@@ -7977,7 +8307,9 @@
             </a:r>
           </a:p>
           <a:p>
-            <a:pPr algn="l"/>
+            <a:pPr algn="l">
+              <a:buNone/>
+            </a:pPr>
             <a:r>
               <a:rPr sz="1100" b="0" i="1">
                 <a:solidFill>
@@ -8000,8 +8332,8 @@
         </p:nvSpPr>
         <p:spPr>
           <a:xfrm>
-            <a:off x="11399093" y="3969884"/>
-            <a:ext cx="420624" cy="420624"/>
+            <a:off x="11414353" y="3686459"/>
+            <a:ext cx="394313" cy="394313"/>
           </a:xfrm>
           <a:prstGeom prst="ellipse">
             <a:avLst/>
@@ -8034,9 +8366,11 @@
           <a:bodyPr rtlCol="0" anchor="ctr" wrap="none" lIns="0" rIns="0" tIns="0" bIns="0"/>
           <a:lstStyle/>
           <a:p>
-            <a:pPr algn="ctr"/>
-            <a:r>
-              <a:rPr sz="1300" b="1" i="0">
+            <a:pPr algn="ctr">
+              <a:buNone/>
+            </a:pPr>
+            <a:r>
+              <a:rPr sz="1200" b="1" i="0">
                 <a:solidFill>
                   <a:srgbClr val="FFFFFF"/>
                 </a:solidFill>
@@ -8057,8 +8391,8 @@
         </p:nvSpPr>
         <p:spPr>
           <a:xfrm>
-            <a:off x="548640" y="4956436"/>
-            <a:ext cx="6949440" cy="758456"/>
+            <a:off x="548640" y="4525364"/>
+            <a:ext cx="4606290" cy="635990"/>
           </a:xfrm>
           <a:prstGeom prst="roundRect">
             <a:avLst/>
@@ -8091,7 +8425,9 @@
           <a:bodyPr rtlCol="0" anchor="ctr" wrap="square" lIns="152400" tIns="63500" bIns="63500"/>
           <a:lstStyle/>
           <a:p>
-            <a:pPr algn="l"/>
+            <a:pPr algn="l">
+              <a:buNone/>
+            </a:pPr>
             <a:r>
               <a:rPr sz="1100" b="1" i="0">
                 <a:solidFill>
@@ -8104,7 +8440,7 @@
               <a:t>王一雪: </a:t>
             </a:r>
             <a:r>
-              <a:rPr sz="1600" b="1" i="0">
+              <a:rPr sz="1500" b="1" i="0">
                 <a:solidFill>
                   <a:srgbClr val="1F2933"/>
                 </a:solidFill>
@@ -8116,7 +8452,9 @@
             </a:r>
           </a:p>
           <a:p>
-            <a:pPr algn="l"/>
+            <a:pPr algn="l">
+              <a:buNone/>
+            </a:pPr>
             <a:r>
               <a:rPr sz="1100" b="0" i="1">
                 <a:solidFill>
@@ -8139,8 +8477,8 @@
         </p:nvSpPr>
         <p:spPr>
           <a:xfrm>
-            <a:off x="371977" y="4838661"/>
-            <a:ext cx="420624" cy="420624"/>
+            <a:off x="383028" y="4414956"/>
+            <a:ext cx="394313" cy="394313"/>
           </a:xfrm>
           <a:prstGeom prst="ellipse">
             <a:avLst/>
@@ -8173,9 +8511,11 @@
           <a:bodyPr rtlCol="0" anchor="ctr" wrap="none" lIns="0" rIns="0" tIns="0" bIns="0"/>
           <a:lstStyle/>
           <a:p>
-            <a:pPr algn="ctr"/>
-            <a:r>
-              <a:rPr sz="1300" b="1" i="0">
+            <a:pPr algn="ctr">
+              <a:buNone/>
+            </a:pPr>
+            <a:r>
+              <a:rPr sz="1200" b="1" i="0">
                 <a:solidFill>
                   <a:srgbClr val="FFFFFF"/>
                 </a:solidFill>
@@ -8196,8 +8536,8 @@
         </p:nvSpPr>
         <p:spPr>
           <a:xfrm>
-            <a:off x="4693615" y="5825213"/>
-            <a:ext cx="6949440" cy="758456"/>
+            <a:off x="9725990" y="5253861"/>
+            <a:ext cx="1917065" cy="635990"/>
           </a:xfrm>
           <a:prstGeom prst="roundRect">
             <a:avLst/>
@@ -8230,7 +8570,9 @@
           <a:bodyPr rtlCol="0" anchor="ctr" wrap="square" lIns="152400" tIns="63500" bIns="63500"/>
           <a:lstStyle/>
           <a:p>
-            <a:pPr algn="l"/>
+            <a:pPr algn="l">
+              <a:buNone/>
+            </a:pPr>
             <a:r>
               <a:rPr sz="1100" b="1" i="0">
                 <a:solidFill>
@@ -8243,7 +8585,7 @@
               <a:t>白家月: </a:t>
             </a:r>
             <a:r>
-              <a:rPr sz="1600" b="1" i="0">
+              <a:rPr sz="1500" b="1" i="0">
                 <a:solidFill>
                   <a:srgbClr val="1F2933"/>
                 </a:solidFill>
@@ -8255,7 +8597,9 @@
             </a:r>
           </a:p>
           <a:p>
-            <a:pPr algn="l"/>
+            <a:pPr algn="l">
+              <a:buNone/>
+            </a:pPr>
             <a:r>
               <a:rPr sz="1100" b="0" i="1">
                 <a:solidFill>
@@ -8278,8 +8622,8 @@
         </p:nvSpPr>
         <p:spPr>
           <a:xfrm>
-            <a:off x="11399093" y="5707438"/>
-            <a:ext cx="420624" cy="420624"/>
+            <a:off x="11414353" y="5143453"/>
+            <a:ext cx="394313" cy="394313"/>
           </a:xfrm>
           <a:prstGeom prst="ellipse">
             <a:avLst/>
@@ -8312,9 +8656,11 @@
           <a:bodyPr rtlCol="0" anchor="ctr" wrap="none" lIns="0" rIns="0" tIns="0" bIns="0"/>
           <a:lstStyle/>
           <a:p>
-            <a:pPr algn="ctr"/>
-            <a:r>
-              <a:rPr sz="1300" b="1" i="0">
+            <a:pPr algn="ctr">
+              <a:buNone/>
+            </a:pPr>
+            <a:r>
+              <a:rPr sz="1200" b="1" i="0">
                 <a:solidFill>
                   <a:srgbClr val="FFFFFF"/>
                 </a:solidFill>
@@ -8456,7 +8802,7 @@
         <p:spPr>
           <a:xfrm>
             <a:off x="0" y="0"/>
-            <a:ext cx="12191695" cy="1207008"/>
+            <a:ext cx="12191695" cy="1337056"/>
           </a:xfrm>
           <a:prstGeom prst="rect">
             <a:avLst/>
@@ -8528,10 +8874,12 @@
           </a:fontRef>
         </p:style>
         <p:txBody>
-          <a:bodyPr rtlCol="0" anchor="ctr" wrap="square" tIns="25400" bIns="25400"/>
-          <a:lstStyle/>
-          <a:p>
-            <a:pPr algn="ctr"/>
+          <a:bodyPr rtlCol="0" anchor="ctr" wrap="none" tIns="25400" bIns="25400"/>
+          <a:lstStyle/>
+          <a:p>
+            <a:pPr algn="ctr">
+              <a:buNone/>
+            </a:pPr>
             <a:r>
               <a:rPr sz="1600" b="1" i="0">
                 <a:solidFill>
@@ -8555,7 +8903,7 @@
         <p:spPr>
           <a:xfrm>
             <a:off x="548640" y="566928"/>
-            <a:ext cx="11094415" cy="566928"/>
+            <a:ext cx="11094415" cy="642112"/>
           </a:xfrm>
           <a:prstGeom prst="rect">
             <a:avLst/>
@@ -8568,6 +8916,9 @@
           </a:bodyPr>
           <a:lstStyle/>
           <a:p>
+            <a:pPr>
+              <a:buNone/>
+            </a:pPr>
             <a:r>
               <a:rPr sz="2700" b="1" i="0">
                 <a:solidFill>
@@ -8590,8 +8941,8 @@
         </p:nvSpPr>
         <p:spPr>
           <a:xfrm>
-            <a:off x="548640" y="1481328"/>
-            <a:ext cx="6949440" cy="758456"/>
+            <a:off x="548640" y="1611376"/>
+            <a:ext cx="5912485" cy="667015"/>
           </a:xfrm>
           <a:prstGeom prst="roundRect">
             <a:avLst/>
@@ -8624,7 +8975,9 @@
           <a:bodyPr rtlCol="0" anchor="ctr" wrap="square" lIns="152400" tIns="63500" bIns="63500"/>
           <a:lstStyle/>
           <a:p>
-            <a:pPr algn="l"/>
+            <a:pPr algn="l">
+              <a:buNone/>
+            </a:pPr>
             <a:r>
               <a:rPr sz="1100" b="1" i="0">
                 <a:solidFill>
@@ -8637,7 +8990,7 @@
               <a:t>陈天中: </a:t>
             </a:r>
             <a:r>
-              <a:rPr sz="1600" b="1" i="0">
+              <a:rPr sz="1500" b="1" i="0">
                 <a:solidFill>
                   <a:srgbClr val="1F2933"/>
                 </a:solidFill>
@@ -8649,7 +9002,9 @@
             </a:r>
           </a:p>
           <a:p>
-            <a:pPr algn="l"/>
+            <a:pPr algn="l">
+              <a:buNone/>
+            </a:pPr>
             <a:r>
               <a:rPr sz="1100" b="0" i="1">
                 <a:solidFill>
@@ -8672,8 +9027,8 @@
         </p:nvSpPr>
         <p:spPr>
           <a:xfrm>
-            <a:off x="371977" y="1363553"/>
-            <a:ext cx="420624" cy="420624"/>
+            <a:off x="374949" y="1495582"/>
+            <a:ext cx="413549" cy="413549"/>
           </a:xfrm>
           <a:prstGeom prst="ellipse">
             <a:avLst/>
@@ -8706,7 +9061,9 @@
           <a:bodyPr rtlCol="0" anchor="ctr" wrap="none" lIns="0" rIns="0" tIns="0" bIns="0"/>
           <a:lstStyle/>
           <a:p>
-            <a:pPr algn="ctr"/>
+            <a:pPr algn="ctr">
+              <a:buNone/>
+            </a:pPr>
             <a:r>
               <a:rPr sz="1300" b="1" i="0">
                 <a:solidFill>
@@ -8729,8 +9086,8 @@
         </p:nvSpPr>
         <p:spPr>
           <a:xfrm>
-            <a:off x="4693615" y="2350105"/>
-            <a:ext cx="6949440" cy="758456"/>
+            <a:off x="7497775" y="2375411"/>
+            <a:ext cx="4145280" cy="667015"/>
           </a:xfrm>
           <a:prstGeom prst="roundRect">
             <a:avLst/>
@@ -8763,7 +9120,9 @@
           <a:bodyPr rtlCol="0" anchor="ctr" wrap="square" lIns="152400" tIns="63500" bIns="63500"/>
           <a:lstStyle/>
           <a:p>
-            <a:pPr algn="l"/>
+            <a:pPr algn="l">
+              <a:buNone/>
+            </a:pPr>
             <a:r>
               <a:rPr sz="1100" b="1" i="0">
                 <a:solidFill>
@@ -8776,7 +9135,7 @@
               <a:t>白家月: </a:t>
             </a:r>
             <a:r>
-              <a:rPr sz="1600" b="1" i="0">
+              <a:rPr sz="1500" b="1" i="0">
                 <a:solidFill>
                   <a:srgbClr val="1F2933"/>
                 </a:solidFill>
@@ -8788,7 +9147,9 @@
             </a:r>
           </a:p>
           <a:p>
-            <a:pPr algn="l"/>
+            <a:pPr algn="l">
+              <a:buNone/>
+            </a:pPr>
             <a:r>
               <a:rPr sz="1100" b="0" i="1">
                 <a:solidFill>
@@ -8811,8 +9172,8 @@
         </p:nvSpPr>
         <p:spPr>
           <a:xfrm>
-            <a:off x="11399093" y="2232330"/>
-            <a:ext cx="420624" cy="420624"/>
+            <a:off x="11403196" y="2259617"/>
+            <a:ext cx="413549" cy="413549"/>
           </a:xfrm>
           <a:prstGeom prst="ellipse">
             <a:avLst/>
@@ -8845,7 +9206,9 @@
           <a:bodyPr rtlCol="0" anchor="ctr" wrap="none" lIns="0" rIns="0" tIns="0" bIns="0"/>
           <a:lstStyle/>
           <a:p>
-            <a:pPr algn="ctr"/>
+            <a:pPr algn="ctr">
+              <a:buNone/>
+            </a:pPr>
             <a:r>
               <a:rPr sz="1300" b="1" i="0">
                 <a:solidFill>
@@ -8868,8 +9231,8 @@
         </p:nvSpPr>
         <p:spPr>
           <a:xfrm>
-            <a:off x="548640" y="3218882"/>
-            <a:ext cx="6949440" cy="758456"/>
+            <a:off x="548640" y="3139446"/>
+            <a:ext cx="2608580" cy="667015"/>
           </a:xfrm>
           <a:prstGeom prst="roundRect">
             <a:avLst/>
@@ -8902,7 +9265,9 @@
           <a:bodyPr rtlCol="0" anchor="ctr" wrap="square" lIns="152400" tIns="63500" bIns="63500"/>
           <a:lstStyle/>
           <a:p>
-            <a:pPr algn="l"/>
+            <a:pPr algn="l">
+              <a:buNone/>
+            </a:pPr>
             <a:r>
               <a:rPr sz="1100" b="1" i="0">
                 <a:solidFill>
@@ -8915,7 +9280,7 @@
               <a:t>陈天中: </a:t>
             </a:r>
             <a:r>
-              <a:rPr sz="1600" b="1" i="0">
+              <a:rPr sz="1500" b="1" i="0">
                 <a:solidFill>
                   <a:srgbClr val="1F2933"/>
                 </a:solidFill>
@@ -8927,7 +9292,9 @@
             </a:r>
           </a:p>
           <a:p>
-            <a:pPr algn="l"/>
+            <a:pPr algn="l">
+              <a:buNone/>
+            </a:pPr>
             <a:r>
               <a:rPr sz="1100" b="0" i="1">
                 <a:solidFill>
@@ -8950,8 +9317,8 @@
         </p:nvSpPr>
         <p:spPr>
           <a:xfrm>
-            <a:off x="371977" y="3101107"/>
-            <a:ext cx="420624" cy="420624"/>
+            <a:off x="374949" y="3023652"/>
+            <a:ext cx="413549" cy="413549"/>
           </a:xfrm>
           <a:prstGeom prst="ellipse">
             <a:avLst/>
@@ -8984,7 +9351,9 @@
           <a:bodyPr rtlCol="0" anchor="ctr" wrap="none" lIns="0" rIns="0" tIns="0" bIns="0"/>
           <a:lstStyle/>
           <a:p>
-            <a:pPr algn="ctr"/>
+            <a:pPr algn="ctr">
+              <a:buNone/>
+            </a:pPr>
             <a:r>
               <a:rPr sz="1300" b="1" i="0">
                 <a:solidFill>
@@ -9007,8 +9376,8 @@
         </p:nvSpPr>
         <p:spPr>
           <a:xfrm>
-            <a:off x="4693615" y="4087659"/>
-            <a:ext cx="6949440" cy="758456"/>
+            <a:off x="8803970" y="3903481"/>
+            <a:ext cx="2839085" cy="667015"/>
           </a:xfrm>
           <a:prstGeom prst="roundRect">
             <a:avLst/>
@@ -9041,7 +9410,9 @@
           <a:bodyPr rtlCol="0" anchor="ctr" wrap="square" lIns="152400" tIns="63500" bIns="63500"/>
           <a:lstStyle/>
           <a:p>
-            <a:pPr algn="l"/>
+            <a:pPr algn="l">
+              <a:buNone/>
+            </a:pPr>
             <a:r>
               <a:rPr sz="1100" b="1" i="0">
                 <a:solidFill>
@@ -9054,7 +9425,7 @@
               <a:t>白家月: </a:t>
             </a:r>
             <a:r>
-              <a:rPr sz="1600" b="1" i="0">
+              <a:rPr sz="1500" b="1" i="0">
                 <a:solidFill>
                   <a:srgbClr val="1F2933"/>
                 </a:solidFill>
@@ -9066,7 +9437,9 @@
             </a:r>
           </a:p>
           <a:p>
-            <a:pPr algn="l"/>
+            <a:pPr algn="l">
+              <a:buNone/>
+            </a:pPr>
             <a:r>
               <a:rPr sz="1100" b="0" i="1">
                 <a:solidFill>
@@ -9089,8 +9462,8 @@
         </p:nvSpPr>
         <p:spPr>
           <a:xfrm>
-            <a:off x="11399093" y="3969884"/>
-            <a:ext cx="420624" cy="420624"/>
+            <a:off x="11403196" y="3787687"/>
+            <a:ext cx="413549" cy="413549"/>
           </a:xfrm>
           <a:prstGeom prst="ellipse">
             <a:avLst/>
@@ -9123,7 +9496,9 @@
           <a:bodyPr rtlCol="0" anchor="ctr" wrap="none" lIns="0" rIns="0" tIns="0" bIns="0"/>
           <a:lstStyle/>
           <a:p>
-            <a:pPr algn="ctr"/>
+            <a:pPr algn="ctr">
+              <a:buNone/>
+            </a:pPr>
             <a:r>
               <a:rPr sz="1300" b="1" i="0">
                 <a:solidFill>
@@ -9146,8 +9521,8 @@
         </p:nvSpPr>
         <p:spPr>
           <a:xfrm>
-            <a:off x="4693615" y="4956436"/>
-            <a:ext cx="6949440" cy="758456"/>
+            <a:off x="6575755" y="4667516"/>
+            <a:ext cx="5067300" cy="667015"/>
           </a:xfrm>
           <a:prstGeom prst="roundRect">
             <a:avLst/>
@@ -9180,7 +9555,9 @@
           <a:bodyPr rtlCol="0" anchor="ctr" wrap="square" lIns="152400" tIns="63500" bIns="63500"/>
           <a:lstStyle/>
           <a:p>
-            <a:pPr algn="l"/>
+            <a:pPr algn="l">
+              <a:buNone/>
+            </a:pPr>
             <a:r>
               <a:rPr sz="1100" b="1" i="0">
                 <a:solidFill>
@@ -9193,7 +9570,7 @@
               <a:t>白家月: </a:t>
             </a:r>
             <a:r>
-              <a:rPr sz="1600" b="1" i="0">
+              <a:rPr sz="1500" b="1" i="0">
                 <a:solidFill>
                   <a:srgbClr val="1F2933"/>
                 </a:solidFill>
@@ -9205,7 +9582,9 @@
             </a:r>
           </a:p>
           <a:p>
-            <a:pPr algn="l"/>
+            <a:pPr algn="l">
+              <a:buNone/>
+            </a:pPr>
             <a:r>
               <a:rPr sz="1100" b="0" i="1">
                 <a:solidFill>
@@ -9228,8 +9607,8 @@
         </p:nvSpPr>
         <p:spPr>
           <a:xfrm>
-            <a:off x="11399093" y="4838661"/>
-            <a:ext cx="420624" cy="420624"/>
+            <a:off x="11403196" y="4551722"/>
+            <a:ext cx="413549" cy="413549"/>
           </a:xfrm>
           <a:prstGeom prst="ellipse">
             <a:avLst/>
@@ -9262,7 +9641,9 @@
           <a:bodyPr rtlCol="0" anchor="ctr" wrap="none" lIns="0" rIns="0" tIns="0" bIns="0"/>
           <a:lstStyle/>
           <a:p>
-            <a:pPr algn="ctr"/>
+            <a:pPr algn="ctr">
+              <a:buNone/>
+            </a:pPr>
             <a:r>
               <a:rPr sz="1300" b="1" i="0">
                 <a:solidFill>
@@ -9285,8 +9666,8 @@
         </p:nvSpPr>
         <p:spPr>
           <a:xfrm>
-            <a:off x="548640" y="5825213"/>
-            <a:ext cx="6949440" cy="758456"/>
+            <a:off x="548640" y="5431551"/>
+            <a:ext cx="3146425" cy="667015"/>
           </a:xfrm>
           <a:prstGeom prst="roundRect">
             <a:avLst/>
@@ -9319,7 +9700,9 @@
           <a:bodyPr rtlCol="0" anchor="ctr" wrap="square" lIns="152400" tIns="63500" bIns="63500"/>
           <a:lstStyle/>
           <a:p>
-            <a:pPr algn="l"/>
+            <a:pPr algn="l">
+              <a:buNone/>
+            </a:pPr>
             <a:r>
               <a:rPr sz="1100" b="1" i="0">
                 <a:solidFill>
@@ -9332,7 +9715,7 @@
               <a:t>陈天中: </a:t>
             </a:r>
             <a:r>
-              <a:rPr sz="1600" b="1" i="0">
+              <a:rPr sz="1500" b="1" i="0">
                 <a:solidFill>
                   <a:srgbClr val="1F2933"/>
                 </a:solidFill>
@@ -9344,7 +9727,9 @@
             </a:r>
           </a:p>
           <a:p>
-            <a:pPr algn="l"/>
+            <a:pPr algn="l">
+              <a:buNone/>
+            </a:pPr>
             <a:r>
               <a:rPr sz="1100" b="0" i="1">
                 <a:solidFill>
@@ -9367,8 +9752,8 @@
         </p:nvSpPr>
         <p:spPr>
           <a:xfrm>
-            <a:off x="371977" y="5707438"/>
-            <a:ext cx="420624" cy="420624"/>
+            <a:off x="374949" y="5315757"/>
+            <a:ext cx="413549" cy="413549"/>
           </a:xfrm>
           <a:prstGeom prst="ellipse">
             <a:avLst/>
@@ -9401,7 +9786,9 @@
           <a:bodyPr rtlCol="0" anchor="ctr" wrap="none" lIns="0" rIns="0" tIns="0" bIns="0"/>
           <a:lstStyle/>
           <a:p>
-            <a:pPr algn="ctr"/>
+            <a:pPr algn="ctr">
+              <a:buNone/>
+            </a:pPr>
             <a:r>
               <a:rPr sz="1300" b="1" i="0">
                 <a:solidFill>
@@ -9545,7 +9932,7 @@
         <p:spPr>
           <a:xfrm>
             <a:off x="0" y="0"/>
-            <a:ext cx="12191695" cy="1207008"/>
+            <a:ext cx="12191695" cy="1337056"/>
           </a:xfrm>
           <a:prstGeom prst="rect">
             <a:avLst/>
@@ -9589,7 +9976,7 @@
         <p:spPr>
           <a:xfrm>
             <a:off x="548640" y="146304"/>
-            <a:ext cx="1371600" cy="384048"/>
+            <a:ext cx="1966894" cy="384048"/>
           </a:xfrm>
           <a:prstGeom prst="roundRect">
             <a:avLst/>
@@ -9617,10 +10004,12 @@
           </a:fontRef>
         </p:style>
         <p:txBody>
-          <a:bodyPr rtlCol="0" anchor="ctr" wrap="square" tIns="25400" bIns="25400"/>
-          <a:lstStyle/>
-          <a:p>
-            <a:pPr algn="ctr"/>
+          <a:bodyPr rtlCol="0" anchor="ctr" wrap="none" tIns="25400" bIns="25400"/>
+          <a:lstStyle/>
+          <a:p>
+            <a:pPr algn="ctr">
+              <a:buNone/>
+            </a:pPr>
             <a:r>
               <a:rPr sz="1600" b="1" i="0">
                 <a:solidFill>
@@ -9644,7 +10033,7 @@
         <p:spPr>
           <a:xfrm>
             <a:off x="548640" y="566928"/>
-            <a:ext cx="11094415" cy="566928"/>
+            <a:ext cx="11094415" cy="642112"/>
           </a:xfrm>
           <a:prstGeom prst="rect">
             <a:avLst/>
@@ -9657,6 +10046,9 @@
           </a:bodyPr>
           <a:lstStyle/>
           <a:p>
+            <a:pPr>
+              <a:buNone/>
+            </a:pPr>
             <a:r>
               <a:rPr sz="2700" b="1" i="0">
                 <a:solidFill>
@@ -9667,216 +10059,13 @@
                 <a:cs typeface="Microsoft YaHei"/>
               </a:rPr>
               <a:t>白家月 nhắn tin cho 王老师</a:t>
-            </a:r>
-          </a:p>
-        </p:txBody>
-      </p:sp>
-      <p:sp>
-        <p:nvSpPr>
-          <p:cNvPr id="6" name="TextBox 5"/>
-          <p:cNvSpPr txBox="1"/>
-          <p:nvPr/>
-        </p:nvSpPr>
-        <p:spPr>
-          <a:xfrm>
-            <a:off x="4754880" y="1481328"/>
-            <a:ext cx="6888175" cy="5010912"/>
-          </a:xfrm>
-          <a:prstGeom prst="rect">
-            <a:avLst/>
-          </a:prstGeom>
-          <a:noFill/>
-        </p:spPr>
-        <p:txBody>
-          <a:bodyPr wrap="square" anchor="ctr">
-            <a:spAutoFit/>
-          </a:bodyPr>
-          <a:lstStyle/>
-          <a:p>
-            <a:pPr>
-              <a:spcBef>
-                <a:spcPts val="1600"/>
-              </a:spcBef>
-            </a:pPr>
-            <a:r>
-              <a:rPr sz="2200" b="1" i="0">
-                <a:solidFill>
-                  <a:srgbClr val="1F2933"/>
-                </a:solidFill>
-                <a:latin typeface="Calibri"/>
-                <a:ea typeface="Microsoft YaHei"/>
-                <a:cs typeface="Microsoft YaHei"/>
-              </a:rPr>
-              <a:t>王老师，我们已经到北京了，是您姐姐来接的我们。</a:t>
-            </a:r>
-          </a:p>
-          <a:p>
-            <a:pPr>
-              <a:spcBef>
-                <a:spcPts val="100"/>
-              </a:spcBef>
-            </a:pPr>
-            <a:r>
-              <a:rPr sz="1400" b="0" i="1">
-                <a:solidFill>
-                  <a:srgbClr val="8E2B20"/>
-                </a:solidFill>
-                <a:latin typeface="Calibri"/>
-                <a:ea typeface="Microsoft YaHei"/>
-                <a:cs typeface="Microsoft YaHei"/>
-              </a:rPr>
-              <a:t>Wáng lǎoshī, wǒmen yǐjīng dào Běijīng le, shì nín jiějie lái jiē de wǒmen.</a:t>
-            </a:r>
-          </a:p>
-          <a:p>
-            <a:pPr>
-              <a:spcBef>
-                <a:spcPts val="100"/>
-              </a:spcBef>
-            </a:pPr>
-            <a:r>
-              <a:rPr sz="1400" b="0" i="0">
-                <a:solidFill>
-                  <a:srgbClr val="6B7683"/>
-                </a:solidFill>
-                <a:latin typeface="Calibri"/>
-                <a:ea typeface="Microsoft YaHei"/>
-                <a:cs typeface="Microsoft YaHei"/>
-              </a:rPr>
-              <a:t>Cô ơi, tụi em đến Bắc Kinh rồi, chị gái cô đã đến đón tụi em.</a:t>
-            </a:r>
-          </a:p>
-          <a:p>
-            <a:pPr>
-              <a:spcBef>
-                <a:spcPts val="1600"/>
-              </a:spcBef>
-            </a:pPr>
-            <a:r>
-              <a:rPr sz="2200" b="1" i="0">
-                <a:solidFill>
-                  <a:srgbClr val="1F2933"/>
-                </a:solidFill>
-                <a:latin typeface="Calibri"/>
-                <a:ea typeface="Microsoft YaHei"/>
-                <a:cs typeface="Microsoft YaHei"/>
-              </a:rPr>
-              <a:t>她请我们吃了北京烤鸭，还给我们介绍了很多东西。</a:t>
-            </a:r>
-          </a:p>
-          <a:p>
-            <a:pPr>
-              <a:spcBef>
-                <a:spcPts val="100"/>
-              </a:spcBef>
-            </a:pPr>
-            <a:r>
-              <a:rPr sz="1400" b="0" i="1">
-                <a:solidFill>
-                  <a:srgbClr val="8E2B20"/>
-                </a:solidFill>
-                <a:latin typeface="Calibri"/>
-                <a:ea typeface="Microsoft YaHei"/>
-                <a:cs typeface="Microsoft YaHei"/>
-              </a:rPr>
-              <a:t>Tā qǐng wǒmen chīle Běijīng kǎoyā, hái gěi wǒmen jièshàole hěn duō dōngxi.</a:t>
-            </a:r>
-          </a:p>
-          <a:p>
-            <a:pPr>
-              <a:spcBef>
-                <a:spcPts val="100"/>
-              </a:spcBef>
-            </a:pPr>
-            <a:r>
-              <a:rPr sz="1400" b="0" i="0">
-                <a:solidFill>
-                  <a:srgbClr val="6B7683"/>
-                </a:solidFill>
-                <a:latin typeface="Calibri"/>
-                <a:ea typeface="Microsoft YaHei"/>
-                <a:cs typeface="Microsoft YaHei"/>
-              </a:rPr>
-              <a:t>Chị ấy mời tụi em ăn vịt quay Bắc Kinh, còn giới thiệu cho tụi em nhiều thứ nữa.</a:t>
-            </a:r>
-          </a:p>
-          <a:p>
-            <a:pPr>
-              <a:spcBef>
-                <a:spcPts val="1600"/>
-              </a:spcBef>
-            </a:pPr>
-            <a:r>
-              <a:rPr sz="2200" b="1" i="0">
-                <a:solidFill>
-                  <a:srgbClr val="1F2933"/>
-                </a:solidFill>
-                <a:latin typeface="Calibri"/>
-                <a:ea typeface="Microsoft YaHei"/>
-                <a:cs typeface="Microsoft YaHei"/>
-              </a:rPr>
-              <a:t>我们的中文不太好，有时不太懂她的意思。</a:t>
-            </a:r>
-          </a:p>
-          <a:p>
-            <a:pPr>
-              <a:spcBef>
-                <a:spcPts val="100"/>
-              </a:spcBef>
-            </a:pPr>
-            <a:r>
-              <a:rPr sz="1400" b="0" i="1">
-                <a:solidFill>
-                  <a:srgbClr val="8E2B20"/>
-                </a:solidFill>
-                <a:latin typeface="Calibri"/>
-                <a:ea typeface="Microsoft YaHei"/>
-                <a:cs typeface="Microsoft YaHei"/>
-              </a:rPr>
-              <a:t>Wǒmen de Zhōngwén bú tài hǎo, yǒushí bú tài dǒng tā de yìsi.</a:t>
-            </a:r>
-          </a:p>
-          <a:p>
-            <a:pPr>
-              <a:spcBef>
-                <a:spcPts val="100"/>
-              </a:spcBef>
-            </a:pPr>
-            <a:r>
-              <a:rPr sz="1400" b="0" i="0">
-                <a:solidFill>
-                  <a:srgbClr val="6B7683"/>
-                </a:solidFill>
-                <a:latin typeface="Calibri"/>
-                <a:ea typeface="Microsoft YaHei"/>
-                <a:cs typeface="Microsoft YaHei"/>
-              </a:rPr>
-              <a:t>Tiếng Trung của tụi em chưa tốt lắm, đôi khi không hiểu hết ý chị ấy.</a:t>
-            </a:r>
-          </a:p>
-          <a:p>
-            <a:pPr>
-              <a:spcBef>
-                <a:spcPts val="1400"/>
-              </a:spcBef>
-            </a:pPr>
-            <a:r>
-              <a:rPr sz="1400" b="0" i="0">
-                <a:solidFill>
-                  <a:srgbClr val="1F2933"/>
-                </a:solidFill>
-                <a:latin typeface="Calibri"/>
-                <a:ea typeface="Microsoft YaHei"/>
-                <a:cs typeface="Microsoft YaHei"/>
-              </a:rPr>
-              <a:t>• 白家月 nhắn tin kể lại cho 王老师 (王一飞) chuyện vừa được chị gái cô đón và mời ăn — 课文 dạng tự sự (叙述体), không phải hội thoại qua lại.</a:t>
             </a:r>
           </a:p>
         </p:txBody>
       </p:sp>
       <p:pic>
         <p:nvPicPr>
-          <p:cNvPr id="7" name="Picture 6" descr="texting.jpg"/>
+          <p:cNvPr id="6" name="Picture 5" descr="texting.jpg"/>
           <p:cNvPicPr>
             <a:picLocks noChangeAspect="1"/>
           </p:cNvPicPr>
@@ -9890,14 +10079,257 @@
         </p:blipFill>
         <p:spPr>
           <a:xfrm>
-            <a:off x="548640" y="2066544"/>
-            <a:ext cx="3840480" cy="3840480"/>
+            <a:off x="5314909" y="1611376"/>
+            <a:ext cx="1561876" cy="1561876"/>
           </a:xfrm>
           <a:prstGeom prst="rect">
             <a:avLst/>
           </a:prstGeom>
         </p:spPr>
       </p:pic>
+      <p:sp>
+        <p:nvSpPr>
+          <p:cNvPr id="7" name="TextBox 6"/>
+          <p:cNvSpPr txBox="1"/>
+          <p:nvPr/>
+        </p:nvSpPr>
+        <p:spPr>
+          <a:xfrm>
+            <a:off x="548640" y="3374420"/>
+            <a:ext cx="11094415" cy="3117820"/>
+          </a:xfrm>
+          <a:prstGeom prst="rect">
+            <a:avLst/>
+          </a:prstGeom>
+          <a:noFill/>
+        </p:spPr>
+        <p:txBody>
+          <a:bodyPr wrap="square" anchor="ctr">
+            <a:spAutoFit/>
+          </a:bodyPr>
+          <a:lstStyle/>
+          <a:p>
+            <a:pPr>
+              <a:buNone/>
+            </a:pPr>
+            <a:r>
+              <a:rPr sz="1700" b="1" i="0">
+                <a:solidFill>
+                  <a:srgbClr val="8E2B20"/>
+                </a:solidFill>
+                <a:latin typeface="Calibri"/>
+                <a:ea typeface="Microsoft YaHei"/>
+                <a:cs typeface="Microsoft YaHei"/>
+              </a:rPr>
+              <a:t>① </a:t>
+            </a:r>
+            <a:r>
+              <a:rPr sz="1700" b="1" i="0">
+                <a:solidFill>
+                  <a:srgbClr val="1F2933"/>
+                </a:solidFill>
+                <a:latin typeface="Calibri"/>
+                <a:ea typeface="Microsoft YaHei"/>
+                <a:cs typeface="Microsoft YaHei"/>
+              </a:rPr>
+              <a:t>王老师，我们已经到北京了，是您姐姐来接的我们。</a:t>
+            </a:r>
+          </a:p>
+          <a:p>
+            <a:pPr>
+              <a:spcBef>
+                <a:spcPts val="88"/>
+              </a:spcBef>
+              <a:buNone/>
+            </a:pPr>
+            <a:r>
+              <a:rPr sz="1100" b="0" i="1">
+                <a:solidFill>
+                  <a:srgbClr val="8E2B20"/>
+                </a:solidFill>
+                <a:latin typeface="Calibri"/>
+                <a:ea typeface="Microsoft YaHei"/>
+                <a:cs typeface="Microsoft YaHei"/>
+              </a:rPr>
+              <a:t>Wáng lǎoshī, wǒmen yǐjīng dào Běijīng le, shì nín jiějie lái jiē de wǒmen.</a:t>
+            </a:r>
+          </a:p>
+          <a:p>
+            <a:pPr>
+              <a:spcBef>
+                <a:spcPts val="88"/>
+              </a:spcBef>
+              <a:buNone/>
+            </a:pPr>
+            <a:r>
+              <a:rPr sz="1100" b="0" i="0">
+                <a:solidFill>
+                  <a:srgbClr val="6B7683"/>
+                </a:solidFill>
+                <a:latin typeface="Calibri"/>
+                <a:ea typeface="Microsoft YaHei"/>
+                <a:cs typeface="Microsoft YaHei"/>
+              </a:rPr>
+              <a:t>Cô ơi, tụi em đến Bắc Kinh rồi, chị gái cô đã đến đón tụi em.</a:t>
+            </a:r>
+          </a:p>
+          <a:p>
+            <a:pPr>
+              <a:spcBef>
+                <a:spcPts val="1243"/>
+              </a:spcBef>
+              <a:buNone/>
+            </a:pPr>
+            <a:r>
+              <a:rPr sz="1700" b="1" i="0">
+                <a:solidFill>
+                  <a:srgbClr val="8E2B20"/>
+                </a:solidFill>
+                <a:latin typeface="Calibri"/>
+                <a:ea typeface="Microsoft YaHei"/>
+                <a:cs typeface="Microsoft YaHei"/>
+              </a:rPr>
+              <a:t>② </a:t>
+            </a:r>
+            <a:r>
+              <a:rPr sz="1700" b="1" i="0">
+                <a:solidFill>
+                  <a:srgbClr val="1F2933"/>
+                </a:solidFill>
+                <a:latin typeface="Calibri"/>
+                <a:ea typeface="Microsoft YaHei"/>
+                <a:cs typeface="Microsoft YaHei"/>
+              </a:rPr>
+              <a:t>她请我们吃了北京烤鸭，还给我们介绍了很多东西。</a:t>
+            </a:r>
+          </a:p>
+          <a:p>
+            <a:pPr>
+              <a:spcBef>
+                <a:spcPts val="88"/>
+              </a:spcBef>
+              <a:buNone/>
+            </a:pPr>
+            <a:r>
+              <a:rPr sz="1100" b="0" i="1">
+                <a:solidFill>
+                  <a:srgbClr val="8E2B20"/>
+                </a:solidFill>
+                <a:latin typeface="Calibri"/>
+                <a:ea typeface="Microsoft YaHei"/>
+                <a:cs typeface="Microsoft YaHei"/>
+              </a:rPr>
+              <a:t>Tā qǐng wǒmen chīle Běijīng kǎoyā, hái gěi wǒmen jièshàole hěn duō dōngxi.</a:t>
+            </a:r>
+          </a:p>
+          <a:p>
+            <a:pPr>
+              <a:spcBef>
+                <a:spcPts val="88"/>
+              </a:spcBef>
+              <a:buNone/>
+            </a:pPr>
+            <a:r>
+              <a:rPr sz="1100" b="0" i="0">
+                <a:solidFill>
+                  <a:srgbClr val="6B7683"/>
+                </a:solidFill>
+                <a:latin typeface="Calibri"/>
+                <a:ea typeface="Microsoft YaHei"/>
+                <a:cs typeface="Microsoft YaHei"/>
+              </a:rPr>
+              <a:t>Chị ấy mời tụi em ăn vịt quay Bắc Kinh, còn giới thiệu cho tụi em nhiều thứ nữa.</a:t>
+            </a:r>
+          </a:p>
+          <a:p>
+            <a:pPr>
+              <a:spcBef>
+                <a:spcPts val="1243"/>
+              </a:spcBef>
+              <a:buNone/>
+            </a:pPr>
+            <a:r>
+              <a:rPr sz="1700" b="1" i="0">
+                <a:solidFill>
+                  <a:srgbClr val="8E2B20"/>
+                </a:solidFill>
+                <a:latin typeface="Calibri"/>
+                <a:ea typeface="Microsoft YaHei"/>
+                <a:cs typeface="Microsoft YaHei"/>
+              </a:rPr>
+              <a:t>③ </a:t>
+            </a:r>
+            <a:r>
+              <a:rPr sz="1700" b="1" i="0">
+                <a:solidFill>
+                  <a:srgbClr val="1F2933"/>
+                </a:solidFill>
+                <a:latin typeface="Calibri"/>
+                <a:ea typeface="Microsoft YaHei"/>
+                <a:cs typeface="Microsoft YaHei"/>
+              </a:rPr>
+              <a:t>我们的中文不太好，有时不太懂她的意思。</a:t>
+            </a:r>
+          </a:p>
+          <a:p>
+            <a:pPr>
+              <a:spcBef>
+                <a:spcPts val="88"/>
+              </a:spcBef>
+              <a:buNone/>
+            </a:pPr>
+            <a:r>
+              <a:rPr sz="1100" b="0" i="1">
+                <a:solidFill>
+                  <a:srgbClr val="8E2B20"/>
+                </a:solidFill>
+                <a:latin typeface="Calibri"/>
+                <a:ea typeface="Microsoft YaHei"/>
+                <a:cs typeface="Microsoft YaHei"/>
+              </a:rPr>
+              <a:t>Wǒmen de Zhōngwén bú tài hǎo, yǒushí bú tài dǒng tā de yìsi.</a:t>
+            </a:r>
+          </a:p>
+          <a:p>
+            <a:pPr>
+              <a:spcBef>
+                <a:spcPts val="88"/>
+              </a:spcBef>
+              <a:buNone/>
+            </a:pPr>
+            <a:r>
+              <a:rPr sz="1100" b="0" i="0">
+                <a:solidFill>
+                  <a:srgbClr val="6B7683"/>
+                </a:solidFill>
+                <a:latin typeface="Calibri"/>
+                <a:ea typeface="Microsoft YaHei"/>
+                <a:cs typeface="Microsoft YaHei"/>
+              </a:rPr>
+              <a:t>Tiếng Trung của tụi em chưa tốt lắm, đôi khi không hiểu hết ý chị ấy.</a:t>
+            </a:r>
+          </a:p>
+          <a:p>
+            <a:pPr>
+              <a:spcBef>
+                <a:spcPts val="1065"/>
+              </a:spcBef>
+              <a:buNone/>
+            </a:pPr>
+            <a:r>
+              <a:rPr sz="1200" b="0" i="0">
+                <a:solidFill>
+                  <a:srgbClr val="1F2933"/>
+                </a:solidFill>
+                <a:latin typeface="Calibri"/>
+                <a:ea typeface="Microsoft YaHei"/>
+                <a:cs typeface="Microsoft YaHei"/>
+              </a:rPr>
+              <a:t>• 白家月 nhắn tin kể lại cho 王老师 (王一飞) chuyện vừa được chị gái cô đón và mời ăn — 课文 dạng tự sự (叙述体), không phải hội thoại qua lại.</a:t>
+            </a:r>
+          </a:p>
+        </p:txBody>
+      </p:sp>
       <p:pic>
         <p:nvPicPr>
           <p:cNvPr id="8" name="slide18.mp3">
@@ -10027,7 +10459,7 @@
         <p:spPr>
           <a:xfrm>
             <a:off x="0" y="0"/>
-            <a:ext cx="12191695" cy="1207008"/>
+            <a:ext cx="12191695" cy="1337056"/>
           </a:xfrm>
           <a:prstGeom prst="rect">
             <a:avLst/>
@@ -10099,10 +10531,12 @@
           </a:fontRef>
         </p:style>
         <p:txBody>
-          <a:bodyPr rtlCol="0" anchor="ctr" wrap="square" tIns="25400" bIns="25400"/>
-          <a:lstStyle/>
-          <a:p>
-            <a:pPr algn="ctr"/>
+          <a:bodyPr rtlCol="0" anchor="ctr" wrap="none" tIns="25400" bIns="25400"/>
+          <a:lstStyle/>
+          <a:p>
+            <a:pPr algn="ctr">
+              <a:buNone/>
+            </a:pPr>
             <a:r>
               <a:rPr sz="1600" b="1" i="0">
                 <a:solidFill>
@@ -10126,7 +10560,7 @@
         <p:spPr>
           <a:xfrm>
             <a:off x="548640" y="566928"/>
-            <a:ext cx="11094415" cy="566928"/>
+            <a:ext cx="11094415" cy="642112"/>
           </a:xfrm>
           <a:prstGeom prst="rect">
             <a:avLst/>
@@ -10139,6 +10573,9 @@
           </a:bodyPr>
           <a:lstStyle/>
           <a:p>
+            <a:pPr>
+              <a:buNone/>
+            </a:pPr>
             <a:r>
               <a:rPr sz="2700" b="1" i="0">
                 <a:solidFill>
@@ -10161,8 +10598,8 @@
         </p:nvSpPr>
         <p:spPr>
           <a:xfrm>
-            <a:off x="548640" y="1481328"/>
-            <a:ext cx="6430975" cy="5010912"/>
+            <a:off x="548640" y="1611376"/>
+            <a:ext cx="6430975" cy="4880864"/>
           </a:xfrm>
           <a:prstGeom prst="rect">
             <a:avLst/>
@@ -10170,13 +10607,16 @@
           <a:noFill/>
         </p:spPr>
         <p:txBody>
-          <a:bodyPr wrap="square" anchor="ctr">
+          <a:bodyPr wrap="square" anchor="t">
             <a:spAutoFit/>
           </a:bodyPr>
           <a:lstStyle/>
           <a:p>
-            <a:r>
-              <a:rPr sz="2000" b="1" i="0">
+            <a:pPr>
+              <a:buNone/>
+            </a:pPr>
+            <a:r>
+              <a:rPr sz="1400" b="1" i="0">
                 <a:solidFill>
                   <a:srgbClr val="1F2933"/>
                 </a:solidFill>
@@ -10190,11 +10630,12 @@
           <a:p>
             <a:pPr>
               <a:spcBef>
-                <a:spcPts val="2000"/>
+                <a:spcPts val="1475"/>
               </a:spcBef>
-            </a:pPr>
-            <a:r>
-              <a:rPr sz="2600" b="1" i="0">
+              <a:buNone/>
+            </a:pPr>
+            <a:r>
+              <a:rPr sz="1900" b="1" i="0">
                 <a:solidFill>
                   <a:srgbClr val="1F2933"/>
                 </a:solidFill>
@@ -10204,8 +10645,16 @@
               </a:rPr>
               <a:t>你们就是她的学生吧？</a:t>
             </a:r>
-            <a:r>
-              <a:rPr sz="1500" b="0" i="1">
+          </a:p>
+          <a:p>
+            <a:pPr>
+              <a:spcBef>
+                <a:spcPts val="221"/>
+              </a:spcBef>
+              <a:buNone/>
+            </a:pPr>
+            <a:r>
+              <a:rPr sz="1100" b="0" i="1">
                 <a:solidFill>
                   <a:srgbClr val="8E2B20"/>
                 </a:solidFill>
@@ -10213,17 +10662,18 @@
                 <a:ea typeface="Microsoft YaHei"/>
                 <a:cs typeface="Microsoft YaHei"/>
               </a:rPr>
-              <a:t>  Nǐmen jiù shì tā de xuésheng ba?</a:t>
+              <a:t>Nǐmen jiù shì tā de xuésheng ba?</a:t>
             </a:r>
           </a:p>
           <a:p>
             <a:pPr>
               <a:spcBef>
-                <a:spcPts val="300"/>
+                <a:spcPts val="221"/>
               </a:spcBef>
-            </a:pPr>
-            <a:r>
-              <a:rPr sz="1500" b="0" i="0">
+              <a:buNone/>
+            </a:pPr>
+            <a:r>
+              <a:rPr sz="1100" b="0" i="0">
                 <a:solidFill>
                   <a:srgbClr val="6B7683"/>
                 </a:solidFill>
@@ -10237,11 +10687,12 @@
           <a:p>
             <a:pPr>
               <a:spcBef>
-                <a:spcPts val="2000"/>
+                <a:spcPts val="1475"/>
               </a:spcBef>
-            </a:pPr>
-            <a:r>
-              <a:rPr sz="2600" b="1" i="0">
+              <a:buNone/>
+            </a:pPr>
+            <a:r>
+              <a:rPr sz="1900" b="1" i="0">
                 <a:solidFill>
                   <a:srgbClr val="1F2933"/>
                 </a:solidFill>
@@ -10251,8 +10702,16 @@
               </a:rPr>
               <a:t>她唱歌很好听吧？</a:t>
             </a:r>
-            <a:r>
-              <a:rPr sz="1500" b="0" i="1">
+          </a:p>
+          <a:p>
+            <a:pPr>
+              <a:spcBef>
+                <a:spcPts val="221"/>
+              </a:spcBef>
+              <a:buNone/>
+            </a:pPr>
+            <a:r>
+              <a:rPr sz="1100" b="0" i="1">
                 <a:solidFill>
                   <a:srgbClr val="8E2B20"/>
                 </a:solidFill>
@@ -10260,17 +10719,18 @@
                 <a:ea typeface="Microsoft YaHei"/>
                 <a:cs typeface="Microsoft YaHei"/>
               </a:rPr>
-              <a:t>  Tā chàng gē hěn hǎotīng ba?</a:t>
+              <a:t>Tā chàng gē hěn hǎotīng ba?</a:t>
             </a:r>
           </a:p>
           <a:p>
             <a:pPr>
               <a:spcBef>
-                <a:spcPts val="300"/>
+                <a:spcPts val="221"/>
               </a:spcBef>
-            </a:pPr>
-            <a:r>
-              <a:rPr sz="1500" b="0" i="0">
+              <a:buNone/>
+            </a:pPr>
+            <a:r>
+              <a:rPr sz="1100" b="0" i="0">
                 <a:solidFill>
                   <a:srgbClr val="6B7683"/>
                 </a:solidFill>
@@ -10284,11 +10744,12 @@
           <a:p>
             <a:pPr>
               <a:spcBef>
-                <a:spcPts val="2000"/>
+                <a:spcPts val="1475"/>
               </a:spcBef>
-            </a:pPr>
-            <a:r>
-              <a:rPr sz="2600" b="1" i="0">
+              <a:buNone/>
+            </a:pPr>
+            <a:r>
+              <a:rPr sz="1900" b="1" i="0">
                 <a:solidFill>
                   <a:srgbClr val="1F2933"/>
                 </a:solidFill>
@@ -10298,8 +10759,16 @@
               </a:rPr>
               <a:t>陈天中是泰国人吧？</a:t>
             </a:r>
-            <a:r>
-              <a:rPr sz="1500" b="0" i="1">
+          </a:p>
+          <a:p>
+            <a:pPr>
+              <a:spcBef>
+                <a:spcPts val="221"/>
+              </a:spcBef>
+              <a:buNone/>
+            </a:pPr>
+            <a:r>
+              <a:rPr sz="1100" b="0" i="1">
                 <a:solidFill>
                   <a:srgbClr val="8E2B20"/>
                 </a:solidFill>
@@ -10307,17 +10776,18 @@
                 <a:ea typeface="Microsoft YaHei"/>
                 <a:cs typeface="Microsoft YaHei"/>
               </a:rPr>
-              <a:t>  Chén Tiānzhōng shì Tàiguó rén ba?</a:t>
+              <a:t>Chén Tiānzhōng shì Tàiguó rén ba?</a:t>
             </a:r>
           </a:p>
           <a:p>
             <a:pPr>
               <a:spcBef>
-                <a:spcPts val="300"/>
+                <a:spcPts val="221"/>
               </a:spcBef>
-            </a:pPr>
-            <a:r>
-              <a:rPr sz="1500" b="0" i="0">
+              <a:buNone/>
+            </a:pPr>
+            <a:r>
+              <a:rPr sz="1100" b="0" i="0">
                 <a:solidFill>
                   <a:srgbClr val="6B7683"/>
                 </a:solidFill>
@@ -10331,11 +10801,12 @@
           <a:p>
             <a:pPr>
               <a:spcBef>
-                <a:spcPts val="1500"/>
+                <a:spcPts val="1106"/>
               </a:spcBef>
-            </a:pPr>
-            <a:r>
-              <a:rPr sz="1500" b="0" i="0">
+              <a:buNone/>
+            </a:pPr>
+            <a:r>
+              <a:rPr sz="1100" b="0" i="0">
                 <a:solidFill>
                   <a:srgbClr val="1F2933"/>
                 </a:solidFill>
@@ -10349,11 +10820,12 @@
           <a:p>
             <a:pPr>
               <a:spcBef>
-                <a:spcPts val="1200"/>
+                <a:spcPts val="885"/>
               </a:spcBef>
-            </a:pPr>
-            <a:r>
-              <a:rPr sz="1200" b="0" i="1">
+              <a:buNone/>
+            </a:pPr>
+            <a:r>
+              <a:rPr sz="1000" b="0" i="1">
                 <a:solidFill>
                   <a:srgbClr val="6B7683"/>
                 </a:solidFill>
@@ -10382,7 +10854,7 @@
         </p:blipFill>
         <p:spPr>
           <a:xfrm>
-            <a:off x="7345375" y="2778061"/>
+            <a:off x="7345375" y="2843085"/>
             <a:ext cx="4297680" cy="2417445"/>
           </a:xfrm>
           <a:prstGeom prst="rect">
@@ -10519,7 +10991,7 @@
         <p:spPr>
           <a:xfrm>
             <a:off x="0" y="0"/>
-            <a:ext cx="12191695" cy="1207008"/>
+            <a:ext cx="12191695" cy="1337056"/>
           </a:xfrm>
           <a:prstGeom prst="rect">
             <a:avLst/>
@@ -10591,10 +11063,12 @@
           </a:fontRef>
         </p:style>
         <p:txBody>
-          <a:bodyPr rtlCol="0" anchor="ctr" wrap="square" tIns="25400" bIns="25400"/>
-          <a:lstStyle/>
-          <a:p>
-            <a:pPr algn="ctr"/>
+          <a:bodyPr rtlCol="0" anchor="ctr" wrap="none" tIns="25400" bIns="25400"/>
+          <a:lstStyle/>
+          <a:p>
+            <a:pPr algn="ctr">
+              <a:buNone/>
+            </a:pPr>
             <a:r>
               <a:rPr sz="1600" b="1" i="0">
                 <a:solidFill>
@@ -10618,7 +11092,7 @@
         <p:spPr>
           <a:xfrm>
             <a:off x="548640" y="566928"/>
-            <a:ext cx="11094415" cy="566928"/>
+            <a:ext cx="11094415" cy="642112"/>
           </a:xfrm>
           <a:prstGeom prst="rect">
             <a:avLst/>
@@ -10631,6 +11105,9 @@
           </a:bodyPr>
           <a:lstStyle/>
           <a:p>
+            <a:pPr>
+              <a:buNone/>
+            </a:pPr>
             <a:r>
               <a:rPr sz="2700" b="1" i="0">
                 <a:solidFill>
@@ -10653,8 +11130,8 @@
         </p:nvSpPr>
         <p:spPr>
           <a:xfrm>
-            <a:off x="548640" y="1481328"/>
-            <a:ext cx="6522415" cy="5010912"/>
+            <a:off x="548640" y="1611376"/>
+            <a:ext cx="6522415" cy="4880864"/>
           </a:xfrm>
           <a:prstGeom prst="rect">
             <a:avLst/>
@@ -10669,11 +11146,12 @@
           <a:p>
             <a:pPr>
               <a:spcBef>
-                <a:spcPts val="1300"/>
+                <a:spcPts val="2600"/>
               </a:spcBef>
-            </a:pPr>
-            <a:r>
-              <a:rPr sz="2000" b="1" i="0">
+              <a:buNone/>
+            </a:pPr>
+            <a:r>
+              <a:rPr sz="2200" b="1" i="0">
                 <a:solidFill>
                   <a:srgbClr val="8E2B20"/>
                 </a:solidFill>
@@ -10684,7 +11162,7 @@
               <a:t>•  </a:t>
             </a:r>
             <a:r>
-              <a:rPr sz="2000" b="0" i="0">
+              <a:rPr sz="2200" b="1" i="0">
                 <a:solidFill>
                   <a:srgbClr val="1F2933"/>
                 </a:solidFill>
@@ -10698,11 +11176,12 @@
           <a:p>
             <a:pPr>
               <a:spcBef>
-                <a:spcPts val="1300"/>
+                <a:spcPts val="2600"/>
               </a:spcBef>
-            </a:pPr>
-            <a:r>
-              <a:rPr sz="2000" b="1" i="0">
+              <a:buNone/>
+            </a:pPr>
+            <a:r>
+              <a:rPr sz="2200" b="1" i="0">
                 <a:solidFill>
                   <a:srgbClr val="8E2B20"/>
                 </a:solidFill>
@@ -10713,7 +11192,7 @@
               <a:t>•  </a:t>
             </a:r>
             <a:r>
-              <a:rPr sz="2000" b="0" i="0">
+              <a:rPr sz="2200" b="1" i="0">
                 <a:solidFill>
                   <a:srgbClr val="1F2933"/>
                 </a:solidFill>
@@ -10727,11 +11206,12 @@
           <a:p>
             <a:pPr>
               <a:spcBef>
-                <a:spcPts val="1300"/>
+                <a:spcPts val="2600"/>
               </a:spcBef>
-            </a:pPr>
-            <a:r>
-              <a:rPr sz="2000" b="1" i="0">
+              <a:buNone/>
+            </a:pPr>
+            <a:r>
+              <a:rPr sz="2200" b="1" i="0">
                 <a:solidFill>
                   <a:srgbClr val="8E2B20"/>
                 </a:solidFill>
@@ -10742,7 +11222,7 @@
               <a:t>•  </a:t>
             </a:r>
             <a:r>
-              <a:rPr sz="2000" b="0" i="0">
+              <a:rPr sz="2200" b="1" i="0">
                 <a:solidFill>
                   <a:srgbClr val="1F2933"/>
                 </a:solidFill>
@@ -10756,11 +11236,12 @@
           <a:p>
             <a:pPr>
               <a:spcBef>
-                <a:spcPts val="1300"/>
+                <a:spcPts val="2600"/>
               </a:spcBef>
-            </a:pPr>
-            <a:r>
-              <a:rPr sz="2000" b="1" i="0">
+              <a:buNone/>
+            </a:pPr>
+            <a:r>
+              <a:rPr sz="2200" b="1" i="0">
                 <a:solidFill>
                   <a:srgbClr val="8E2B20"/>
                 </a:solidFill>
@@ -10771,7 +11252,7 @@
               <a:t>•  </a:t>
             </a:r>
             <a:r>
-              <a:rPr sz="2000" b="0" i="0">
+              <a:rPr sz="2200" b="1" i="0">
                 <a:solidFill>
                   <a:srgbClr val="1F2933"/>
                 </a:solidFill>
@@ -10800,7 +11281,7 @@
         </p:blipFill>
         <p:spPr>
           <a:xfrm>
-            <a:off x="7436815" y="1883664"/>
+            <a:off x="7436815" y="1948688"/>
             <a:ext cx="4206240" cy="4206240"/>
           </a:xfrm>
           <a:prstGeom prst="rect">
@@ -10879,7 +11360,7 @@
         <p:spPr>
           <a:xfrm>
             <a:off x="0" y="0"/>
-            <a:ext cx="12191695" cy="1207008"/>
+            <a:ext cx="12191695" cy="1337056"/>
           </a:xfrm>
           <a:prstGeom prst="rect">
             <a:avLst/>
@@ -10951,10 +11432,12 @@
           </a:fontRef>
         </p:style>
         <p:txBody>
-          <a:bodyPr rtlCol="0" anchor="ctr" wrap="square" tIns="25400" bIns="25400"/>
-          <a:lstStyle/>
-          <a:p>
-            <a:pPr algn="ctr"/>
+          <a:bodyPr rtlCol="0" anchor="ctr" wrap="none" tIns="25400" bIns="25400"/>
+          <a:lstStyle/>
+          <a:p>
+            <a:pPr algn="ctr">
+              <a:buNone/>
+            </a:pPr>
             <a:r>
               <a:rPr sz="1600" b="1" i="0">
                 <a:solidFill>
@@ -10978,7 +11461,7 @@
         <p:spPr>
           <a:xfrm>
             <a:off x="548640" y="566928"/>
-            <a:ext cx="11094415" cy="566928"/>
+            <a:ext cx="11094415" cy="642112"/>
           </a:xfrm>
           <a:prstGeom prst="rect">
             <a:avLst/>
@@ -10991,6 +11474,9 @@
           </a:bodyPr>
           <a:lstStyle/>
           <a:p>
+            <a:pPr>
+              <a:buNone/>
+            </a:pPr>
             <a:r>
               <a:rPr sz="2700" b="1" i="0">
                 <a:solidFill>
@@ -11013,8 +11499,8 @@
         </p:nvSpPr>
         <p:spPr>
           <a:xfrm>
-            <a:off x="5212080" y="1481328"/>
-            <a:ext cx="6430975" cy="5010912"/>
+            <a:off x="5212080" y="1611376"/>
+            <a:ext cx="6430975" cy="4880864"/>
           </a:xfrm>
           <a:prstGeom prst="rect">
             <a:avLst/>
@@ -11022,11 +11508,52 @@
           <a:noFill/>
         </p:spPr>
         <p:txBody>
-          <a:bodyPr wrap="square" anchor="ctr">
+          <a:bodyPr wrap="square" anchor="t">
             <a:spAutoFit/>
           </a:bodyPr>
           <a:lstStyle/>
           <a:p>
+            <a:pPr>
+              <a:buNone/>
+            </a:pPr>
+            <a:r>
+              <a:rPr sz="1600" b="1" i="0">
+                <a:solidFill>
+                  <a:srgbClr val="1F2933"/>
+                </a:solidFill>
+                <a:latin typeface="Calibri"/>
+                <a:ea typeface="Microsoft YaHei"/>
+                <a:cs typeface="Microsoft YaHei"/>
+              </a:rPr>
+              <a:t>Nhấn mạnh THỜI GIAN / NƠI CHỐN / CÁCH THỨC của việc ĐÃ xảy ra.</a:t>
+            </a:r>
+          </a:p>
+          <a:p>
+            <a:pPr>
+              <a:spcBef>
+                <a:spcPts val="321"/>
+              </a:spcBef>
+              <a:buNone/>
+            </a:pPr>
+            <a:r>
+              <a:rPr sz="1600" b="1" i="0">
+                <a:solidFill>
+                  <a:srgbClr val="1F2933"/>
+                </a:solidFill>
+                <a:latin typeface="Calibri"/>
+                <a:ea typeface="Microsoft YaHei"/>
+                <a:cs typeface="Microsoft YaHei"/>
+              </a:rPr>
+              <a:t>Khẳng định, nghi vấn: có thể bỏ 是. Phủ định: KHÔNG được bỏ 是.</a:t>
+            </a:r>
+          </a:p>
+          <a:p>
+            <a:pPr>
+              <a:spcBef>
+                <a:spcPts val="1608"/>
+              </a:spcBef>
+              <a:buNone/>
+            </a:pPr>
             <a:r>
               <a:rPr sz="2000" b="1" i="0">
                 <a:solidFill>
@@ -11036,14 +11563,53 @@
                 <a:ea typeface="Microsoft YaHei"/>
                 <a:cs typeface="Microsoft YaHei"/>
               </a:rPr>
-              <a:t>Nhấn mạnh THỜI GIAN / NƠI CHỐN / CÁCH THỨC của việc ĐÃ xảy ra.</a:t>
+              <a:t>我们是来旅游的。</a:t>
             </a:r>
           </a:p>
           <a:p>
             <a:pPr>
               <a:spcBef>
-                <a:spcPts val="400"/>
+                <a:spcPts val="241"/>
               </a:spcBef>
+              <a:buNone/>
+            </a:pPr>
+            <a:r>
+              <a:rPr sz="1200" b="0" i="1">
+                <a:solidFill>
+                  <a:srgbClr val="8E2B20"/>
+                </a:solidFill>
+                <a:latin typeface="Calibri"/>
+                <a:ea typeface="Microsoft YaHei"/>
+                <a:cs typeface="Microsoft YaHei"/>
+              </a:rPr>
+              <a:t>Wǒmen shì lái lǚyóu de.</a:t>
+            </a:r>
+          </a:p>
+          <a:p>
+            <a:pPr>
+              <a:spcBef>
+                <a:spcPts val="241"/>
+              </a:spcBef>
+              <a:buNone/>
+            </a:pPr>
+            <a:r>
+              <a:rPr sz="1200" b="0" i="0">
+                <a:solidFill>
+                  <a:srgbClr val="6B7683"/>
+                </a:solidFill>
+                <a:latin typeface="Calibri"/>
+                <a:ea typeface="Microsoft YaHei"/>
+                <a:cs typeface="Microsoft YaHei"/>
+              </a:rPr>
+              <a:t>Tụi mình đến đây (là) để du lịch.</a:t>
+            </a:r>
+          </a:p>
+          <a:p>
+            <a:pPr>
+              <a:spcBef>
+                <a:spcPts val="1608"/>
+              </a:spcBef>
+              <a:buNone/>
             </a:pPr>
             <a:r>
               <a:rPr sz="2000" b="1" i="0">
@@ -11054,17 +11620,56 @@
                 <a:ea typeface="Microsoft YaHei"/>
                 <a:cs typeface="Microsoft YaHei"/>
               </a:rPr>
-              <a:t>Khẳng định, nghi vấn: có thể bỏ 是. Phủ định: KHÔNG được bỏ 是.</a:t>
+              <a:t>你是什么时候到的？</a:t>
             </a:r>
           </a:p>
           <a:p>
             <a:pPr>
               <a:spcBef>
-                <a:spcPts val="2000"/>
+                <a:spcPts val="241"/>
               </a:spcBef>
-            </a:pPr>
-            <a:r>
-              <a:rPr sz="2600" b="1" i="0">
+              <a:buNone/>
+            </a:pPr>
+            <a:r>
+              <a:rPr sz="1200" b="0" i="1">
+                <a:solidFill>
+                  <a:srgbClr val="8E2B20"/>
+                </a:solidFill>
+                <a:latin typeface="Calibri"/>
+                <a:ea typeface="Microsoft YaHei"/>
+                <a:cs typeface="Microsoft YaHei"/>
+              </a:rPr>
+              <a:t>Nǐ shì shénme shíhou dào de?</a:t>
+            </a:r>
+          </a:p>
+          <a:p>
+            <a:pPr>
+              <a:spcBef>
+                <a:spcPts val="241"/>
+              </a:spcBef>
+              <a:buNone/>
+            </a:pPr>
+            <a:r>
+              <a:rPr sz="1200" b="0" i="0">
+                <a:solidFill>
+                  <a:srgbClr val="6B7683"/>
+                </a:solidFill>
+                <a:latin typeface="Calibri"/>
+                <a:ea typeface="Microsoft YaHei"/>
+                <a:cs typeface="Microsoft YaHei"/>
+              </a:rPr>
+              <a:t>Bạn đến lúc nào vậy?</a:t>
+            </a:r>
+          </a:p>
+          <a:p>
+            <a:pPr>
+              <a:spcBef>
+                <a:spcPts val="1608"/>
+              </a:spcBef>
+              <a:buNone/>
+            </a:pPr>
+            <a:r>
+              <a:rPr sz="2000" b="1" i="0">
                 <a:solidFill>
                   <a:srgbClr val="1F2933"/>
                 </a:solidFill>
@@ -11072,10 +11677,18 @@
                 <a:ea typeface="Microsoft YaHei"/>
                 <a:cs typeface="Microsoft YaHei"/>
               </a:rPr>
-              <a:t>我们是来旅游的。</a:t>
-            </a:r>
-            <a:r>
-              <a:rPr sz="1500" b="0" i="1">
+              <a:t>我们不是坐出租车去的。</a:t>
+            </a:r>
+          </a:p>
+          <a:p>
+            <a:pPr>
+              <a:spcBef>
+                <a:spcPts val="241"/>
+              </a:spcBef>
+              <a:buNone/>
+            </a:pPr>
+            <a:r>
+              <a:rPr sz="1200" b="0" i="1">
                 <a:solidFill>
                   <a:srgbClr val="8E2B20"/>
                 </a:solidFill>
@@ -11083,17 +11696,18 @@
                 <a:ea typeface="Microsoft YaHei"/>
                 <a:cs typeface="Microsoft YaHei"/>
               </a:rPr>
-              <a:t>  Wǒmen shì lái lǚyóu de.</a:t>
+              <a:t>Wǒmen bú shì zuò chūzūchē qù de.</a:t>
             </a:r>
           </a:p>
           <a:p>
             <a:pPr>
               <a:spcBef>
-                <a:spcPts val="300"/>
+                <a:spcPts val="241"/>
               </a:spcBef>
-            </a:pPr>
-            <a:r>
-              <a:rPr sz="1500" b="0" i="0">
+              <a:buNone/>
+            </a:pPr>
+            <a:r>
+              <a:rPr sz="1200" b="0" i="0">
                 <a:solidFill>
                   <a:srgbClr val="6B7683"/>
                 </a:solidFill>
@@ -11101,111 +11715,18 @@
                 <a:ea typeface="Microsoft YaHei"/>
                 <a:cs typeface="Microsoft YaHei"/>
               </a:rPr>
-              <a:t>Tụi mình đến đây (là) để du lịch.</a:t>
+              <a:t>Tụi mình không phải đi bằng taxi.</a:t>
             </a:r>
           </a:p>
           <a:p>
             <a:pPr>
               <a:spcBef>
-                <a:spcPts val="2000"/>
+                <a:spcPts val="964"/>
               </a:spcBef>
-            </a:pPr>
-            <a:r>
-              <a:rPr sz="2600" b="1" i="0">
-                <a:solidFill>
-                  <a:srgbClr val="1F2933"/>
-                </a:solidFill>
-                <a:latin typeface="Calibri"/>
-                <a:ea typeface="Microsoft YaHei"/>
-                <a:cs typeface="Microsoft YaHei"/>
-              </a:rPr>
-              <a:t>你是什么时候到的？</a:t>
-            </a:r>
-            <a:r>
-              <a:rPr sz="1500" b="0" i="1">
-                <a:solidFill>
-                  <a:srgbClr val="8E2B20"/>
-                </a:solidFill>
-                <a:latin typeface="Calibri"/>
-                <a:ea typeface="Microsoft YaHei"/>
-                <a:cs typeface="Microsoft YaHei"/>
-              </a:rPr>
-              <a:t>  Nǐ shì shénme shíhou dào de?</a:t>
-            </a:r>
-          </a:p>
-          <a:p>
-            <a:pPr>
-              <a:spcBef>
-                <a:spcPts val="300"/>
-              </a:spcBef>
-            </a:pPr>
-            <a:r>
-              <a:rPr sz="1500" b="0" i="0">
-                <a:solidFill>
-                  <a:srgbClr val="6B7683"/>
-                </a:solidFill>
-                <a:latin typeface="Calibri"/>
-                <a:ea typeface="Microsoft YaHei"/>
-                <a:cs typeface="Microsoft YaHei"/>
-              </a:rPr>
-              <a:t>Bạn đến lúc nào vậy?</a:t>
-            </a:r>
-          </a:p>
-          <a:p>
-            <a:pPr>
-              <a:spcBef>
-                <a:spcPts val="2000"/>
-              </a:spcBef>
-            </a:pPr>
-            <a:r>
-              <a:rPr sz="2600" b="1" i="0">
-                <a:solidFill>
-                  <a:srgbClr val="1F2933"/>
-                </a:solidFill>
-                <a:latin typeface="Calibri"/>
-                <a:ea typeface="Microsoft YaHei"/>
-                <a:cs typeface="Microsoft YaHei"/>
-              </a:rPr>
-              <a:t>我们不是坐出租车去的。</a:t>
-            </a:r>
-            <a:r>
-              <a:rPr sz="1500" b="0" i="1">
-                <a:solidFill>
-                  <a:srgbClr val="8E2B20"/>
-                </a:solidFill>
-                <a:latin typeface="Calibri"/>
-                <a:ea typeface="Microsoft YaHei"/>
-                <a:cs typeface="Microsoft YaHei"/>
-              </a:rPr>
-              <a:t>  Wǒmen bú shì zuò chūzūchē qù de.</a:t>
-            </a:r>
-          </a:p>
-          <a:p>
-            <a:pPr>
-              <a:spcBef>
-                <a:spcPts val="300"/>
-              </a:spcBef>
-            </a:pPr>
-            <a:r>
-              <a:rPr sz="1500" b="0" i="0">
-                <a:solidFill>
-                  <a:srgbClr val="6B7683"/>
-                </a:solidFill>
-                <a:latin typeface="Calibri"/>
-                <a:ea typeface="Microsoft YaHei"/>
-                <a:cs typeface="Microsoft YaHei"/>
-              </a:rPr>
-              <a:t>Tụi mình không phải đi bằng taxi.</a:t>
-            </a:r>
-          </a:p>
-          <a:p>
-            <a:pPr>
-              <a:spcBef>
-                <a:spcPts val="1200"/>
-              </a:spcBef>
-            </a:pPr>
-            <a:r>
-              <a:rPr sz="1200" b="0" i="1">
+              <a:buNone/>
+            </a:pPr>
+            <a:r>
+              <a:rPr sz="1000" b="0" i="1">
                 <a:solidFill>
                   <a:srgbClr val="6B7683"/>
                 </a:solidFill>
@@ -11234,7 +11755,7 @@
         </p:blipFill>
         <p:spPr>
           <a:xfrm>
-            <a:off x="548640" y="1837944"/>
+            <a:off x="548640" y="1902968"/>
             <a:ext cx="4297680" cy="4297680"/>
           </a:xfrm>
           <a:prstGeom prst="rect">
@@ -11371,7 +11892,7 @@
         <p:spPr>
           <a:xfrm>
             <a:off x="0" y="0"/>
-            <a:ext cx="12191695" cy="1207008"/>
+            <a:ext cx="12191695" cy="1337056"/>
           </a:xfrm>
           <a:prstGeom prst="rect">
             <a:avLst/>
@@ -11443,10 +11964,12 @@
           </a:fontRef>
         </p:style>
         <p:txBody>
-          <a:bodyPr rtlCol="0" anchor="ctr" wrap="square" tIns="25400" bIns="25400"/>
-          <a:lstStyle/>
-          <a:p>
-            <a:pPr algn="ctr"/>
+          <a:bodyPr rtlCol="0" anchor="ctr" wrap="none" tIns="25400" bIns="25400"/>
+          <a:lstStyle/>
+          <a:p>
+            <a:pPr algn="ctr">
+              <a:buNone/>
+            </a:pPr>
             <a:r>
               <a:rPr sz="1600" b="1" i="0">
                 <a:solidFill>
@@ -11470,7 +11993,7 @@
         <p:spPr>
           <a:xfrm>
             <a:off x="548640" y="566928"/>
-            <a:ext cx="11094415" cy="566928"/>
+            <a:ext cx="11094415" cy="642112"/>
           </a:xfrm>
           <a:prstGeom prst="rect">
             <a:avLst/>
@@ -11483,6 +12006,9 @@
           </a:bodyPr>
           <a:lstStyle/>
           <a:p>
+            <a:pPr>
+              <a:buNone/>
+            </a:pPr>
             <a:r>
               <a:rPr sz="2700" b="1" i="0">
                 <a:solidFill>
@@ -11505,8 +12031,8 @@
         </p:nvSpPr>
         <p:spPr>
           <a:xfrm>
-            <a:off x="548640" y="1481328"/>
-            <a:ext cx="6430975" cy="5010912"/>
+            <a:off x="548640" y="1611376"/>
+            <a:ext cx="6430975" cy="4880864"/>
           </a:xfrm>
           <a:prstGeom prst="rect">
             <a:avLst/>
@@ -11514,13 +12040,16 @@
           <a:noFill/>
         </p:spPr>
         <p:txBody>
-          <a:bodyPr wrap="square" anchor="ctr">
+          <a:bodyPr wrap="square" anchor="t">
             <a:spAutoFit/>
           </a:bodyPr>
           <a:lstStyle/>
           <a:p>
-            <a:r>
-              <a:rPr sz="2000" b="1" i="0">
+            <a:pPr>
+              <a:buNone/>
+            </a:pPr>
+            <a:r>
+              <a:rPr sz="1300" b="1" i="0">
                 <a:solidFill>
                   <a:srgbClr val="1F2933"/>
                 </a:solidFill>
@@ -11534,11 +12063,12 @@
           <a:p>
             <a:pPr>
               <a:spcBef>
-                <a:spcPts val="400"/>
+                <a:spcPts val="279"/>
               </a:spcBef>
-            </a:pPr>
-            <a:r>
-              <a:rPr sz="2000" b="1" i="0">
+              <a:buNone/>
+            </a:pPr>
+            <a:r>
+              <a:rPr sz="1300" b="1" i="0">
                 <a:solidFill>
                   <a:srgbClr val="1F2933"/>
                 </a:solidFill>
@@ -11552,11 +12082,12 @@
           <a:p>
             <a:pPr>
               <a:spcBef>
-                <a:spcPts val="2000"/>
+                <a:spcPts val="1396"/>
               </a:spcBef>
-            </a:pPr>
-            <a:r>
-              <a:rPr sz="2600" b="1" i="0">
+              <a:buNone/>
+            </a:pPr>
+            <a:r>
+              <a:rPr sz="1800" b="1" i="0">
                 <a:solidFill>
                   <a:srgbClr val="1F2933"/>
                 </a:solidFill>
@@ -11566,8 +12097,16 @@
               </a:rPr>
               <a:t>我想请你帮个忙。</a:t>
             </a:r>
-            <a:r>
-              <a:rPr sz="1500" b="0" i="1">
+          </a:p>
+          <a:p>
+            <a:pPr>
+              <a:spcBef>
+                <a:spcPts val="209"/>
+              </a:spcBef>
+              <a:buNone/>
+            </a:pPr>
+            <a:r>
+              <a:rPr sz="1100" b="0" i="1">
                 <a:solidFill>
                   <a:srgbClr val="8E2B20"/>
                 </a:solidFill>
@@ -11575,17 +12114,18 @@
                 <a:ea typeface="Microsoft YaHei"/>
                 <a:cs typeface="Microsoft YaHei"/>
               </a:rPr>
-              <a:t>  Wǒ xiǎng qǐng nǐ bāng gè máng.</a:t>
+              <a:t>Wǒ xiǎng qǐng nǐ bāng gè máng.</a:t>
             </a:r>
           </a:p>
           <a:p>
             <a:pPr>
               <a:spcBef>
-                <a:spcPts val="300"/>
+                <a:spcPts val="209"/>
               </a:spcBef>
-            </a:pPr>
-            <a:r>
-              <a:rPr sz="1500" b="0" i="0">
+              <a:buNone/>
+            </a:pPr>
+            <a:r>
+              <a:rPr sz="1100" b="0" i="0">
                 <a:solidFill>
                   <a:srgbClr val="6B7683"/>
                 </a:solidFill>
@@ -11599,11 +12139,12 @@
           <a:p>
             <a:pPr>
               <a:spcBef>
-                <a:spcPts val="2000"/>
+                <a:spcPts val="1396"/>
               </a:spcBef>
-            </a:pPr>
-            <a:r>
-              <a:rPr sz="2600" b="1" i="0">
+              <a:buNone/>
+            </a:pPr>
+            <a:r>
+              <a:rPr sz="1800" b="1" i="0">
                 <a:solidFill>
                   <a:srgbClr val="1F2933"/>
                 </a:solidFill>
@@ -11613,8 +12154,16 @@
               </a:rPr>
               <a:t>王老师让我们说中文。</a:t>
             </a:r>
-            <a:r>
-              <a:rPr sz="1500" b="0" i="1">
+          </a:p>
+          <a:p>
+            <a:pPr>
+              <a:spcBef>
+                <a:spcPts val="209"/>
+              </a:spcBef>
+              <a:buNone/>
+            </a:pPr>
+            <a:r>
+              <a:rPr sz="1100" b="0" i="1">
                 <a:solidFill>
                   <a:srgbClr val="8E2B20"/>
                 </a:solidFill>
@@ -11622,17 +12171,18 @@
                 <a:ea typeface="Microsoft YaHei"/>
                 <a:cs typeface="Microsoft YaHei"/>
               </a:rPr>
-              <a:t>  Wáng lǎoshī ràng wǒmen shuō Zhōngwén.</a:t>
+              <a:t>Wáng lǎoshī ràng wǒmen shuō Zhōngwén.</a:t>
             </a:r>
           </a:p>
           <a:p>
             <a:pPr>
               <a:spcBef>
-                <a:spcPts val="300"/>
+                <a:spcPts val="209"/>
               </a:spcBef>
-            </a:pPr>
-            <a:r>
-              <a:rPr sz="1500" b="0" i="0">
+              <a:buNone/>
+            </a:pPr>
+            <a:r>
+              <a:rPr sz="1100" b="0" i="0">
                 <a:solidFill>
                   <a:srgbClr val="6B7683"/>
                 </a:solidFill>
@@ -11646,11 +12196,12 @@
           <a:p>
             <a:pPr>
               <a:spcBef>
-                <a:spcPts val="2000"/>
+                <a:spcPts val="1396"/>
               </a:spcBef>
-            </a:pPr>
-            <a:r>
-              <a:rPr sz="2600" b="1" i="0">
+              <a:buNone/>
+            </a:pPr>
+            <a:r>
+              <a:rPr sz="1800" b="1" i="0">
                 <a:solidFill>
                   <a:srgbClr val="1F2933"/>
                 </a:solidFill>
@@ -11660,8 +12211,16 @@
               </a:rPr>
               <a:t>妈妈叫孩子们回家。</a:t>
             </a:r>
-            <a:r>
-              <a:rPr sz="1500" b="0" i="1">
+          </a:p>
+          <a:p>
+            <a:pPr>
+              <a:spcBef>
+                <a:spcPts val="209"/>
+              </a:spcBef>
+              <a:buNone/>
+            </a:pPr>
+            <a:r>
+              <a:rPr sz="1100" b="0" i="1">
                 <a:solidFill>
                   <a:srgbClr val="8E2B20"/>
                 </a:solidFill>
@@ -11669,17 +12228,18 @@
                 <a:ea typeface="Microsoft YaHei"/>
                 <a:cs typeface="Microsoft YaHei"/>
               </a:rPr>
-              <a:t>  Māma jiào háizimen huí jiā.</a:t>
+              <a:t>Māma jiào háizimen huí jiā.</a:t>
             </a:r>
           </a:p>
           <a:p>
             <a:pPr>
               <a:spcBef>
-                <a:spcPts val="300"/>
+                <a:spcPts val="209"/>
               </a:spcBef>
-            </a:pPr>
-            <a:r>
-              <a:rPr sz="1500" b="0" i="0">
+              <a:buNone/>
+            </a:pPr>
+            <a:r>
+              <a:rPr sz="1100" b="0" i="0">
                 <a:solidFill>
                   <a:srgbClr val="6B7683"/>
                 </a:solidFill>
@@ -11693,11 +12253,12 @@
           <a:p>
             <a:pPr>
               <a:spcBef>
-                <a:spcPts val="1500"/>
+                <a:spcPts val="1047"/>
               </a:spcBef>
-            </a:pPr>
-            <a:r>
-              <a:rPr sz="1500" b="0" i="0">
+              <a:buNone/>
+            </a:pPr>
+            <a:r>
+              <a:rPr sz="1100" b="0" i="0">
                 <a:solidFill>
                   <a:srgbClr val="1F2933"/>
                 </a:solidFill>
@@ -11711,11 +12272,12 @@
           <a:p>
             <a:pPr>
               <a:spcBef>
-                <a:spcPts val="1200"/>
+                <a:spcPts val="837"/>
               </a:spcBef>
-            </a:pPr>
-            <a:r>
-              <a:rPr sz="1200" b="0" i="1">
+              <a:buNone/>
+            </a:pPr>
+            <a:r>
+              <a:rPr sz="1000" b="0" i="1">
                 <a:solidFill>
                   <a:srgbClr val="6B7683"/>
                 </a:solidFill>
@@ -11744,7 +12306,7 @@
         </p:blipFill>
         <p:spPr>
           <a:xfrm>
-            <a:off x="7345375" y="1837944"/>
+            <a:off x="7345375" y="1902968"/>
             <a:ext cx="4297680" cy="4297680"/>
           </a:xfrm>
           <a:prstGeom prst="rect">
@@ -11881,7 +12443,7 @@
         <p:spPr>
           <a:xfrm>
             <a:off x="0" y="0"/>
-            <a:ext cx="12191695" cy="1207008"/>
+            <a:ext cx="12191695" cy="1337056"/>
           </a:xfrm>
           <a:prstGeom prst="rect">
             <a:avLst/>
@@ -11953,10 +12515,12 @@
           </a:fontRef>
         </p:style>
         <p:txBody>
-          <a:bodyPr rtlCol="0" anchor="ctr" wrap="square" tIns="25400" bIns="25400"/>
-          <a:lstStyle/>
-          <a:p>
-            <a:pPr algn="ctr"/>
+          <a:bodyPr rtlCol="0" anchor="ctr" wrap="none" tIns="25400" bIns="25400"/>
+          <a:lstStyle/>
+          <a:p>
+            <a:pPr algn="ctr">
+              <a:buNone/>
+            </a:pPr>
             <a:r>
               <a:rPr sz="1600" b="1" i="0">
                 <a:solidFill>
@@ -11980,7 +12544,7 @@
         <p:spPr>
           <a:xfrm>
             <a:off x="548640" y="566928"/>
-            <a:ext cx="11094415" cy="566928"/>
+            <a:ext cx="11094415" cy="642112"/>
           </a:xfrm>
           <a:prstGeom prst="rect">
             <a:avLst/>
@@ -11993,6 +12557,9 @@
           </a:bodyPr>
           <a:lstStyle/>
           <a:p>
+            <a:pPr>
+              <a:buNone/>
+            </a:pPr>
             <a:r>
               <a:rPr sz="2700" b="1" i="0">
                 <a:solidFill>
@@ -12016,8 +12583,8 @@
           <p:nvPr/>
         </p:nvGraphicFramePr>
         <p:xfrm>
-          <a:off x="548640" y="1481330"/>
-          <a:ext cx="11094415" cy="5010907"/>
+          <a:off x="548640" y="1611378"/>
+          <a:ext cx="11094413" cy="4880859"/>
         </p:xfrm>
         <a:graphic>
           <a:graphicData uri="http://schemas.openxmlformats.org/drawingml/2006/table">
@@ -12026,19 +12593,21 @@
                 <a:tableStyleId>{5C22544A-7EE6-4342-B048-85BDC9FD1C3A}</a:tableStyleId>
               </a:tblPr>
               <a:tblGrid>
-                <a:gridCol w="3698138"/>
-                <a:gridCol w="3698138"/>
-                <a:gridCol w="3698139"/>
+                <a:gridCol w="2338957"/>
+                <a:gridCol w="4127572"/>
+                <a:gridCol w="4627884"/>
               </a:tblGrid>
-              <a:tr h="455537">
+              <a:tr h="415039">
                 <a:tc>
                   <a:txBody>
                     <a:bodyPr wrap="square"/>
                     <a:lstStyle/>
                     <a:p>
-                      <a:pPr algn="ctr"/>
+                      <a:pPr algn="ctr">
+                        <a:buNone/>
+                      </a:pPr>
                       <a:r>
-                        <a:rPr sz="1500" b="1" i="0">
+                        <a:rPr sz="1400" b="1" i="0">
                           <a:solidFill>
                             <a:srgbClr val="FFFFFF"/>
                           </a:solidFill>
@@ -12061,9 +12630,11 @@
                     <a:bodyPr wrap="square"/>
                     <a:lstStyle/>
                     <a:p>
-                      <a:pPr algn="ctr"/>
+                      <a:pPr algn="ctr">
+                        <a:buNone/>
+                      </a:pPr>
                       <a:r>
-                        <a:rPr sz="1500" b="1" i="0">
+                        <a:rPr sz="1400" b="1" i="0">
                           <a:solidFill>
                             <a:srgbClr val="FFFFFF"/>
                           </a:solidFill>
@@ -12086,9 +12657,11 @@
                     <a:bodyPr wrap="square"/>
                     <a:lstStyle/>
                     <a:p>
-                      <a:pPr algn="ctr"/>
+                      <a:pPr algn="ctr">
+                        <a:buNone/>
+                      </a:pPr>
                       <a:r>
-                        <a:rPr sz="1500" b="1" i="0">
+                        <a:rPr sz="1400" b="1" i="0">
                           <a:solidFill>
                             <a:srgbClr val="FFFFFF"/>
                           </a:solidFill>
@@ -12107,15 +12680,17 @@
                   </a:tcPr>
                 </a:tc>
               </a:tr>
-              <a:tr h="455537">
+              <a:tr h="415039">
                 <a:tc>
                   <a:txBody>
                     <a:bodyPr wrap="square"/>
                     <a:lstStyle/>
                     <a:p>
-                      <a:pPr algn="l"/>
+                      <a:pPr algn="l">
+                        <a:buNone/>
+                      </a:pPr>
                       <a:r>
-                        <a:rPr sz="1500" b="1" i="0">
+                        <a:rPr sz="1400" b="1" i="0">
                           <a:solidFill>
                             <a:srgbClr val="1F2933"/>
                           </a:solidFill>
@@ -12138,9 +12713,11 @@
                     <a:bodyPr wrap="square"/>
                     <a:lstStyle/>
                     <a:p>
-                      <a:pPr algn="l"/>
+                      <a:pPr algn="l">
+                        <a:buNone/>
+                      </a:pPr>
                       <a:r>
-                        <a:rPr sz="1500" b="0" i="0">
+                        <a:rPr sz="1400" b="0" i="0">
                           <a:solidFill>
                             <a:srgbClr val="1F2933"/>
                           </a:solidFill>
@@ -12163,9 +12740,11 @@
                     <a:bodyPr wrap="square"/>
                     <a:lstStyle/>
                     <a:p>
-                      <a:pPr algn="l"/>
+                      <a:pPr algn="l">
+                        <a:buNone/>
+                      </a:pPr>
                       <a:r>
-                        <a:rPr sz="1500" b="0" i="0">
+                        <a:rPr sz="1400" b="0" i="0">
                           <a:solidFill>
                             <a:srgbClr val="1F2933"/>
                           </a:solidFill>
@@ -12184,15 +12763,17 @@
                   </a:tcPr>
                 </a:tc>
               </a:tr>
-              <a:tr h="455537">
+              <a:tr h="415039">
                 <a:tc>
                   <a:txBody>
                     <a:bodyPr wrap="square"/>
                     <a:lstStyle/>
                     <a:p>
-                      <a:pPr algn="l"/>
+                      <a:pPr algn="l">
+                        <a:buNone/>
+                      </a:pPr>
                       <a:r>
-                        <a:rPr sz="1500" b="1" i="0">
+                        <a:rPr sz="1400" b="1" i="0">
                           <a:solidFill>
                             <a:srgbClr val="1F2933"/>
                           </a:solidFill>
@@ -12215,9 +12796,11 @@
                     <a:bodyPr wrap="square"/>
                     <a:lstStyle/>
                     <a:p>
-                      <a:pPr algn="l"/>
+                      <a:pPr algn="l">
+                        <a:buNone/>
+                      </a:pPr>
                       <a:r>
-                        <a:rPr sz="1500" b="0" i="0">
+                        <a:rPr sz="1400" b="0" i="0">
                           <a:solidFill>
                             <a:srgbClr val="1F2933"/>
                           </a:solidFill>
@@ -12240,9 +12823,11 @@
                     <a:bodyPr wrap="square"/>
                     <a:lstStyle/>
                     <a:p>
-                      <a:pPr algn="l"/>
+                      <a:pPr algn="l">
+                        <a:buNone/>
+                      </a:pPr>
                       <a:r>
-                        <a:rPr sz="1500" b="0" i="0">
+                        <a:rPr sz="1400" b="0" i="0">
                           <a:solidFill>
                             <a:srgbClr val="1F2933"/>
                           </a:solidFill>
@@ -12261,15 +12846,17 @@
                   </a:tcPr>
                 </a:tc>
               </a:tr>
-              <a:tr h="455537">
+              <a:tr h="415039">
                 <a:tc>
                   <a:txBody>
                     <a:bodyPr wrap="square"/>
                     <a:lstStyle/>
                     <a:p>
-                      <a:pPr algn="l"/>
+                      <a:pPr algn="l">
+                        <a:buNone/>
+                      </a:pPr>
                       <a:r>
-                        <a:rPr sz="1500" b="1" i="0">
+                        <a:rPr sz="1400" b="1" i="0">
                           <a:solidFill>
                             <a:srgbClr val="1F2933"/>
                           </a:solidFill>
@@ -12292,9 +12879,11 @@
                     <a:bodyPr wrap="square"/>
                     <a:lstStyle/>
                     <a:p>
-                      <a:pPr algn="l"/>
+                      <a:pPr algn="l">
+                        <a:buNone/>
+                      </a:pPr>
                       <a:r>
-                        <a:rPr sz="1500" b="0" i="0">
+                        <a:rPr sz="1400" b="0" i="0">
                           <a:solidFill>
                             <a:srgbClr val="1F2933"/>
                           </a:solidFill>
@@ -12317,9 +12906,11 @@
                     <a:bodyPr wrap="square"/>
                     <a:lstStyle/>
                     <a:p>
-                      <a:pPr algn="l"/>
+                      <a:pPr algn="l">
+                        <a:buNone/>
+                      </a:pPr>
                       <a:r>
-                        <a:rPr sz="1500" b="0" i="0">
+                        <a:rPr sz="1400" b="0" i="0">
                           <a:solidFill>
                             <a:srgbClr val="1F2933"/>
                           </a:solidFill>
@@ -12338,15 +12929,17 @@
                   </a:tcPr>
                 </a:tc>
               </a:tr>
-              <a:tr h="455537">
+              <a:tr h="415039">
                 <a:tc>
                   <a:txBody>
                     <a:bodyPr wrap="square"/>
                     <a:lstStyle/>
                     <a:p>
-                      <a:pPr algn="l"/>
+                      <a:pPr algn="l">
+                        <a:buNone/>
+                      </a:pPr>
                       <a:r>
-                        <a:rPr sz="1500" b="1" i="0">
+                        <a:rPr sz="1400" b="1" i="0">
                           <a:solidFill>
                             <a:srgbClr val="1F2933"/>
                           </a:solidFill>
@@ -12369,9 +12962,11 @@
                     <a:bodyPr wrap="square"/>
                     <a:lstStyle/>
                     <a:p>
-                      <a:pPr algn="l"/>
+                      <a:pPr algn="l">
+                        <a:buNone/>
+                      </a:pPr>
                       <a:r>
-                        <a:rPr sz="1500" b="0" i="0">
+                        <a:rPr sz="1400" b="0" i="0">
                           <a:solidFill>
                             <a:srgbClr val="1F2933"/>
                           </a:solidFill>
@@ -12394,9 +12989,11 @@
                     <a:bodyPr wrap="square"/>
                     <a:lstStyle/>
                     <a:p>
-                      <a:pPr algn="l"/>
+                      <a:pPr algn="l">
+                        <a:buNone/>
+                      </a:pPr>
                       <a:r>
-                        <a:rPr sz="1500" b="0" i="0">
+                        <a:rPr sz="1400" b="0" i="0">
                           <a:solidFill>
                             <a:srgbClr val="1F2933"/>
                           </a:solidFill>
@@ -12415,15 +13012,17 @@
                   </a:tcPr>
                 </a:tc>
               </a:tr>
-              <a:tr h="455537">
+              <a:tr h="572754">
                 <a:tc>
                   <a:txBody>
                     <a:bodyPr wrap="square"/>
                     <a:lstStyle/>
                     <a:p>
-                      <a:pPr algn="l"/>
+                      <a:pPr algn="l">
+                        <a:buNone/>
+                      </a:pPr>
                       <a:r>
-                        <a:rPr sz="1500" b="1" i="0">
+                        <a:rPr sz="1400" b="1" i="0">
                           <a:solidFill>
                             <a:srgbClr val="1F2933"/>
                           </a:solidFill>
@@ -12446,9 +13045,11 @@
                     <a:bodyPr wrap="square"/>
                     <a:lstStyle/>
                     <a:p>
-                      <a:pPr algn="l"/>
+                      <a:pPr algn="l">
+                        <a:buNone/>
+                      </a:pPr>
                       <a:r>
-                        <a:rPr sz="1500" b="0" i="0">
+                        <a:rPr sz="1400" b="0" i="0">
                           <a:solidFill>
                             <a:srgbClr val="1F2933"/>
                           </a:solidFill>
@@ -12471,9 +13072,11 @@
                     <a:bodyPr wrap="square"/>
                     <a:lstStyle/>
                     <a:p>
-                      <a:pPr algn="l"/>
+                      <a:pPr algn="l">
+                        <a:buNone/>
+                      </a:pPr>
                       <a:r>
-                        <a:rPr sz="1500" b="0" i="0">
+                        <a:rPr sz="1400" b="0" i="0">
                           <a:solidFill>
                             <a:srgbClr val="1F2933"/>
                           </a:solidFill>
@@ -12492,15 +13095,17 @@
                   </a:tcPr>
                 </a:tc>
               </a:tr>
-              <a:tr h="455537">
+              <a:tr h="415039">
                 <a:tc>
                   <a:txBody>
                     <a:bodyPr wrap="square"/>
                     <a:lstStyle/>
                     <a:p>
-                      <a:pPr algn="l"/>
+                      <a:pPr algn="l">
+                        <a:buNone/>
+                      </a:pPr>
                       <a:r>
-                        <a:rPr sz="1500" b="1" i="0">
+                        <a:rPr sz="1400" b="1" i="0">
                           <a:solidFill>
                             <a:srgbClr val="1F2933"/>
                           </a:solidFill>
@@ -12523,9 +13128,11 @@
                     <a:bodyPr wrap="square"/>
                     <a:lstStyle/>
                     <a:p>
-                      <a:pPr algn="l"/>
+                      <a:pPr algn="l">
+                        <a:buNone/>
+                      </a:pPr>
                       <a:r>
-                        <a:rPr sz="1500" b="0" i="0">
+                        <a:rPr sz="1400" b="0" i="0">
                           <a:solidFill>
                             <a:srgbClr val="1F2933"/>
                           </a:solidFill>
@@ -12548,9 +13155,11 @@
                     <a:bodyPr wrap="square"/>
                     <a:lstStyle/>
                     <a:p>
-                      <a:pPr algn="l"/>
+                      <a:pPr algn="l">
+                        <a:buNone/>
+                      </a:pPr>
                       <a:r>
-                        <a:rPr sz="1500" b="0" i="0">
+                        <a:rPr sz="1400" b="0" i="0">
                           <a:solidFill>
                             <a:srgbClr val="1F2933"/>
                           </a:solidFill>
@@ -12569,15 +13178,17 @@
                   </a:tcPr>
                 </a:tc>
               </a:tr>
-              <a:tr h="455537">
+              <a:tr h="415039">
                 <a:tc>
                   <a:txBody>
                     <a:bodyPr wrap="square"/>
                     <a:lstStyle/>
                     <a:p>
-                      <a:pPr algn="l"/>
+                      <a:pPr algn="l">
+                        <a:buNone/>
+                      </a:pPr>
                       <a:r>
-                        <a:rPr sz="1500" b="1" i="0">
+                        <a:rPr sz="1400" b="1" i="0">
                           <a:solidFill>
                             <a:srgbClr val="1F2933"/>
                           </a:solidFill>
@@ -12600,9 +13211,11 @@
                     <a:bodyPr wrap="square"/>
                     <a:lstStyle/>
                     <a:p>
-                      <a:pPr algn="l"/>
+                      <a:pPr algn="l">
+                        <a:buNone/>
+                      </a:pPr>
                       <a:r>
-                        <a:rPr sz="1500" b="0" i="0">
+                        <a:rPr sz="1400" b="0" i="0">
                           <a:solidFill>
                             <a:srgbClr val="1F2933"/>
                           </a:solidFill>
@@ -12625,9 +13238,11 @@
                     <a:bodyPr wrap="square"/>
                     <a:lstStyle/>
                     <a:p>
-                      <a:pPr algn="l"/>
+                      <a:pPr algn="l">
+                        <a:buNone/>
+                      </a:pPr>
                       <a:r>
-                        <a:rPr sz="1500" b="0" i="0">
+                        <a:rPr sz="1400" b="0" i="0">
                           <a:solidFill>
                             <a:srgbClr val="1F2933"/>
                           </a:solidFill>
@@ -12646,15 +13261,17 @@
                   </a:tcPr>
                 </a:tc>
               </a:tr>
-              <a:tr h="455537">
+              <a:tr h="415039">
                 <a:tc>
                   <a:txBody>
                     <a:bodyPr wrap="square"/>
                     <a:lstStyle/>
                     <a:p>
-                      <a:pPr algn="l"/>
+                      <a:pPr algn="l">
+                        <a:buNone/>
+                      </a:pPr>
                       <a:r>
-                        <a:rPr sz="1500" b="1" i="0">
+                        <a:rPr sz="1400" b="1" i="0">
                           <a:solidFill>
                             <a:srgbClr val="1F2933"/>
                           </a:solidFill>
@@ -12677,9 +13294,11 @@
                     <a:bodyPr wrap="square"/>
                     <a:lstStyle/>
                     <a:p>
-                      <a:pPr algn="l"/>
+                      <a:pPr algn="l">
+                        <a:buNone/>
+                      </a:pPr>
                       <a:r>
-                        <a:rPr sz="1500" b="0" i="0">
+                        <a:rPr sz="1400" b="0" i="0">
                           <a:solidFill>
                             <a:srgbClr val="1F2933"/>
                           </a:solidFill>
@@ -12702,9 +13321,11 @@
                     <a:bodyPr wrap="square"/>
                     <a:lstStyle/>
                     <a:p>
-                      <a:pPr algn="l"/>
+                      <a:pPr algn="l">
+                        <a:buNone/>
+                      </a:pPr>
                       <a:r>
-                        <a:rPr sz="1500" b="0" i="0">
+                        <a:rPr sz="1400" b="0" i="0">
                           <a:solidFill>
                             <a:srgbClr val="1F2933"/>
                           </a:solidFill>
@@ -12723,15 +13344,17 @@
                   </a:tcPr>
                 </a:tc>
               </a:tr>
-              <a:tr h="455537">
+              <a:tr h="572754">
                 <a:tc>
                   <a:txBody>
                     <a:bodyPr wrap="square"/>
                     <a:lstStyle/>
                     <a:p>
-                      <a:pPr algn="l"/>
+                      <a:pPr algn="l">
+                        <a:buNone/>
+                      </a:pPr>
                       <a:r>
-                        <a:rPr sz="1500" b="1" i="0">
+                        <a:rPr sz="1400" b="1" i="0">
                           <a:solidFill>
                             <a:srgbClr val="1F2933"/>
                           </a:solidFill>
@@ -12754,9 +13377,11 @@
                     <a:bodyPr wrap="square"/>
                     <a:lstStyle/>
                     <a:p>
-                      <a:pPr algn="l"/>
+                      <a:pPr algn="l">
+                        <a:buNone/>
+                      </a:pPr>
                       <a:r>
-                        <a:rPr sz="1500" b="0" i="0">
+                        <a:rPr sz="1400" b="0" i="0">
                           <a:solidFill>
                             <a:srgbClr val="1F2933"/>
                           </a:solidFill>
@@ -12779,9 +13404,11 @@
                     <a:bodyPr wrap="square"/>
                     <a:lstStyle/>
                     <a:p>
-                      <a:pPr algn="l"/>
+                      <a:pPr algn="l">
+                        <a:buNone/>
+                      </a:pPr>
                       <a:r>
-                        <a:rPr sz="1500" b="0" i="0">
+                        <a:rPr sz="1400" b="0" i="0">
                           <a:solidFill>
                             <a:srgbClr val="1F2933"/>
                           </a:solidFill>
@@ -12800,15 +13427,17 @@
                   </a:tcPr>
                 </a:tc>
               </a:tr>
-              <a:tr h="455537">
+              <a:tr h="415039">
                 <a:tc>
                   <a:txBody>
                     <a:bodyPr wrap="square"/>
                     <a:lstStyle/>
                     <a:p>
-                      <a:pPr algn="l"/>
+                      <a:pPr algn="l">
+                        <a:buNone/>
+                      </a:pPr>
                       <a:r>
-                        <a:rPr sz="1500" b="1" i="0">
+                        <a:rPr sz="1400" b="1" i="0">
                           <a:solidFill>
                             <a:srgbClr val="1F2933"/>
                           </a:solidFill>
@@ -12831,9 +13460,11 @@
                     <a:bodyPr wrap="square"/>
                     <a:lstStyle/>
                     <a:p>
-                      <a:pPr algn="l"/>
+                      <a:pPr algn="l">
+                        <a:buNone/>
+                      </a:pPr>
                       <a:r>
-                        <a:rPr sz="1500" b="0" i="0">
+                        <a:rPr sz="1400" b="0" i="0">
                           <a:solidFill>
                             <a:srgbClr val="1F2933"/>
                           </a:solidFill>
@@ -12856,9 +13487,11 @@
                     <a:bodyPr wrap="square"/>
                     <a:lstStyle/>
                     <a:p>
-                      <a:pPr algn="l"/>
+                      <a:pPr algn="l">
+                        <a:buNone/>
+                      </a:pPr>
                       <a:r>
-                        <a:rPr sz="1500" b="0" i="0">
+                        <a:rPr sz="1400" b="0" i="0">
                           <a:solidFill>
                             <a:srgbClr val="1F2933"/>
                           </a:solidFill>
@@ -13010,7 +13643,7 @@
         <p:spPr>
           <a:xfrm>
             <a:off x="0" y="0"/>
-            <a:ext cx="12191695" cy="1207008"/>
+            <a:ext cx="12191695" cy="1337056"/>
           </a:xfrm>
           <a:prstGeom prst="rect">
             <a:avLst/>
@@ -13054,7 +13687,7 @@
         <p:spPr>
           <a:xfrm>
             <a:off x="548640" y="146304"/>
-            <a:ext cx="1371600" cy="384048"/>
+            <a:ext cx="1511726" cy="384048"/>
           </a:xfrm>
           <a:prstGeom prst="roundRect">
             <a:avLst/>
@@ -13082,10 +13715,12 @@
           </a:fontRef>
         </p:style>
         <p:txBody>
-          <a:bodyPr rtlCol="0" anchor="ctr" wrap="square" tIns="25400" bIns="25400"/>
-          <a:lstStyle/>
-          <a:p>
-            <a:pPr algn="ctr"/>
+          <a:bodyPr rtlCol="0" anchor="ctr" wrap="none" tIns="25400" bIns="25400"/>
+          <a:lstStyle/>
+          <a:p>
+            <a:pPr algn="ctr">
+              <a:buNone/>
+            </a:pPr>
             <a:r>
               <a:rPr sz="1600" b="1" i="0">
                 <a:solidFill>
@@ -13109,7 +13744,7 @@
         <p:spPr>
           <a:xfrm>
             <a:off x="548640" y="566928"/>
-            <a:ext cx="11094415" cy="566928"/>
+            <a:ext cx="11094415" cy="642112"/>
           </a:xfrm>
           <a:prstGeom prst="rect">
             <a:avLst/>
@@ -13122,6 +13757,9 @@
           </a:bodyPr>
           <a:lstStyle/>
           <a:p>
+            <a:pPr>
+              <a:buNone/>
+            </a:pPr>
             <a:r>
               <a:rPr sz="2700" b="1" i="0">
                 <a:solidFill>
@@ -13144,8 +13782,8 @@
         </p:nvSpPr>
         <p:spPr>
           <a:xfrm>
-            <a:off x="548640" y="1481328"/>
-            <a:ext cx="6522415" cy="5010912"/>
+            <a:off x="548640" y="1611376"/>
+            <a:ext cx="6522415" cy="4880864"/>
           </a:xfrm>
           <a:prstGeom prst="rect">
             <a:avLst/>
@@ -13160,11 +13798,12 @@
           <a:p>
             <a:pPr>
               <a:spcBef>
-                <a:spcPts val="1300"/>
+                <a:spcPts val="2600"/>
               </a:spcBef>
-            </a:pPr>
-            <a:r>
-              <a:rPr sz="2000" b="1" i="0">
+              <a:buNone/>
+            </a:pPr>
+            <a:r>
+              <a:rPr sz="2200" b="1" i="0">
                 <a:solidFill>
                   <a:srgbClr val="8E2B20"/>
                 </a:solidFill>
@@ -13175,7 +13814,7 @@
               <a:t>•  </a:t>
             </a:r>
             <a:r>
-              <a:rPr sz="2000" b="0" i="0">
+              <a:rPr sz="2200" b="1" i="0">
                 <a:solidFill>
                   <a:srgbClr val="1F2933"/>
                 </a:solidFill>
@@ -13189,11 +13828,12 @@
           <a:p>
             <a:pPr>
               <a:spcBef>
-                <a:spcPts val="1300"/>
+                <a:spcPts val="2600"/>
               </a:spcBef>
-            </a:pPr>
-            <a:r>
-              <a:rPr sz="2000" b="1" i="0">
+              <a:buNone/>
+            </a:pPr>
+            <a:r>
+              <a:rPr sz="2200" b="1" i="0">
                 <a:solidFill>
                   <a:srgbClr val="8E2B20"/>
                 </a:solidFill>
@@ -13204,7 +13844,7 @@
               <a:t>•  </a:t>
             </a:r>
             <a:r>
-              <a:rPr sz="2000" b="0" i="0">
+              <a:rPr sz="2200" b="1" i="0">
                 <a:solidFill>
                   <a:srgbClr val="1F2933"/>
                 </a:solidFill>
@@ -13218,11 +13858,12 @@
           <a:p>
             <a:pPr>
               <a:spcBef>
-                <a:spcPts val="1300"/>
+                <a:spcPts val="2600"/>
               </a:spcBef>
-            </a:pPr>
-            <a:r>
-              <a:rPr sz="2000" b="1" i="0">
+              <a:buNone/>
+            </a:pPr>
+            <a:r>
+              <a:rPr sz="2200" b="1" i="0">
                 <a:solidFill>
                   <a:srgbClr val="8E2B20"/>
                 </a:solidFill>
@@ -13233,7 +13874,7 @@
               <a:t>•  </a:t>
             </a:r>
             <a:r>
-              <a:rPr sz="2000" b="0" i="0">
+              <a:rPr sz="2200" b="1" i="0">
                 <a:solidFill>
                   <a:srgbClr val="1F2933"/>
                 </a:solidFill>
@@ -13262,7 +13903,7 @@
         </p:blipFill>
         <p:spPr>
           <a:xfrm>
-            <a:off x="7436815" y="1883664"/>
+            <a:off x="7436815" y="1948688"/>
             <a:ext cx="4206240" cy="4206240"/>
           </a:xfrm>
           <a:prstGeom prst="rect">
@@ -13341,7 +13982,7 @@
         <p:spPr>
           <a:xfrm>
             <a:off x="0" y="0"/>
-            <a:ext cx="12191695" cy="1207008"/>
+            <a:ext cx="12191695" cy="1337056"/>
           </a:xfrm>
           <a:prstGeom prst="rect">
             <a:avLst/>
@@ -13385,7 +14026,7 @@
         <p:spPr>
           <a:xfrm>
             <a:off x="548640" y="146304"/>
-            <a:ext cx="1371600" cy="384048"/>
+            <a:ext cx="1511726" cy="384048"/>
           </a:xfrm>
           <a:prstGeom prst="roundRect">
             <a:avLst/>
@@ -13413,10 +14054,12 @@
           </a:fontRef>
         </p:style>
         <p:txBody>
-          <a:bodyPr rtlCol="0" anchor="ctr" wrap="square" tIns="25400" bIns="25400"/>
-          <a:lstStyle/>
-          <a:p>
-            <a:pPr algn="ctr"/>
+          <a:bodyPr rtlCol="0" anchor="ctr" wrap="none" tIns="25400" bIns="25400"/>
+          <a:lstStyle/>
+          <a:p>
+            <a:pPr algn="ctr">
+              <a:buNone/>
+            </a:pPr>
             <a:r>
               <a:rPr sz="1600" b="1" i="0">
                 <a:solidFill>
@@ -13440,7 +14083,7 @@
         <p:spPr>
           <a:xfrm>
             <a:off x="548640" y="566928"/>
-            <a:ext cx="11094415" cy="566928"/>
+            <a:ext cx="11094415" cy="642112"/>
           </a:xfrm>
           <a:prstGeom prst="rect">
             <a:avLst/>
@@ -13453,6 +14096,9 @@
           </a:bodyPr>
           <a:lstStyle/>
           <a:p>
+            <a:pPr>
+              <a:buNone/>
+            </a:pPr>
             <a:r>
               <a:rPr sz="2700" b="1" i="0">
                 <a:solidFill>
@@ -13475,8 +14121,8 @@
         </p:nvSpPr>
         <p:spPr>
           <a:xfrm>
-            <a:off x="548640" y="1481328"/>
-            <a:ext cx="6522415" cy="5010912"/>
+            <a:off x="548640" y="1611376"/>
+            <a:ext cx="6522415" cy="4880864"/>
           </a:xfrm>
           <a:prstGeom prst="rect">
             <a:avLst/>
@@ -13491,11 +14137,12 @@
           <a:p>
             <a:pPr>
               <a:spcBef>
-                <a:spcPts val="1300"/>
+                <a:spcPts val="2600"/>
               </a:spcBef>
-            </a:pPr>
-            <a:r>
-              <a:rPr sz="2000" b="1" i="0">
+              <a:buNone/>
+            </a:pPr>
+            <a:r>
+              <a:rPr sz="2200" b="1" i="0">
                 <a:solidFill>
                   <a:srgbClr val="8E2B20"/>
                 </a:solidFill>
@@ -13506,7 +14153,7 @@
               <a:t>•  </a:t>
             </a:r>
             <a:r>
-              <a:rPr sz="2000" b="0" i="0">
+              <a:rPr sz="2200" b="1" i="0">
                 <a:solidFill>
                   <a:srgbClr val="1F2933"/>
                 </a:solidFill>
@@ -13520,11 +14167,12 @@
           <a:p>
             <a:pPr>
               <a:spcBef>
-                <a:spcPts val="1300"/>
+                <a:spcPts val="2600"/>
               </a:spcBef>
-            </a:pPr>
-            <a:r>
-              <a:rPr sz="2000" b="1" i="0">
+              <a:buNone/>
+            </a:pPr>
+            <a:r>
+              <a:rPr sz="2200" b="1" i="0">
                 <a:solidFill>
                   <a:srgbClr val="8E2B20"/>
                 </a:solidFill>
@@ -13535,7 +14183,7 @@
               <a:t>•  </a:t>
             </a:r>
             <a:r>
-              <a:rPr sz="2000" b="0" i="0">
+              <a:rPr sz="2200" b="1" i="0">
                 <a:solidFill>
                   <a:srgbClr val="1F2933"/>
                 </a:solidFill>
@@ -13549,11 +14197,12 @@
           <a:p>
             <a:pPr>
               <a:spcBef>
-                <a:spcPts val="1300"/>
+                <a:spcPts val="2600"/>
               </a:spcBef>
-            </a:pPr>
-            <a:r>
-              <a:rPr sz="2000" b="1" i="0">
+              <a:buNone/>
+            </a:pPr>
+            <a:r>
+              <a:rPr sz="2200" b="1" i="0">
                 <a:solidFill>
                   <a:srgbClr val="8E2B20"/>
                 </a:solidFill>
@@ -13564,7 +14213,7 @@
               <a:t>•  </a:t>
             </a:r>
             <a:r>
-              <a:rPr sz="2000" b="0" i="0">
+              <a:rPr sz="2200" b="1" i="0">
                 <a:solidFill>
                   <a:srgbClr val="1F2933"/>
                 </a:solidFill>
@@ -13593,7 +14242,7 @@
         </p:blipFill>
         <p:spPr>
           <a:xfrm>
-            <a:off x="7436815" y="1883664"/>
+            <a:off x="7436815" y="1948688"/>
             <a:ext cx="4206240" cy="4206240"/>
           </a:xfrm>
           <a:prstGeom prst="rect">
@@ -13672,7 +14321,7 @@
         <p:spPr>
           <a:xfrm>
             <a:off x="0" y="0"/>
-            <a:ext cx="12191695" cy="1207008"/>
+            <a:ext cx="12191695" cy="1337056"/>
           </a:xfrm>
           <a:prstGeom prst="rect">
             <a:avLst/>
@@ -13716,7 +14365,7 @@
         <p:spPr>
           <a:xfrm>
             <a:off x="548640" y="146304"/>
-            <a:ext cx="1371600" cy="384048"/>
+            <a:ext cx="1511726" cy="384048"/>
           </a:xfrm>
           <a:prstGeom prst="roundRect">
             <a:avLst/>
@@ -13744,10 +14393,12 @@
           </a:fontRef>
         </p:style>
         <p:txBody>
-          <a:bodyPr rtlCol="0" anchor="ctr" wrap="square" tIns="25400" bIns="25400"/>
-          <a:lstStyle/>
-          <a:p>
-            <a:pPr algn="ctr"/>
+          <a:bodyPr rtlCol="0" anchor="ctr" wrap="none" tIns="25400" bIns="25400"/>
+          <a:lstStyle/>
+          <a:p>
+            <a:pPr algn="ctr">
+              <a:buNone/>
+            </a:pPr>
             <a:r>
               <a:rPr sz="1600" b="1" i="0">
                 <a:solidFill>
@@ -13771,7 +14422,7 @@
         <p:spPr>
           <a:xfrm>
             <a:off x="548640" y="566928"/>
-            <a:ext cx="11094415" cy="566928"/>
+            <a:ext cx="11094415" cy="642112"/>
           </a:xfrm>
           <a:prstGeom prst="rect">
             <a:avLst/>
@@ -13784,6 +14435,9 @@
           </a:bodyPr>
           <a:lstStyle/>
           <a:p>
+            <a:pPr>
+              <a:buNone/>
+            </a:pPr>
             <a:r>
               <a:rPr sz="2700" b="1" i="0">
                 <a:solidFill>
@@ -13806,8 +14460,8 @@
         </p:nvSpPr>
         <p:spPr>
           <a:xfrm>
-            <a:off x="548640" y="1481328"/>
-            <a:ext cx="6522415" cy="5010912"/>
+            <a:off x="548640" y="1611376"/>
+            <a:ext cx="6522415" cy="4880864"/>
           </a:xfrm>
           <a:prstGeom prst="rect">
             <a:avLst/>
@@ -13822,11 +14476,12 @@
           <a:p>
             <a:pPr>
               <a:spcBef>
-                <a:spcPts val="1300"/>
+                <a:spcPts val="2600"/>
               </a:spcBef>
-            </a:pPr>
-            <a:r>
-              <a:rPr sz="2000" b="1" i="0">
+              <a:buNone/>
+            </a:pPr>
+            <a:r>
+              <a:rPr sz="2200" b="1" i="0">
                 <a:solidFill>
                   <a:srgbClr val="8E2B20"/>
                 </a:solidFill>
@@ -13837,7 +14492,7 @@
               <a:t>•  </a:t>
             </a:r>
             <a:r>
-              <a:rPr sz="2000" b="0" i="0">
+              <a:rPr sz="2200" b="1" i="0">
                 <a:solidFill>
                   <a:srgbClr val="1F2933"/>
                 </a:solidFill>
@@ -13851,11 +14506,12 @@
           <a:p>
             <a:pPr>
               <a:spcBef>
-                <a:spcPts val="1300"/>
+                <a:spcPts val="2600"/>
               </a:spcBef>
-            </a:pPr>
-            <a:r>
-              <a:rPr sz="2000" b="1" i="0">
+              <a:buNone/>
+            </a:pPr>
+            <a:r>
+              <a:rPr sz="2200" b="1" i="0">
                 <a:solidFill>
                   <a:srgbClr val="8E2B20"/>
                 </a:solidFill>
@@ -13866,7 +14522,7 @@
               <a:t>•  </a:t>
             </a:r>
             <a:r>
-              <a:rPr sz="2000" b="0" i="0">
+              <a:rPr sz="2200" b="1" i="0">
                 <a:solidFill>
                   <a:srgbClr val="1F2933"/>
                 </a:solidFill>
@@ -13880,11 +14536,12 @@
           <a:p>
             <a:pPr>
               <a:spcBef>
-                <a:spcPts val="1300"/>
+                <a:spcPts val="2600"/>
               </a:spcBef>
-            </a:pPr>
-            <a:r>
-              <a:rPr sz="2000" b="1" i="0">
+              <a:buNone/>
+            </a:pPr>
+            <a:r>
+              <a:rPr sz="2200" b="1" i="0">
                 <a:solidFill>
                   <a:srgbClr val="8E2B20"/>
                 </a:solidFill>
@@ -13895,7 +14552,7 @@
               <a:t>•  </a:t>
             </a:r>
             <a:r>
-              <a:rPr sz="2000" b="0" i="0">
+              <a:rPr sz="2200" b="1" i="0">
                 <a:solidFill>
                   <a:srgbClr val="1F2933"/>
                 </a:solidFill>
@@ -13924,7 +14581,7 @@
         </p:blipFill>
         <p:spPr>
           <a:xfrm>
-            <a:off x="7436815" y="1883664"/>
+            <a:off x="7436815" y="1948688"/>
             <a:ext cx="4206240" cy="4206240"/>
           </a:xfrm>
           <a:prstGeom prst="rect">
@@ -14003,7 +14660,7 @@
         <p:spPr>
           <a:xfrm>
             <a:off x="0" y="0"/>
-            <a:ext cx="12191695" cy="1207008"/>
+            <a:ext cx="12191695" cy="1775968"/>
           </a:xfrm>
           <a:prstGeom prst="rect">
             <a:avLst/>
@@ -14075,10 +14732,12 @@
           </a:fontRef>
         </p:style>
         <p:txBody>
-          <a:bodyPr rtlCol="0" anchor="ctr" wrap="square" tIns="25400" bIns="25400"/>
-          <a:lstStyle/>
-          <a:p>
-            <a:pPr algn="ctr"/>
+          <a:bodyPr rtlCol="0" anchor="ctr" wrap="none" tIns="25400" bIns="25400"/>
+          <a:lstStyle/>
+          <a:p>
+            <a:pPr algn="ctr">
+              <a:buNone/>
+            </a:pPr>
             <a:r>
               <a:rPr sz="1600" b="1" i="0">
                 <a:solidFill>
@@ -14102,7 +14761,7 @@
         <p:spPr>
           <a:xfrm>
             <a:off x="548640" y="566928"/>
-            <a:ext cx="11094415" cy="566928"/>
+            <a:ext cx="11094415" cy="1081024"/>
           </a:xfrm>
           <a:prstGeom prst="rect">
             <a:avLst/>
@@ -14115,6 +14774,9 @@
           </a:bodyPr>
           <a:lstStyle/>
           <a:p>
+            <a:pPr>
+              <a:buNone/>
+            </a:pPr>
             <a:r>
               <a:rPr sz="2700" b="1" i="0">
                 <a:solidFill>
@@ -14137,8 +14799,8 @@
         </p:nvSpPr>
         <p:spPr>
           <a:xfrm>
-            <a:off x="548640" y="1481328"/>
-            <a:ext cx="6522415" cy="5010912"/>
+            <a:off x="548640" y="2050288"/>
+            <a:ext cx="6522415" cy="4441952"/>
           </a:xfrm>
           <a:prstGeom prst="rect">
             <a:avLst/>
@@ -14146,18 +14808,19 @@
           <a:noFill/>
         </p:spPr>
         <p:txBody>
-          <a:bodyPr wrap="square" anchor="ctr">
+          <a:bodyPr wrap="square" anchor="t">
             <a:spAutoFit/>
           </a:bodyPr>
           <a:lstStyle/>
           <a:p>
             <a:pPr>
               <a:spcBef>
-                <a:spcPts val="1300"/>
+                <a:spcPts val="2081"/>
               </a:spcBef>
-            </a:pPr>
-            <a:r>
-              <a:rPr sz="2000" b="1" i="0">
+              <a:buNone/>
+            </a:pPr>
+            <a:r>
+              <a:rPr sz="1700" b="1" i="0">
                 <a:solidFill>
                   <a:srgbClr val="8E2B20"/>
                 </a:solidFill>
@@ -14168,7 +14831,7 @@
               <a:t>•  </a:t>
             </a:r>
             <a:r>
-              <a:rPr sz="2000" b="0" i="0">
+              <a:rPr sz="1700" b="1" i="0">
                 <a:solidFill>
                   <a:srgbClr val="1F2933"/>
                 </a:solidFill>
@@ -14182,11 +14845,12 @@
           <a:p>
             <a:pPr>
               <a:spcBef>
-                <a:spcPts val="1300"/>
+                <a:spcPts val="2081"/>
               </a:spcBef>
-            </a:pPr>
-            <a:r>
-              <a:rPr sz="2000" b="1" i="0">
+              <a:buNone/>
+            </a:pPr>
+            <a:r>
+              <a:rPr sz="1700" b="1" i="0">
                 <a:solidFill>
                   <a:srgbClr val="8E2B20"/>
                 </a:solidFill>
@@ -14197,7 +14861,7 @@
               <a:t>•  </a:t>
             </a:r>
             <a:r>
-              <a:rPr sz="2000" b="0" i="0">
+              <a:rPr sz="1700" b="1" i="0">
                 <a:solidFill>
                   <a:srgbClr val="1F2933"/>
                 </a:solidFill>
@@ -14211,11 +14875,12 @@
           <a:p>
             <a:pPr>
               <a:spcBef>
-                <a:spcPts val="1300"/>
+                <a:spcPts val="2081"/>
               </a:spcBef>
-            </a:pPr>
-            <a:r>
-              <a:rPr sz="2000" b="1" i="0">
+              <a:buNone/>
+            </a:pPr>
+            <a:r>
+              <a:rPr sz="1700" b="1" i="0">
                 <a:solidFill>
                   <a:srgbClr val="8E2B20"/>
                 </a:solidFill>
@@ -14226,7 +14891,7 @@
               <a:t>•  </a:t>
             </a:r>
             <a:r>
-              <a:rPr sz="2000" b="0" i="0">
+              <a:rPr sz="1700" b="1" i="0">
                 <a:solidFill>
                   <a:srgbClr val="1F2933"/>
                 </a:solidFill>
@@ -14240,11 +14905,12 @@
           <a:p>
             <a:pPr>
               <a:spcBef>
-                <a:spcPts val="1300"/>
+                <a:spcPts val="2081"/>
               </a:spcBef>
-            </a:pPr>
-            <a:r>
-              <a:rPr sz="2000" b="1" i="0">
+              <a:buNone/>
+            </a:pPr>
+            <a:r>
+              <a:rPr sz="1700" b="1" i="0">
                 <a:solidFill>
                   <a:srgbClr val="8E2B20"/>
                 </a:solidFill>
@@ -14255,7 +14921,7 @@
               <a:t>•  </a:t>
             </a:r>
             <a:r>
-              <a:rPr sz="2000" b="0" i="0">
+              <a:rPr sz="1700" b="1" i="0">
                 <a:solidFill>
                   <a:srgbClr val="1F2933"/>
                 </a:solidFill>
@@ -14284,7 +14950,7 @@
         </p:blipFill>
         <p:spPr>
           <a:xfrm>
-            <a:off x="7436815" y="2584019"/>
+            <a:off x="7436815" y="2868499"/>
             <a:ext cx="4206240" cy="2805529"/>
           </a:xfrm>
           <a:prstGeom prst="rect">
@@ -14376,7 +15042,9 @@
           </a:bodyPr>
           <a:lstStyle/>
           <a:p>
-            <a:pPr algn="ctr"/>
+            <a:pPr algn="ctr">
+              <a:buNone/>
+            </a:pPr>
             <a:r>
               <a:rPr sz="3600" b="1" i="0">
                 <a:solidFill>
@@ -14462,7 +15130,7 @@
         <p:spPr>
           <a:xfrm>
             <a:off x="0" y="0"/>
-            <a:ext cx="12191695" cy="1207008"/>
+            <a:ext cx="12191695" cy="1337056"/>
           </a:xfrm>
           <a:prstGeom prst="rect">
             <a:avLst/>
@@ -14506,7 +15174,7 @@
         <p:spPr>
           <a:xfrm>
             <a:off x="548640" y="146304"/>
-            <a:ext cx="1371600" cy="384048"/>
+            <a:ext cx="1402486" cy="384048"/>
           </a:xfrm>
           <a:prstGeom prst="roundRect">
             <a:avLst/>
@@ -14534,10 +15202,12 @@
           </a:fontRef>
         </p:style>
         <p:txBody>
-          <a:bodyPr rtlCol="0" anchor="ctr" wrap="square" tIns="25400" bIns="25400"/>
-          <a:lstStyle/>
-          <a:p>
-            <a:pPr algn="ctr"/>
+          <a:bodyPr rtlCol="0" anchor="ctr" wrap="none" tIns="25400" bIns="25400"/>
+          <a:lstStyle/>
+          <a:p>
+            <a:pPr algn="ctr">
+              <a:buNone/>
+            </a:pPr>
             <a:r>
               <a:rPr sz="1600" b="1" i="0">
                 <a:solidFill>
@@ -14561,7 +15231,7 @@
         <p:spPr>
           <a:xfrm>
             <a:off x="548640" y="566928"/>
-            <a:ext cx="11094415" cy="566928"/>
+            <a:ext cx="11094415" cy="642112"/>
           </a:xfrm>
           <a:prstGeom prst="rect">
             <a:avLst/>
@@ -14574,6 +15244,9 @@
           </a:bodyPr>
           <a:lstStyle/>
           <a:p>
+            <a:pPr>
+              <a:buNone/>
+            </a:pPr>
             <a:r>
               <a:rPr sz="2700" b="1" i="0">
                 <a:solidFill>
@@ -14604,7 +15277,7 @@
         </p:blipFill>
         <p:spPr>
           <a:xfrm>
-            <a:off x="1323987" y="2000500"/>
+            <a:off x="1323987" y="2130548"/>
             <a:ext cx="3108960" cy="2070615"/>
           </a:xfrm>
           <a:prstGeom prst="rect">
@@ -14620,8 +15293,8 @@
         </p:nvSpPr>
         <p:spPr>
           <a:xfrm>
-            <a:off x="548640" y="4727448"/>
-            <a:ext cx="4659654" cy="1764792"/>
+            <a:off x="548640" y="4857496"/>
+            <a:ext cx="4659654" cy="1634744"/>
           </a:xfrm>
           <a:prstGeom prst="rect">
             <a:avLst/>
@@ -14634,7 +15307,9 @@
           </a:bodyPr>
           <a:lstStyle/>
           <a:p>
-            <a:pPr algn="ctr"/>
+            <a:pPr algn="ctr">
+              <a:buNone/>
+            </a:pPr>
             <a:r>
               <a:rPr sz="5400" b="1" i="0">
                 <a:solidFill>
@@ -14663,6 +15338,7 @@
               <a:spcBef>
                 <a:spcPts val="600"/>
               </a:spcBef>
+              <a:buNone/>
             </a:pPr>
             <a:r>
               <a:rPr sz="2200" b="0" i="1">
@@ -14681,6 +15357,7 @@
               <a:spcBef>
                 <a:spcPts val="400"/>
               </a:spcBef>
+              <a:buNone/>
             </a:pPr>
             <a:r>
               <a:rPr sz="1800" b="0" i="0">
@@ -14704,8 +15381,8 @@
         </p:nvSpPr>
         <p:spPr>
           <a:xfrm>
-            <a:off x="5665494" y="1481328"/>
-            <a:ext cx="5977561" cy="5010912"/>
+            <a:off x="5665494" y="1611376"/>
+            <a:ext cx="5977561" cy="4880864"/>
           </a:xfrm>
           <a:prstGeom prst="rect">
             <a:avLst/>
@@ -14718,6 +15395,9 @@
           </a:bodyPr>
           <a:lstStyle/>
           <a:p>
+            <a:pPr>
+              <a:buNone/>
+            </a:pPr>
             <a:r>
               <a:rPr sz="1600" b="1" i="0">
                 <a:solidFill>
@@ -14735,6 +15415,7 @@
               <a:spcBef>
                 <a:spcPts val="2200"/>
               </a:spcBef>
+              <a:buNone/>
             </a:pPr>
             <a:r>
               <a:rPr sz="1800" b="1" i="0">
@@ -14764,6 +15445,7 @@
               <a:spcBef>
                 <a:spcPts val="200"/>
               </a:spcBef>
+              <a:buNone/>
             </a:pPr>
             <a:r>
               <a:rPr sz="1400" b="0" i="1">
@@ -14782,6 +15464,7 @@
               <a:spcBef>
                 <a:spcPts val="100"/>
               </a:spcBef>
+              <a:buNone/>
             </a:pPr>
             <a:r>
               <a:rPr sz="1400" b="0" i="0">
@@ -14800,6 +15483,7 @@
               <a:spcBef>
                 <a:spcPts val="2200"/>
               </a:spcBef>
+              <a:buNone/>
             </a:pPr>
             <a:r>
               <a:rPr sz="1800" b="1" i="0">
@@ -14829,6 +15513,7 @@
               <a:spcBef>
                 <a:spcPts val="200"/>
               </a:spcBef>
+              <a:buNone/>
             </a:pPr>
             <a:r>
               <a:rPr sz="1400" b="0" i="1">
@@ -14847,6 +15532,7 @@
               <a:spcBef>
                 <a:spcPts val="100"/>
               </a:spcBef>
+              <a:buNone/>
             </a:pPr>
             <a:r>
               <a:rPr sz="1400" b="0" i="0">
@@ -14865,6 +15551,7 @@
               <a:spcBef>
                 <a:spcPts val="2200"/>
               </a:spcBef>
+              <a:buNone/>
             </a:pPr>
             <a:r>
               <a:rPr sz="1800" b="1" i="0">
@@ -14894,6 +15581,7 @@
               <a:spcBef>
                 <a:spcPts val="200"/>
               </a:spcBef>
+              <a:buNone/>
             </a:pPr>
             <a:r>
               <a:rPr sz="1400" b="0" i="1">
@@ -14912,6 +15600,7 @@
               <a:spcBef>
                 <a:spcPts val="100"/>
               </a:spcBef>
+              <a:buNone/>
             </a:pPr>
             <a:r>
               <a:rPr sz="1400" b="0" i="0">
@@ -14963,6 +15652,45 @@
           </a:ln>
         </p:spPr>
       </p:pic>
+      <p:sp>
+        <p:nvSpPr>
+          <p:cNvPr id="10" name="TextBox 9"/>
+          <p:cNvSpPr txBox="1"/>
+          <p:nvPr/>
+        </p:nvSpPr>
+        <p:spPr>
+          <a:xfrm>
+            <a:off x="548640" y="6492240"/>
+            <a:ext cx="11094415" cy="274320"/>
+          </a:xfrm>
+          <a:prstGeom prst="rect">
+            <a:avLst/>
+          </a:prstGeom>
+          <a:noFill/>
+        </p:spPr>
+        <p:txBody>
+          <a:bodyPr wrap="square" anchor="ctr">
+            <a:spAutoFit/>
+          </a:bodyPr>
+          <a:lstStyle/>
+          <a:p>
+            <a:pPr>
+              <a:buNone/>
+            </a:pPr>
+            <a:r>
+              <a:rPr sz="1100" b="0" i="1">
+                <a:solidFill>
+                  <a:srgbClr val="6B7683"/>
+                </a:solidFill>
+                <a:latin typeface="Calibri"/>
+                <a:ea typeface="Microsoft YaHei"/>
+                <a:cs typeface="Microsoft YaHei"/>
+              </a:rPr>
+              <a:t>📖 忙 = 忄(xīn, trái tim) + 亡(wáng, mất mát) → lòng NƠM NỚP như sắp mất điều gì → "bận rộn" → 帮忙 = giúp khi ai đó đang bận</a:t>
+            </a:r>
+          </a:p>
+        </p:txBody>
+      </p:sp>
     </p:spTree>
   </p:cSld>
   <p:clrMapOvr>
@@ -15056,7 +15784,7 @@
         <p:spPr>
           <a:xfrm>
             <a:off x="0" y="0"/>
-            <a:ext cx="12191695" cy="1207008"/>
+            <a:ext cx="12191695" cy="1337056"/>
           </a:xfrm>
           <a:prstGeom prst="rect">
             <a:avLst/>
@@ -15100,7 +15828,7 @@
         <p:spPr>
           <a:xfrm>
             <a:off x="548640" y="146304"/>
-            <a:ext cx="1371600" cy="384048"/>
+            <a:ext cx="1402486" cy="384048"/>
           </a:xfrm>
           <a:prstGeom prst="roundRect">
             <a:avLst/>
@@ -15128,10 +15856,12 @@
           </a:fontRef>
         </p:style>
         <p:txBody>
-          <a:bodyPr rtlCol="0" anchor="ctr" wrap="square" tIns="25400" bIns="25400"/>
-          <a:lstStyle/>
-          <a:p>
-            <a:pPr algn="ctr"/>
+          <a:bodyPr rtlCol="0" anchor="ctr" wrap="none" tIns="25400" bIns="25400"/>
+          <a:lstStyle/>
+          <a:p>
+            <a:pPr algn="ctr">
+              <a:buNone/>
+            </a:pPr>
             <a:r>
               <a:rPr sz="1600" b="1" i="0">
                 <a:solidFill>
@@ -15155,7 +15885,7 @@
         <p:spPr>
           <a:xfrm>
             <a:off x="548640" y="566928"/>
-            <a:ext cx="11094415" cy="566928"/>
+            <a:ext cx="11094415" cy="642112"/>
           </a:xfrm>
           <a:prstGeom prst="rect">
             <a:avLst/>
@@ -15168,6 +15898,9 @@
           </a:bodyPr>
           <a:lstStyle/>
           <a:p>
+            <a:pPr>
+              <a:buNone/>
+            </a:pPr>
             <a:r>
               <a:rPr sz="2700" b="1" i="0">
                 <a:solidFill>
@@ -15198,7 +15931,7 @@
         </p:blipFill>
         <p:spPr>
           <a:xfrm>
-            <a:off x="1323987" y="1481328"/>
+            <a:off x="1323987" y="1611376"/>
             <a:ext cx="3108960" cy="3108960"/>
           </a:xfrm>
           <a:prstGeom prst="rect">
@@ -15214,8 +15947,8 @@
         </p:nvSpPr>
         <p:spPr>
           <a:xfrm>
-            <a:off x="548640" y="4727448"/>
-            <a:ext cx="4659654" cy="1764792"/>
+            <a:off x="548640" y="4857496"/>
+            <a:ext cx="4659654" cy="1634744"/>
           </a:xfrm>
           <a:prstGeom prst="rect">
             <a:avLst/>
@@ -15228,7 +15961,9 @@
           </a:bodyPr>
           <a:lstStyle/>
           <a:p>
-            <a:pPr algn="ctr"/>
+            <a:pPr algn="ctr">
+              <a:buNone/>
+            </a:pPr>
             <a:r>
               <a:rPr sz="5400" b="1" i="0">
                 <a:solidFill>
@@ -15257,6 +15992,7 @@
               <a:spcBef>
                 <a:spcPts val="600"/>
               </a:spcBef>
+              <a:buNone/>
             </a:pPr>
             <a:r>
               <a:rPr sz="2200" b="0" i="1">
@@ -15275,6 +16011,7 @@
               <a:spcBef>
                 <a:spcPts val="400"/>
               </a:spcBef>
+              <a:buNone/>
             </a:pPr>
             <a:r>
               <a:rPr sz="1800" b="0" i="0">
@@ -15298,8 +16035,8 @@
         </p:nvSpPr>
         <p:spPr>
           <a:xfrm>
-            <a:off x="5665494" y="1481328"/>
-            <a:ext cx="5977561" cy="5010912"/>
+            <a:off x="5665494" y="1611376"/>
+            <a:ext cx="5977561" cy="4880864"/>
           </a:xfrm>
           <a:prstGeom prst="rect">
             <a:avLst/>
@@ -15312,6 +16049,9 @@
           </a:bodyPr>
           <a:lstStyle/>
           <a:p>
+            <a:pPr>
+              <a:buNone/>
+            </a:pPr>
             <a:r>
               <a:rPr sz="1600" b="1" i="0">
                 <a:solidFill>
@@ -15329,6 +16069,7 @@
               <a:spcBef>
                 <a:spcPts val="2200"/>
               </a:spcBef>
+              <a:buNone/>
             </a:pPr>
             <a:r>
               <a:rPr sz="1800" b="1" i="0">
@@ -15358,6 +16099,7 @@
               <a:spcBef>
                 <a:spcPts val="200"/>
               </a:spcBef>
+              <a:buNone/>
             </a:pPr>
             <a:r>
               <a:rPr sz="1400" b="0" i="1">
@@ -15376,6 +16118,7 @@
               <a:spcBef>
                 <a:spcPts val="100"/>
               </a:spcBef>
+              <a:buNone/>
             </a:pPr>
             <a:r>
               <a:rPr sz="1400" b="0" i="0">
@@ -15394,6 +16137,7 @@
               <a:spcBef>
                 <a:spcPts val="2200"/>
               </a:spcBef>
+              <a:buNone/>
             </a:pPr>
             <a:r>
               <a:rPr sz="1800" b="1" i="0">
@@ -15423,6 +16167,7 @@
               <a:spcBef>
                 <a:spcPts val="200"/>
               </a:spcBef>
+              <a:buNone/>
             </a:pPr>
             <a:r>
               <a:rPr sz="1400" b="0" i="1">
@@ -15441,6 +16186,7 @@
               <a:spcBef>
                 <a:spcPts val="100"/>
               </a:spcBef>
+              <a:buNone/>
             </a:pPr>
             <a:r>
               <a:rPr sz="1400" b="0" i="0">
@@ -15459,6 +16205,7 @@
               <a:spcBef>
                 <a:spcPts val="2200"/>
               </a:spcBef>
+              <a:buNone/>
             </a:pPr>
             <a:r>
               <a:rPr sz="1800" b="1" i="0">
@@ -15488,6 +16235,7 @@
               <a:spcBef>
                 <a:spcPts val="200"/>
               </a:spcBef>
+              <a:buNone/>
             </a:pPr>
             <a:r>
               <a:rPr sz="1400" b="0" i="1">
@@ -15506,6 +16254,7 @@
               <a:spcBef>
                 <a:spcPts val="100"/>
               </a:spcBef>
+              <a:buNone/>
             </a:pPr>
             <a:r>
               <a:rPr sz="1400" b="0" i="0">
@@ -15557,6 +16306,45 @@
           </a:ln>
         </p:spPr>
       </p:pic>
+      <p:sp>
+        <p:nvSpPr>
+          <p:cNvPr id="10" name="TextBox 9"/>
+          <p:cNvSpPr txBox="1"/>
+          <p:nvPr/>
+        </p:nvSpPr>
+        <p:spPr>
+          <a:xfrm>
+            <a:off x="548640" y="6492240"/>
+            <a:ext cx="11094415" cy="274320"/>
+          </a:xfrm>
+          <a:prstGeom prst="rect">
+            <a:avLst/>
+          </a:prstGeom>
+          <a:noFill/>
+        </p:spPr>
+        <p:txBody>
+          <a:bodyPr wrap="square" anchor="ctr">
+            <a:spAutoFit/>
+          </a:bodyPr>
+          <a:lstStyle/>
+          <a:p>
+            <a:pPr>
+              <a:buNone/>
+            </a:pPr>
+            <a:r>
+              <a:rPr sz="1100" b="0" i="1">
+                <a:solidFill>
+                  <a:srgbClr val="6B7683"/>
+                </a:solidFill>
+                <a:latin typeface="Calibri"/>
+                <a:ea typeface="Microsoft YaHei"/>
+                <a:cs typeface="Microsoft YaHei"/>
+              </a:rPr>
+              <a:t>📖 思 = 田(tián, đầu/ruộng) + 心(xīn, tim) → nghĩ bằng cả ĐẦU và TIM → "suy nghĩ, ý" → 不好意思 = ngại ngùng</a:t>
+            </a:r>
+          </a:p>
+        </p:txBody>
+      </p:sp>
     </p:spTree>
   </p:cSld>
   <p:clrMapOvr>
@@ -15650,7 +16438,7 @@
         <p:spPr>
           <a:xfrm>
             <a:off x="0" y="0"/>
-            <a:ext cx="12191695" cy="1207008"/>
+            <a:ext cx="12191695" cy="1337056"/>
           </a:xfrm>
           <a:prstGeom prst="rect">
             <a:avLst/>
@@ -15694,7 +16482,7 @@
         <p:spPr>
           <a:xfrm>
             <a:off x="548640" y="146304"/>
-            <a:ext cx="1371600" cy="384048"/>
+            <a:ext cx="1402486" cy="384048"/>
           </a:xfrm>
           <a:prstGeom prst="roundRect">
             <a:avLst/>
@@ -15722,10 +16510,12 @@
           </a:fontRef>
         </p:style>
         <p:txBody>
-          <a:bodyPr rtlCol="0" anchor="ctr" wrap="square" tIns="25400" bIns="25400"/>
-          <a:lstStyle/>
-          <a:p>
-            <a:pPr algn="ctr"/>
+          <a:bodyPr rtlCol="0" anchor="ctr" wrap="none" tIns="25400" bIns="25400"/>
+          <a:lstStyle/>
+          <a:p>
+            <a:pPr algn="ctr">
+              <a:buNone/>
+            </a:pPr>
             <a:r>
               <a:rPr sz="1600" b="1" i="0">
                 <a:solidFill>
@@ -15749,7 +16539,7 @@
         <p:spPr>
           <a:xfrm>
             <a:off x="548640" y="566928"/>
-            <a:ext cx="11094415" cy="566928"/>
+            <a:ext cx="11094415" cy="642112"/>
           </a:xfrm>
           <a:prstGeom prst="rect">
             <a:avLst/>
@@ -15762,6 +16552,9 @@
           </a:bodyPr>
           <a:lstStyle/>
           <a:p>
+            <a:pPr>
+              <a:buNone/>
+            </a:pPr>
             <a:r>
               <a:rPr sz="2700" b="1" i="0">
                 <a:solidFill>
@@ -15784,8 +16577,8 @@
         </p:nvSpPr>
         <p:spPr>
           <a:xfrm>
-            <a:off x="548640" y="1481328"/>
-            <a:ext cx="4659654" cy="5010912"/>
+            <a:off x="548640" y="1611376"/>
+            <a:ext cx="4659654" cy="4880864"/>
           </a:xfrm>
           <a:prstGeom prst="rect">
             <a:avLst/>
@@ -15798,7 +16591,9 @@
           </a:bodyPr>
           <a:lstStyle/>
           <a:p>
-            <a:pPr algn="ctr"/>
+            <a:pPr algn="ctr">
+              <a:buNone/>
+            </a:pPr>
             <a:r>
               <a:rPr sz="5400" b="1" i="0">
                 <a:solidFill>
@@ -15827,6 +16622,7 @@
               <a:spcBef>
                 <a:spcPts val="600"/>
               </a:spcBef>
+              <a:buNone/>
             </a:pPr>
             <a:r>
               <a:rPr sz="2200" b="0" i="1">
@@ -15845,6 +16641,7 @@
               <a:spcBef>
                 <a:spcPts val="400"/>
               </a:spcBef>
+              <a:buNone/>
             </a:pPr>
             <a:r>
               <a:rPr sz="1800" b="0" i="0">
@@ -15868,8 +16665,8 @@
         </p:nvSpPr>
         <p:spPr>
           <a:xfrm>
-            <a:off x="5665494" y="1481328"/>
-            <a:ext cx="5977561" cy="5010912"/>
+            <a:off x="5665494" y="1611376"/>
+            <a:ext cx="5977561" cy="4880864"/>
           </a:xfrm>
           <a:prstGeom prst="rect">
             <a:avLst/>
@@ -15882,6 +16679,9 @@
           </a:bodyPr>
           <a:lstStyle/>
           <a:p>
+            <a:pPr>
+              <a:buNone/>
+            </a:pPr>
             <a:r>
               <a:rPr sz="1600" b="1" i="0">
                 <a:solidFill>
@@ -15899,6 +16699,7 @@
               <a:spcBef>
                 <a:spcPts val="2200"/>
               </a:spcBef>
+              <a:buNone/>
             </a:pPr>
             <a:r>
               <a:rPr sz="1800" b="1" i="0">
@@ -15928,6 +16729,7 @@
               <a:spcBef>
                 <a:spcPts val="200"/>
               </a:spcBef>
+              <a:buNone/>
             </a:pPr>
             <a:r>
               <a:rPr sz="1400" b="0" i="1">
@@ -15946,6 +16748,7 @@
               <a:spcBef>
                 <a:spcPts val="100"/>
               </a:spcBef>
+              <a:buNone/>
             </a:pPr>
             <a:r>
               <a:rPr sz="1400" b="0" i="0">
@@ -15964,6 +16767,7 @@
               <a:spcBef>
                 <a:spcPts val="2200"/>
               </a:spcBef>
+              <a:buNone/>
             </a:pPr>
             <a:r>
               <a:rPr sz="1800" b="1" i="0">
@@ -15993,6 +16797,7 @@
               <a:spcBef>
                 <a:spcPts val="200"/>
               </a:spcBef>
+              <a:buNone/>
             </a:pPr>
             <a:r>
               <a:rPr sz="1400" b="0" i="1">
@@ -16011,6 +16816,7 @@
               <a:spcBef>
                 <a:spcPts val="100"/>
               </a:spcBef>
+              <a:buNone/>
             </a:pPr>
             <a:r>
               <a:rPr sz="1400" b="0" i="0">
@@ -16029,6 +16835,7 @@
               <a:spcBef>
                 <a:spcPts val="2200"/>
               </a:spcBef>
+              <a:buNone/>
             </a:pPr>
             <a:r>
               <a:rPr sz="1800" b="1" i="0">
@@ -16058,6 +16865,7 @@
               <a:spcBef>
                 <a:spcPts val="200"/>
               </a:spcBef>
+              <a:buNone/>
             </a:pPr>
             <a:r>
               <a:rPr sz="1400" b="0" i="1">
@@ -16076,6 +16884,7 @@
               <a:spcBef>
                 <a:spcPts val="100"/>
               </a:spcBef>
+              <a:buNone/>
             </a:pPr>
             <a:r>
               <a:rPr sz="1400" b="0" i="0">
@@ -16127,6 +16936,45 @@
           </a:ln>
         </p:spPr>
       </p:pic>
+      <p:sp>
+        <p:nvSpPr>
+          <p:cNvPr id="9" name="TextBox 8"/>
+          <p:cNvSpPr txBox="1"/>
+          <p:nvPr/>
+        </p:nvSpPr>
+        <p:spPr>
+          <a:xfrm>
+            <a:off x="548640" y="6492240"/>
+            <a:ext cx="11094415" cy="274320"/>
+          </a:xfrm>
+          <a:prstGeom prst="rect">
+            <a:avLst/>
+          </a:prstGeom>
+          <a:noFill/>
+        </p:spPr>
+        <p:txBody>
+          <a:bodyPr wrap="square" anchor="ctr">
+            <a:spAutoFit/>
+          </a:bodyPr>
+          <a:lstStyle/>
+          <a:p>
+            <a:pPr>
+              <a:buNone/>
+            </a:pPr>
+            <a:r>
+              <a:rPr sz="1100" b="0" i="1">
+                <a:solidFill>
+                  <a:srgbClr val="6B7683"/>
+                </a:solidFill>
+                <a:latin typeface="Calibri"/>
+                <a:ea typeface="Microsoft YaHei"/>
+                <a:cs typeface="Microsoft YaHei"/>
+              </a:rPr>
+              <a:t>📖 次 = 冫(bīng, hơi thở) + 欠(qiàn, người đang HÁ MIỆNG ngáp) → ngáp liên tục NHIỀU LẦN → lượng từ đếm "lần"</a:t>
+            </a:r>
+          </a:p>
+        </p:txBody>
+      </p:sp>
     </p:spTree>
   </p:cSld>
   <p:clrMapOvr>
@@ -16220,7 +17068,7 @@
         <p:spPr>
           <a:xfrm>
             <a:off x="0" y="0"/>
-            <a:ext cx="12191695" cy="1207008"/>
+            <a:ext cx="12191695" cy="1337056"/>
           </a:xfrm>
           <a:prstGeom prst="rect">
             <a:avLst/>
@@ -16264,7 +17112,7 @@
         <p:spPr>
           <a:xfrm>
             <a:off x="548640" y="146304"/>
-            <a:ext cx="1371600" cy="384048"/>
+            <a:ext cx="1402486" cy="384048"/>
           </a:xfrm>
           <a:prstGeom prst="roundRect">
             <a:avLst/>
@@ -16292,10 +17140,12 @@
           </a:fontRef>
         </p:style>
         <p:txBody>
-          <a:bodyPr rtlCol="0" anchor="ctr" wrap="square" tIns="25400" bIns="25400"/>
-          <a:lstStyle/>
-          <a:p>
-            <a:pPr algn="ctr"/>
+          <a:bodyPr rtlCol="0" anchor="ctr" wrap="none" tIns="25400" bIns="25400"/>
+          <a:lstStyle/>
+          <a:p>
+            <a:pPr algn="ctr">
+              <a:buNone/>
+            </a:pPr>
             <a:r>
               <a:rPr sz="1600" b="1" i="0">
                 <a:solidFill>
@@ -16319,7 +17169,7 @@
         <p:spPr>
           <a:xfrm>
             <a:off x="548640" y="566928"/>
-            <a:ext cx="11094415" cy="566928"/>
+            <a:ext cx="11094415" cy="642112"/>
           </a:xfrm>
           <a:prstGeom prst="rect">
             <a:avLst/>
@@ -16332,6 +17182,9 @@
           </a:bodyPr>
           <a:lstStyle/>
           <a:p>
+            <a:pPr>
+              <a:buNone/>
+            </a:pPr>
             <a:r>
               <a:rPr sz="2700" b="1" i="0">
                 <a:solidFill>
@@ -16362,7 +17215,7 @@
         </p:blipFill>
         <p:spPr>
           <a:xfrm>
-            <a:off x="1768775" y="1481328"/>
+            <a:off x="1768775" y="1611376"/>
             <a:ext cx="2219384" cy="3108960"/>
           </a:xfrm>
           <a:prstGeom prst="rect">
@@ -16378,8 +17231,8 @@
         </p:nvSpPr>
         <p:spPr>
           <a:xfrm>
-            <a:off x="548640" y="4727448"/>
-            <a:ext cx="4659654" cy="1764792"/>
+            <a:off x="548640" y="4857496"/>
+            <a:ext cx="4659654" cy="1634744"/>
           </a:xfrm>
           <a:prstGeom prst="rect">
             <a:avLst/>
@@ -16392,7 +17245,9 @@
           </a:bodyPr>
           <a:lstStyle/>
           <a:p>
-            <a:pPr algn="ctr"/>
+            <a:pPr algn="ctr">
+              <a:buNone/>
+            </a:pPr>
             <a:r>
               <a:rPr sz="5400" b="1" i="0">
                 <a:solidFill>
@@ -16421,6 +17276,7 @@
               <a:spcBef>
                 <a:spcPts val="600"/>
               </a:spcBef>
+              <a:buNone/>
             </a:pPr>
             <a:r>
               <a:rPr sz="2200" b="0" i="1">
@@ -16439,6 +17295,7 @@
               <a:spcBef>
                 <a:spcPts val="400"/>
               </a:spcBef>
+              <a:buNone/>
             </a:pPr>
             <a:r>
               <a:rPr sz="1800" b="0" i="0">
@@ -16462,8 +17319,8 @@
         </p:nvSpPr>
         <p:spPr>
           <a:xfrm>
-            <a:off x="5665494" y="1481328"/>
-            <a:ext cx="5977561" cy="5010912"/>
+            <a:off x="5665494" y="1611376"/>
+            <a:ext cx="5977561" cy="4880864"/>
           </a:xfrm>
           <a:prstGeom prst="rect">
             <a:avLst/>
@@ -16476,6 +17333,9 @@
           </a:bodyPr>
           <a:lstStyle/>
           <a:p>
+            <a:pPr>
+              <a:buNone/>
+            </a:pPr>
             <a:r>
               <a:rPr sz="1600" b="1" i="0">
                 <a:solidFill>
@@ -16493,6 +17353,7 @@
               <a:spcBef>
                 <a:spcPts val="2200"/>
               </a:spcBef>
+              <a:buNone/>
             </a:pPr>
             <a:r>
               <a:rPr sz="1800" b="1" i="0">
@@ -16522,6 +17383,7 @@
               <a:spcBef>
                 <a:spcPts val="200"/>
               </a:spcBef>
+              <a:buNone/>
             </a:pPr>
             <a:r>
               <a:rPr sz="1400" b="0" i="1">
@@ -16540,6 +17402,7 @@
               <a:spcBef>
                 <a:spcPts val="100"/>
               </a:spcBef>
+              <a:buNone/>
             </a:pPr>
             <a:r>
               <a:rPr sz="1400" b="0" i="0">
@@ -16558,6 +17421,7 @@
               <a:spcBef>
                 <a:spcPts val="2200"/>
               </a:spcBef>
+              <a:buNone/>
             </a:pPr>
             <a:r>
               <a:rPr sz="1800" b="1" i="0">
@@ -16587,6 +17451,7 @@
               <a:spcBef>
                 <a:spcPts val="200"/>
               </a:spcBef>
+              <a:buNone/>
             </a:pPr>
             <a:r>
               <a:rPr sz="1400" b="0" i="1">
@@ -16605,6 +17470,7 @@
               <a:spcBef>
                 <a:spcPts val="100"/>
               </a:spcBef>
+              <a:buNone/>
             </a:pPr>
             <a:r>
               <a:rPr sz="1400" b="0" i="0">
@@ -16623,6 +17489,7 @@
               <a:spcBef>
                 <a:spcPts val="2200"/>
               </a:spcBef>
+              <a:buNone/>
             </a:pPr>
             <a:r>
               <a:rPr sz="1800" b="1" i="0">
@@ -16652,6 +17519,7 @@
               <a:spcBef>
                 <a:spcPts val="200"/>
               </a:spcBef>
+              <a:buNone/>
             </a:pPr>
             <a:r>
               <a:rPr sz="1400" b="0" i="1">
@@ -16670,6 +17538,7 @@
               <a:spcBef>
                 <a:spcPts val="100"/>
               </a:spcBef>
+              <a:buNone/>
             </a:pPr>
             <a:r>
               <a:rPr sz="1400" b="0" i="0">
@@ -16721,6 +17590,45 @@
           </a:ln>
         </p:spPr>
       </p:pic>
+      <p:sp>
+        <p:nvSpPr>
+          <p:cNvPr id="10" name="TextBox 9"/>
+          <p:cNvSpPr txBox="1"/>
+          <p:nvPr/>
+        </p:nvSpPr>
+        <p:spPr>
+          <a:xfrm>
+            <a:off x="548640" y="6492240"/>
+            <a:ext cx="11094415" cy="274320"/>
+          </a:xfrm>
+          <a:prstGeom prst="rect">
+            <a:avLst/>
+          </a:prstGeom>
+          <a:noFill/>
+        </p:spPr>
+        <p:txBody>
+          <a:bodyPr wrap="square" anchor="ctr">
+            <a:spAutoFit/>
+          </a:bodyPr>
+          <a:lstStyle/>
+          <a:p>
+            <a:pPr>
+              <a:buNone/>
+            </a:pPr>
+            <a:r>
+              <a:rPr sz="1100" b="0" i="1">
+                <a:solidFill>
+                  <a:srgbClr val="6B7683"/>
+                </a:solidFill>
+                <a:latin typeface="Calibri"/>
+                <a:ea typeface="Microsoft YaHei"/>
+                <a:cs typeface="Microsoft YaHei"/>
+              </a:rPr>
+              <a:t>📖 懂 = 忄(xīn, tâm trí) + 董(dǒng, giám đốc, người quản lý mọi việc) → tâm trí như GIÁM ĐỐC nắm rõ mọi việc → "hiểu"</a:t>
+            </a:r>
+          </a:p>
+        </p:txBody>
+      </p:sp>
     </p:spTree>
   </p:cSld>
   <p:clrMapOvr>
@@ -16814,7 +17722,7 @@
         <p:spPr>
           <a:xfrm>
             <a:off x="0" y="0"/>
-            <a:ext cx="12191695" cy="1207008"/>
+            <a:ext cx="12191695" cy="1337056"/>
           </a:xfrm>
           <a:prstGeom prst="rect">
             <a:avLst/>
@@ -16858,7 +17766,7 @@
         <p:spPr>
           <a:xfrm>
             <a:off x="548640" y="146304"/>
-            <a:ext cx="1371600" cy="384048"/>
+            <a:ext cx="1402486" cy="384048"/>
           </a:xfrm>
           <a:prstGeom prst="roundRect">
             <a:avLst/>
@@ -16886,10 +17794,12 @@
           </a:fontRef>
         </p:style>
         <p:txBody>
-          <a:bodyPr rtlCol="0" anchor="ctr" wrap="square" tIns="25400" bIns="25400"/>
-          <a:lstStyle/>
-          <a:p>
-            <a:pPr algn="ctr"/>
+          <a:bodyPr rtlCol="0" anchor="ctr" wrap="none" tIns="25400" bIns="25400"/>
+          <a:lstStyle/>
+          <a:p>
+            <a:pPr algn="ctr">
+              <a:buNone/>
+            </a:pPr>
             <a:r>
               <a:rPr sz="1600" b="1" i="0">
                 <a:solidFill>
@@ -16913,7 +17823,7 @@
         <p:spPr>
           <a:xfrm>
             <a:off x="548640" y="566928"/>
-            <a:ext cx="11094415" cy="566928"/>
+            <a:ext cx="11094415" cy="642112"/>
           </a:xfrm>
           <a:prstGeom prst="rect">
             <a:avLst/>
@@ -16926,6 +17836,9 @@
           </a:bodyPr>
           <a:lstStyle/>
           <a:p>
+            <a:pPr>
+              <a:buNone/>
+            </a:pPr>
             <a:r>
               <a:rPr sz="2700" b="1" i="0">
                 <a:solidFill>
@@ -16956,7 +17869,7 @@
         </p:blipFill>
         <p:spPr>
           <a:xfrm>
-            <a:off x="1323987" y="1481328"/>
+            <a:off x="1323987" y="1611376"/>
             <a:ext cx="3108960" cy="3108960"/>
           </a:xfrm>
           <a:prstGeom prst="rect">
@@ -16972,8 +17885,8 @@
         </p:nvSpPr>
         <p:spPr>
           <a:xfrm>
-            <a:off x="548640" y="4727448"/>
-            <a:ext cx="4659654" cy="1764792"/>
+            <a:off x="548640" y="4857496"/>
+            <a:ext cx="4659654" cy="1634744"/>
           </a:xfrm>
           <a:prstGeom prst="rect">
             <a:avLst/>
@@ -16986,7 +17899,9 @@
           </a:bodyPr>
           <a:lstStyle/>
           <a:p>
-            <a:pPr algn="ctr"/>
+            <a:pPr algn="ctr">
+              <a:buNone/>
+            </a:pPr>
             <a:r>
               <a:rPr sz="5400" b="1" i="0">
                 <a:solidFill>
@@ -17015,6 +17930,7 @@
               <a:spcBef>
                 <a:spcPts val="600"/>
               </a:spcBef>
+              <a:buNone/>
             </a:pPr>
             <a:r>
               <a:rPr sz="2200" b="0" i="1">
@@ -17033,6 +17949,7 @@
               <a:spcBef>
                 <a:spcPts val="400"/>
               </a:spcBef>
+              <a:buNone/>
             </a:pPr>
             <a:r>
               <a:rPr sz="1800" b="0" i="0">
@@ -17056,8 +17973,8 @@
         </p:nvSpPr>
         <p:spPr>
           <a:xfrm>
-            <a:off x="5665494" y="1481328"/>
-            <a:ext cx="5977561" cy="5010912"/>
+            <a:off x="5665494" y="1611376"/>
+            <a:ext cx="5977561" cy="4880864"/>
           </a:xfrm>
           <a:prstGeom prst="rect">
             <a:avLst/>
@@ -17070,6 +17987,9 @@
           </a:bodyPr>
           <a:lstStyle/>
           <a:p>
+            <a:pPr>
+              <a:buNone/>
+            </a:pPr>
             <a:r>
               <a:rPr sz="1600" b="1" i="0">
                 <a:solidFill>
@@ -17087,6 +18007,7 @@
               <a:spcBef>
                 <a:spcPts val="2200"/>
               </a:spcBef>
+              <a:buNone/>
             </a:pPr>
             <a:r>
               <a:rPr sz="1800" b="1" i="0">
@@ -17116,6 +18037,7 @@
               <a:spcBef>
                 <a:spcPts val="200"/>
               </a:spcBef>
+              <a:buNone/>
             </a:pPr>
             <a:r>
               <a:rPr sz="1400" b="0" i="1">
@@ -17134,6 +18056,7 @@
               <a:spcBef>
                 <a:spcPts val="100"/>
               </a:spcBef>
+              <a:buNone/>
             </a:pPr>
             <a:r>
               <a:rPr sz="1400" b="0" i="0">
@@ -17152,6 +18075,7 @@
               <a:spcBef>
                 <a:spcPts val="2200"/>
               </a:spcBef>
+              <a:buNone/>
             </a:pPr>
             <a:r>
               <a:rPr sz="1800" b="1" i="0">
@@ -17181,6 +18105,7 @@
               <a:spcBef>
                 <a:spcPts val="200"/>
               </a:spcBef>
+              <a:buNone/>
             </a:pPr>
             <a:r>
               <a:rPr sz="1400" b="0" i="1">
@@ -17199,6 +18124,7 @@
               <a:spcBef>
                 <a:spcPts val="100"/>
               </a:spcBef>
+              <a:buNone/>
             </a:pPr>
             <a:r>
               <a:rPr sz="1400" b="0" i="0">
@@ -17217,6 +18143,7 @@
               <a:spcBef>
                 <a:spcPts val="2200"/>
               </a:spcBef>
+              <a:buNone/>
             </a:pPr>
             <a:r>
               <a:rPr sz="1800" b="1" i="0">
@@ -17246,6 +18173,7 @@
               <a:spcBef>
                 <a:spcPts val="200"/>
               </a:spcBef>
+              <a:buNone/>
             </a:pPr>
             <a:r>
               <a:rPr sz="1400" b="0" i="1">
@@ -17264,6 +18192,7 @@
               <a:spcBef>
                 <a:spcPts val="100"/>
               </a:spcBef>
+              <a:buNone/>
             </a:pPr>
             <a:r>
               <a:rPr sz="1400" b="0" i="0">
@@ -17315,6 +18244,45 @@
           </a:ln>
         </p:spPr>
       </p:pic>
+      <p:sp>
+        <p:nvSpPr>
+          <p:cNvPr id="10" name="TextBox 9"/>
+          <p:cNvSpPr txBox="1"/>
+          <p:nvPr/>
+        </p:nvSpPr>
+        <p:spPr>
+          <a:xfrm>
+            <a:off x="548640" y="6492240"/>
+            <a:ext cx="11094415" cy="274320"/>
+          </a:xfrm>
+          <a:prstGeom prst="rect">
+            <a:avLst/>
+          </a:prstGeom>
+          <a:noFill/>
+        </p:spPr>
+        <p:txBody>
+          <a:bodyPr wrap="square" anchor="ctr">
+            <a:spAutoFit/>
+          </a:bodyPr>
+          <a:lstStyle/>
+          <a:p>
+            <a:pPr>
+              <a:buNone/>
+            </a:pPr>
+            <a:r>
+              <a:rPr sz="1100" b="0" i="1">
+                <a:solidFill>
+                  <a:srgbClr val="6B7683"/>
+                </a:solidFill>
+                <a:latin typeface="Calibri"/>
+                <a:ea typeface="Microsoft YaHei"/>
+                <a:cs typeface="Microsoft YaHei"/>
+              </a:rPr>
+              <a:t>📖 给 = 纟(sī, sợi dây/tơ) + 合(hé, hợp lại, khớp vào nhau) → dùng DÂY buộc mà TRAO cho nhau → "cho, tặng"</a:t>
+            </a:r>
+          </a:p>
+        </p:txBody>
+      </p:sp>
     </p:spTree>
   </p:cSld>
   <p:clrMapOvr>
@@ -17408,7 +18376,7 @@
         <p:spPr>
           <a:xfrm>
             <a:off x="0" y="0"/>
-            <a:ext cx="12191695" cy="1207008"/>
+            <a:ext cx="12191695" cy="1337056"/>
           </a:xfrm>
           <a:prstGeom prst="rect">
             <a:avLst/>
@@ -17452,7 +18420,7 @@
         <p:spPr>
           <a:xfrm>
             <a:off x="548640" y="146304"/>
-            <a:ext cx="1371600" cy="384048"/>
+            <a:ext cx="1402486" cy="384048"/>
           </a:xfrm>
           <a:prstGeom prst="roundRect">
             <a:avLst/>
@@ -17480,10 +18448,12 @@
           </a:fontRef>
         </p:style>
         <p:txBody>
-          <a:bodyPr rtlCol="0" anchor="ctr" wrap="square" tIns="25400" bIns="25400"/>
-          <a:lstStyle/>
-          <a:p>
-            <a:pPr algn="ctr"/>
+          <a:bodyPr rtlCol="0" anchor="ctr" wrap="none" tIns="25400" bIns="25400"/>
+          <a:lstStyle/>
+          <a:p>
+            <a:pPr algn="ctr">
+              <a:buNone/>
+            </a:pPr>
             <a:r>
               <a:rPr sz="1600" b="1" i="0">
                 <a:solidFill>
@@ -17507,7 +18477,7 @@
         <p:spPr>
           <a:xfrm>
             <a:off x="548640" y="566928"/>
-            <a:ext cx="11094415" cy="566928"/>
+            <a:ext cx="11094415" cy="642112"/>
           </a:xfrm>
           <a:prstGeom prst="rect">
             <a:avLst/>
@@ -17520,6 +18490,9 @@
           </a:bodyPr>
           <a:lstStyle/>
           <a:p>
+            <a:pPr>
+              <a:buNone/>
+            </a:pPr>
             <a:r>
               <a:rPr sz="2700" b="1" i="0">
                 <a:solidFill>
@@ -17550,7 +18523,7 @@
         </p:blipFill>
         <p:spPr>
           <a:xfrm>
-            <a:off x="1323987" y="1481328"/>
+            <a:off x="1323987" y="1611376"/>
             <a:ext cx="3108960" cy="3108960"/>
           </a:xfrm>
           <a:prstGeom prst="rect">
@@ -17566,8 +18539,8 @@
         </p:nvSpPr>
         <p:spPr>
           <a:xfrm>
-            <a:off x="548640" y="4727448"/>
-            <a:ext cx="4659654" cy="1764792"/>
+            <a:off x="548640" y="4857496"/>
+            <a:ext cx="4659654" cy="1634744"/>
           </a:xfrm>
           <a:prstGeom prst="rect">
             <a:avLst/>
@@ -17580,7 +18553,9 @@
           </a:bodyPr>
           <a:lstStyle/>
           <a:p>
-            <a:pPr algn="ctr"/>
+            <a:pPr algn="ctr">
+              <a:buNone/>
+            </a:pPr>
             <a:r>
               <a:rPr sz="5400" b="1" i="0">
                 <a:solidFill>
@@ -17609,6 +18584,7 @@
               <a:spcBef>
                 <a:spcPts val="600"/>
               </a:spcBef>
+              <a:buNone/>
             </a:pPr>
             <a:r>
               <a:rPr sz="2200" b="0" i="1">
@@ -17627,6 +18603,7 @@
               <a:spcBef>
                 <a:spcPts val="400"/>
               </a:spcBef>
+              <a:buNone/>
             </a:pPr>
             <a:r>
               <a:rPr sz="1800" b="0" i="0">
@@ -17650,8 +18627,8 @@
         </p:nvSpPr>
         <p:spPr>
           <a:xfrm>
-            <a:off x="5665494" y="1481328"/>
-            <a:ext cx="5977561" cy="5010912"/>
+            <a:off x="5665494" y="1611376"/>
+            <a:ext cx="5977561" cy="4880864"/>
           </a:xfrm>
           <a:prstGeom prst="rect">
             <a:avLst/>
@@ -17664,6 +18641,9 @@
           </a:bodyPr>
           <a:lstStyle/>
           <a:p>
+            <a:pPr>
+              <a:buNone/>
+            </a:pPr>
             <a:r>
               <a:rPr sz="1600" b="1" i="0">
                 <a:solidFill>
@@ -17681,6 +18661,7 @@
               <a:spcBef>
                 <a:spcPts val="2200"/>
               </a:spcBef>
+              <a:buNone/>
             </a:pPr>
             <a:r>
               <a:rPr sz="1800" b="1" i="0">
@@ -17710,6 +18691,7 @@
               <a:spcBef>
                 <a:spcPts val="200"/>
               </a:spcBef>
+              <a:buNone/>
             </a:pPr>
             <a:r>
               <a:rPr sz="1400" b="0" i="1">
@@ -17728,6 +18710,7 @@
               <a:spcBef>
                 <a:spcPts val="100"/>
               </a:spcBef>
+              <a:buNone/>
             </a:pPr>
             <a:r>
               <a:rPr sz="1400" b="0" i="0">
@@ -17746,6 +18729,7 @@
               <a:spcBef>
                 <a:spcPts val="2200"/>
               </a:spcBef>
+              <a:buNone/>
             </a:pPr>
             <a:r>
               <a:rPr sz="1800" b="1" i="0">
@@ -17775,6 +18759,7 @@
               <a:spcBef>
                 <a:spcPts val="200"/>
               </a:spcBef>
+              <a:buNone/>
             </a:pPr>
             <a:r>
               <a:rPr sz="1400" b="0" i="1">
@@ -17793,6 +18778,7 @@
               <a:spcBef>
                 <a:spcPts val="100"/>
               </a:spcBef>
+              <a:buNone/>
             </a:pPr>
             <a:r>
               <a:rPr sz="1400" b="0" i="0">
@@ -17811,6 +18797,7 @@
               <a:spcBef>
                 <a:spcPts val="2200"/>
               </a:spcBef>
+              <a:buNone/>
             </a:pPr>
             <a:r>
               <a:rPr sz="1800" b="1" i="0">
@@ -17840,6 +18827,7 @@
               <a:spcBef>
                 <a:spcPts val="200"/>
               </a:spcBef>
+              <a:buNone/>
             </a:pPr>
             <a:r>
               <a:rPr sz="1400" b="0" i="1">
@@ -17858,6 +18846,7 @@
               <a:spcBef>
                 <a:spcPts val="100"/>
               </a:spcBef>
+              <a:buNone/>
             </a:pPr>
             <a:r>
               <a:rPr sz="1400" b="0" i="0">
@@ -17909,6 +18898,45 @@
           </a:ln>
         </p:spPr>
       </p:pic>
+      <p:sp>
+        <p:nvSpPr>
+          <p:cNvPr id="10" name="TextBox 9"/>
+          <p:cNvSpPr txBox="1"/>
+          <p:nvPr/>
+        </p:nvSpPr>
+        <p:spPr>
+          <a:xfrm>
+            <a:off x="548640" y="6492240"/>
+            <a:ext cx="11094415" cy="274320"/>
+          </a:xfrm>
+          <a:prstGeom prst="rect">
+            <a:avLst/>
+          </a:prstGeom>
+          <a:noFill/>
+        </p:spPr>
+        <p:txBody>
+          <a:bodyPr wrap="square" anchor="ctr">
+            <a:spAutoFit/>
+          </a:bodyPr>
+          <a:lstStyle/>
+          <a:p>
+            <a:pPr>
+              <a:buNone/>
+            </a:pPr>
+            <a:r>
+              <a:rPr sz="1100" b="0" i="1">
+                <a:solidFill>
+                  <a:srgbClr val="6B7683"/>
+                </a:solidFill>
+                <a:latin typeface="Calibri"/>
+                <a:ea typeface="Microsoft YaHei"/>
+                <a:cs typeface="Microsoft YaHei"/>
+              </a:rPr>
+              <a:t>📖 接 = 扌(shǒu, tay) → giơ TAY ra ĐỠ lấy, nối lại → "đón, tiếp, nối"</a:t>
+            </a:r>
+          </a:p>
+        </p:txBody>
+      </p:sp>
     </p:spTree>
   </p:cSld>
   <p:clrMapOvr>
@@ -18002,7 +19030,7 @@
         <p:spPr>
           <a:xfrm>
             <a:off x="0" y="0"/>
-            <a:ext cx="12191695" cy="1207008"/>
+            <a:ext cx="12191695" cy="1337056"/>
           </a:xfrm>
           <a:prstGeom prst="rect">
             <a:avLst/>
@@ -18046,7 +19074,7 @@
         <p:spPr>
           <a:xfrm>
             <a:off x="548640" y="146304"/>
-            <a:ext cx="1371600" cy="384048"/>
+            <a:ext cx="1402486" cy="384048"/>
           </a:xfrm>
           <a:prstGeom prst="roundRect">
             <a:avLst/>
@@ -18074,10 +19102,12 @@
           </a:fontRef>
         </p:style>
         <p:txBody>
-          <a:bodyPr rtlCol="0" anchor="ctr" wrap="square" tIns="25400" bIns="25400"/>
-          <a:lstStyle/>
-          <a:p>
-            <a:pPr algn="ctr"/>
+          <a:bodyPr rtlCol="0" anchor="ctr" wrap="none" tIns="25400" bIns="25400"/>
+          <a:lstStyle/>
+          <a:p>
+            <a:pPr algn="ctr">
+              <a:buNone/>
+            </a:pPr>
             <a:r>
               <a:rPr sz="1600" b="1" i="0">
                 <a:solidFill>
@@ -18101,7 +19131,7 @@
         <p:spPr>
           <a:xfrm>
             <a:off x="548640" y="566928"/>
-            <a:ext cx="11094415" cy="566928"/>
+            <a:ext cx="11094415" cy="642112"/>
           </a:xfrm>
           <a:prstGeom prst="rect">
             <a:avLst/>
@@ -18114,6 +19144,9 @@
           </a:bodyPr>
           <a:lstStyle/>
           <a:p>
+            <a:pPr>
+              <a:buNone/>
+            </a:pPr>
             <a:r>
               <a:rPr sz="2700" b="1" i="0">
                 <a:solidFill>
@@ -18136,8 +19169,8 @@
         </p:nvSpPr>
         <p:spPr>
           <a:xfrm>
-            <a:off x="548640" y="1481328"/>
-            <a:ext cx="4659654" cy="5010912"/>
+            <a:off x="548640" y="1611376"/>
+            <a:ext cx="4659654" cy="4880864"/>
           </a:xfrm>
           <a:prstGeom prst="rect">
             <a:avLst/>
@@ -18150,7 +19183,9 @@
           </a:bodyPr>
           <a:lstStyle/>
           <a:p>
-            <a:pPr algn="ctr"/>
+            <a:pPr algn="ctr">
+              <a:buNone/>
+            </a:pPr>
             <a:r>
               <a:rPr sz="5400" b="1" i="0">
                 <a:solidFill>
@@ -18179,6 +19214,7 @@
               <a:spcBef>
                 <a:spcPts val="600"/>
               </a:spcBef>
+              <a:buNone/>
             </a:pPr>
             <a:r>
               <a:rPr sz="2200" b="0" i="1">
@@ -18197,6 +19233,7 @@
               <a:spcBef>
                 <a:spcPts val="400"/>
               </a:spcBef>
+              <a:buNone/>
             </a:pPr>
             <a:r>
               <a:rPr sz="1800" b="0" i="0">
@@ -18220,8 +19257,8 @@
         </p:nvSpPr>
         <p:spPr>
           <a:xfrm>
-            <a:off x="5665494" y="1481328"/>
-            <a:ext cx="5977561" cy="5010912"/>
+            <a:off x="5665494" y="1611376"/>
+            <a:ext cx="5977561" cy="4880864"/>
           </a:xfrm>
           <a:prstGeom prst="rect">
             <a:avLst/>
@@ -18234,6 +19271,9 @@
           </a:bodyPr>
           <a:lstStyle/>
           <a:p>
+            <a:pPr>
+              <a:buNone/>
+            </a:pPr>
             <a:r>
               <a:rPr sz="1600" b="1" i="0">
                 <a:solidFill>
@@ -18251,6 +19291,7 @@
               <a:spcBef>
                 <a:spcPts val="2200"/>
               </a:spcBef>
+              <a:buNone/>
             </a:pPr>
             <a:r>
               <a:rPr sz="1800" b="1" i="0">
@@ -18280,6 +19321,7 @@
               <a:spcBef>
                 <a:spcPts val="200"/>
               </a:spcBef>
+              <a:buNone/>
             </a:pPr>
             <a:r>
               <a:rPr sz="1400" b="0" i="1">
@@ -18298,6 +19340,7 @@
               <a:spcBef>
                 <a:spcPts val="100"/>
               </a:spcBef>
+              <a:buNone/>
             </a:pPr>
             <a:r>
               <a:rPr sz="1400" b="0" i="0">
@@ -18316,6 +19359,7 @@
               <a:spcBef>
                 <a:spcPts val="2200"/>
               </a:spcBef>
+              <a:buNone/>
             </a:pPr>
             <a:r>
               <a:rPr sz="1800" b="1" i="0">
@@ -18345,6 +19389,7 @@
               <a:spcBef>
                 <a:spcPts val="200"/>
               </a:spcBef>
+              <a:buNone/>
             </a:pPr>
             <a:r>
               <a:rPr sz="1400" b="0" i="1">
@@ -18363,6 +19408,7 @@
               <a:spcBef>
                 <a:spcPts val="100"/>
               </a:spcBef>
+              <a:buNone/>
             </a:pPr>
             <a:r>
               <a:rPr sz="1400" b="0" i="0">
@@ -18381,6 +19427,7 @@
               <a:spcBef>
                 <a:spcPts val="2200"/>
               </a:spcBef>
+              <a:buNone/>
             </a:pPr>
             <a:r>
               <a:rPr sz="1800" b="1" i="0">
@@ -18410,6 +19457,7 @@
               <a:spcBef>
                 <a:spcPts val="200"/>
               </a:spcBef>
+              <a:buNone/>
             </a:pPr>
             <a:r>
               <a:rPr sz="1400" b="0" i="1">
@@ -18428,6 +19476,7 @@
               <a:spcBef>
                 <a:spcPts val="100"/>
               </a:spcBef>
+              <a:buNone/>
             </a:pPr>
             <a:r>
               <a:rPr sz="1400" b="0" i="0">
@@ -18479,6 +19528,45 @@
           </a:ln>
         </p:spPr>
       </p:pic>
+      <p:sp>
+        <p:nvSpPr>
+          <p:cNvPr id="9" name="TextBox 8"/>
+          <p:cNvSpPr txBox="1"/>
+          <p:nvPr/>
+        </p:nvSpPr>
+        <p:spPr>
+          <a:xfrm>
+            <a:off x="548640" y="6492240"/>
+            <a:ext cx="11094415" cy="274320"/>
+          </a:xfrm>
+          <a:prstGeom prst="rect">
+            <a:avLst/>
+          </a:prstGeom>
+          <a:noFill/>
+        </p:spPr>
+        <p:txBody>
+          <a:bodyPr wrap="square" anchor="ctr">
+            <a:spAutoFit/>
+          </a:bodyPr>
+          <a:lstStyle/>
+          <a:p>
+            <a:pPr>
+              <a:buNone/>
+            </a:pPr>
+            <a:r>
+              <a:rPr sz="1100" b="0" i="1">
+                <a:solidFill>
+                  <a:srgbClr val="6B7683"/>
+                </a:solidFill>
+                <a:latin typeface="Calibri"/>
+                <a:ea typeface="Microsoft YaHei"/>
+                <a:cs typeface="Microsoft YaHei"/>
+              </a:rPr>
+              <a:t>📖 就 (jiù) nghe giống trong từ "tựu trường"/"thành tựu" (đến nơi, đạt được) → nghĩa "liền, thì ngay"</a:t>
+            </a:r>
+          </a:p>
+        </p:txBody>
+      </p:sp>
     </p:spTree>
   </p:cSld>
   <p:clrMapOvr>
